--- a/04 - Exploration vs Exploitation/slides.pptx
+++ b/04 - Exploration vs Exploitation/slides.pptx
@@ -5,7 +5,7 @@
     <p:sldMasterId id="2147483659" r:id="rId4"/>
   </p:sldMasterIdLst>
   <p:notesMasterIdLst>
-    <p:notesMasterId r:id="rId37"/>
+    <p:notesMasterId r:id="rId39"/>
   </p:notesMasterIdLst>
   <p:sldIdLst>
     <p:sldId id="256" r:id="rId5"/>
@@ -27,36 +27,38 @@
     <p:sldId id="288" r:id="rId21"/>
     <p:sldId id="293" r:id="rId22"/>
     <p:sldId id="289" r:id="rId23"/>
-    <p:sldId id="273" r:id="rId24"/>
-    <p:sldId id="274" r:id="rId25"/>
-    <p:sldId id="281" r:id="rId26"/>
-    <p:sldId id="282" r:id="rId27"/>
-    <p:sldId id="283" r:id="rId28"/>
-    <p:sldId id="296" r:id="rId29"/>
-    <p:sldId id="285" r:id="rId30"/>
-    <p:sldId id="286" r:id="rId31"/>
-    <p:sldId id="287" r:id="rId32"/>
-    <p:sldId id="291" r:id="rId33"/>
-    <p:sldId id="290" r:id="rId34"/>
-    <p:sldId id="297" r:id="rId35"/>
-    <p:sldId id="292" r:id="rId36"/>
+    <p:sldId id="298" r:id="rId24"/>
+    <p:sldId id="273" r:id="rId25"/>
+    <p:sldId id="274" r:id="rId26"/>
+    <p:sldId id="281" r:id="rId27"/>
+    <p:sldId id="282" r:id="rId28"/>
+    <p:sldId id="283" r:id="rId29"/>
+    <p:sldId id="296" r:id="rId30"/>
+    <p:sldId id="285" r:id="rId31"/>
+    <p:sldId id="286" r:id="rId32"/>
+    <p:sldId id="287" r:id="rId33"/>
+    <p:sldId id="299" r:id="rId34"/>
+    <p:sldId id="291" r:id="rId35"/>
+    <p:sldId id="290" r:id="rId36"/>
+    <p:sldId id="297" r:id="rId37"/>
+    <p:sldId id="292" r:id="rId38"/>
   </p:sldIdLst>
   <p:sldSz cx="9144000" cy="6858000" type="screen4x3"/>
   <p:notesSz cx="6858000" cy="9144000"/>
   <p:embeddedFontLst>
     <p:embeddedFont>
       <p:font typeface="Economica" panose="02000506040000020004" pitchFamily="2" charset="77"/>
-      <p:regular r:id="rId38"/>
-      <p:bold r:id="rId39"/>
-      <p:italic r:id="rId40"/>
-      <p:boldItalic r:id="rId41"/>
+      <p:regular r:id="rId40"/>
+      <p:bold r:id="rId41"/>
+      <p:italic r:id="rId42"/>
+      <p:boldItalic r:id="rId43"/>
     </p:embeddedFont>
     <p:embeddedFont>
       <p:font typeface="Open Sans" panose="020B0606030504020204" pitchFamily="34" charset="0"/>
-      <p:regular r:id="rId42"/>
-      <p:bold r:id="rId43"/>
-      <p:italic r:id="rId44"/>
-      <p:boldItalic r:id="rId45"/>
+      <p:regular r:id="rId44"/>
+      <p:bold r:id="rId45"/>
+      <p:italic r:id="rId46"/>
+      <p:boldItalic r:id="rId47"/>
     </p:embeddedFont>
   </p:embeddedFontLst>
   <p:defaultTextStyle>
@@ -296,1461 +298,29 @@
 </p:presentation>
 </file>
 
-<file path=ppt/revisionInfo.xml><?xml version="1.0" encoding="utf-8"?>
-<p1510:revInfo xmlns:a="http://schemas.openxmlformats.org/drawingml/2006/main" xmlns:r="http://schemas.openxmlformats.org/officeDocument/2006/relationships" xmlns:p1510="http://schemas.microsoft.com/office/powerpoint/2015/10/main">
-  <p1510:revLst>
-    <p1510:client id="{F3D8C37A-1F3B-AE4D-A11D-0FFB39BAB01F}" v="2" dt="2025-09-10T07:44:22.492"/>
-  </p1510:revLst>
-</p1510:revInfo>
-</file>
-
 <file path=ppt/changesInfos/changesInfo1.xml><?xml version="1.0" encoding="utf-8"?>
 <pc:chgInfo xmlns:a="http://schemas.openxmlformats.org/drawingml/2006/main" xmlns:r="http://schemas.openxmlformats.org/officeDocument/2006/relationships" xmlns:ac="http://schemas.microsoft.com/office/drawing/2013/main/command" xmlns:pc="http://schemas.microsoft.com/office/powerpoint/2013/main/command">
   <pc:docChgLst>
     <pc:chgData name="Riccardo Berta" userId="c8694f89-bba4-4576-b0a8-456619ca5a8c" providerId="ADAL" clId="{FDDBFC5A-5EA9-5330-BEB8-433D7E3B4C4E}"/>
-    <pc:docChg chg="custSel modSld">
-      <pc:chgData name="Riccardo Berta" userId="c8694f89-bba4-4576-b0a8-456619ca5a8c" providerId="ADAL" clId="{FDDBFC5A-5EA9-5330-BEB8-433D7E3B4C4E}" dt="2025-09-10T07:44:24.506" v="27" actId="1076"/>
-      <pc:docMkLst>
-        <pc:docMk/>
-      </pc:docMkLst>
-      <pc:sldChg chg="addSp delSp modSp mod">
-        <pc:chgData name="Riccardo Berta" userId="c8694f89-bba4-4576-b0a8-456619ca5a8c" providerId="ADAL" clId="{FDDBFC5A-5EA9-5330-BEB8-433D7E3B4C4E}" dt="2025-09-10T07:43:50.018" v="3" actId="1076"/>
-        <pc:sldMkLst>
-          <pc:docMk/>
-          <pc:sldMk cId="3210365339" sldId="266"/>
-        </pc:sldMkLst>
-        <pc:picChg chg="add mod">
-          <ac:chgData name="Riccardo Berta" userId="c8694f89-bba4-4576-b0a8-456619ca5a8c" providerId="ADAL" clId="{FDDBFC5A-5EA9-5330-BEB8-433D7E3B4C4E}" dt="2025-09-10T07:43:50.018" v="3" actId="1076"/>
-          <ac:picMkLst>
-            <pc:docMk/>
-            <pc:sldMk cId="3210365339" sldId="266"/>
-            <ac:picMk id="2" creationId="{F7D3EE45-AD34-1372-27E8-2ADF8C4654C2}"/>
-          </ac:picMkLst>
-        </pc:picChg>
-        <pc:picChg chg="del">
-          <ac:chgData name="Riccardo Berta" userId="c8694f89-bba4-4576-b0a8-456619ca5a8c" providerId="ADAL" clId="{FDDBFC5A-5EA9-5330-BEB8-433D7E3B4C4E}" dt="2025-09-10T07:43:43.197" v="0" actId="478"/>
-          <ac:picMkLst>
-            <pc:docMk/>
-            <pc:sldMk cId="3210365339" sldId="266"/>
-            <ac:picMk id="4" creationId="{B6D5C3F8-D725-CF80-C48C-CE3CDBF4E7D1}"/>
-          </ac:picMkLst>
-        </pc:picChg>
-      </pc:sldChg>
-      <pc:sldChg chg="addSp delSp modSp mod">
-        <pc:chgData name="Riccardo Berta" userId="c8694f89-bba4-4576-b0a8-456619ca5a8c" providerId="ADAL" clId="{FDDBFC5A-5EA9-5330-BEB8-433D7E3B4C4E}" dt="2025-09-10T07:44:24.506" v="27" actId="1076"/>
-        <pc:sldMkLst>
-          <pc:docMk/>
-          <pc:sldMk cId="3432487420" sldId="276"/>
-        </pc:sldMkLst>
-        <pc:spChg chg="mod">
-          <ac:chgData name="Riccardo Berta" userId="c8694f89-bba4-4576-b0a8-456619ca5a8c" providerId="ADAL" clId="{FDDBFC5A-5EA9-5330-BEB8-433D7E3B4C4E}" dt="2025-09-10T07:44:21.864" v="25" actId="14100"/>
-          <ac:spMkLst>
-            <pc:docMk/>
-            <pc:sldMk cId="3432487420" sldId="276"/>
-            <ac:spMk id="84" creationId="{00000000-0000-0000-0000-000000000000}"/>
-          </ac:spMkLst>
-        </pc:spChg>
-        <pc:picChg chg="add mod">
-          <ac:chgData name="Riccardo Berta" userId="c8694f89-bba4-4576-b0a8-456619ca5a8c" providerId="ADAL" clId="{FDDBFC5A-5EA9-5330-BEB8-433D7E3B4C4E}" dt="2025-09-10T07:44:24.506" v="27" actId="1076"/>
-          <ac:picMkLst>
-            <pc:docMk/>
-            <pc:sldMk cId="3432487420" sldId="276"/>
-            <ac:picMk id="2" creationId="{38D92C8D-1659-53E5-4FA3-B491EB2DE856}"/>
-          </ac:picMkLst>
-        </pc:picChg>
-        <pc:picChg chg="del">
-          <ac:chgData name="Riccardo Berta" userId="c8694f89-bba4-4576-b0a8-456619ca5a8c" providerId="ADAL" clId="{FDDBFC5A-5EA9-5330-BEB8-433D7E3B4C4E}" dt="2025-09-10T07:44:18.254" v="24" actId="478"/>
-          <ac:picMkLst>
-            <pc:docMk/>
-            <pc:sldMk cId="3432487420" sldId="276"/>
-            <ac:picMk id="3" creationId="{D1E8EE98-A507-049A-9A15-3D872207AD73}"/>
-          </ac:picMkLst>
-        </pc:picChg>
-      </pc:sldChg>
-    </pc:docChg>
-  </pc:docChgLst>
-  <pc:docChgLst>
-    <pc:chgData name="Riccardo Berta" userId="c8694f89-bba4-4576-b0a8-456619ca5a8c" providerId="ADAL" clId="{35C5D11B-424E-5B41-A9C4-509DD0A59BFD}"/>
-    <pc:docChg chg="custSel delSld modSld sldOrd">
-      <pc:chgData name="Riccardo Berta" userId="c8694f89-bba4-4576-b0a8-456619ca5a8c" providerId="ADAL" clId="{35C5D11B-424E-5B41-A9C4-509DD0A59BFD}" dt="2022-04-01T12:12:56.906" v="135" actId="20577"/>
-      <pc:docMkLst>
-        <pc:docMk/>
-      </pc:docMkLst>
-      <pc:sldChg chg="modSp">
-        <pc:chgData name="Riccardo Berta" userId="c8694f89-bba4-4576-b0a8-456619ca5a8c" providerId="ADAL" clId="{35C5D11B-424E-5B41-A9C4-509DD0A59BFD}" dt="2022-03-22T07:34:03.014" v="5"/>
-        <pc:sldMkLst>
-          <pc:docMk/>
-          <pc:sldMk cId="0" sldId="257"/>
-        </pc:sldMkLst>
-      </pc:sldChg>
-      <pc:sldChg chg="modSp">
-        <pc:chgData name="Riccardo Berta" userId="c8694f89-bba4-4576-b0a8-456619ca5a8c" providerId="ADAL" clId="{35C5D11B-424E-5B41-A9C4-509DD0A59BFD}" dt="2022-03-22T07:34:23.187" v="6"/>
-        <pc:sldMkLst>
-          <pc:docMk/>
-          <pc:sldMk cId="1899110855" sldId="258"/>
-        </pc:sldMkLst>
-      </pc:sldChg>
-      <pc:sldChg chg="modSp">
-        <pc:chgData name="Riccardo Berta" userId="c8694f89-bba4-4576-b0a8-456619ca5a8c" providerId="ADAL" clId="{35C5D11B-424E-5B41-A9C4-509DD0A59BFD}" dt="2022-03-22T07:39:20.191" v="16"/>
-        <pc:sldMkLst>
-          <pc:docMk/>
-          <pc:sldMk cId="3018556184" sldId="259"/>
-        </pc:sldMkLst>
-      </pc:sldChg>
-      <pc:sldChg chg="modSp mod">
-        <pc:chgData name="Riccardo Berta" userId="c8694f89-bba4-4576-b0a8-456619ca5a8c" providerId="ADAL" clId="{35C5D11B-424E-5B41-A9C4-509DD0A59BFD}" dt="2022-03-23T07:58:19.601" v="41" actId="20577"/>
-        <pc:sldMkLst>
-          <pc:docMk/>
-          <pc:sldMk cId="1104208334" sldId="260"/>
-        </pc:sldMkLst>
-      </pc:sldChg>
-      <pc:sldChg chg="modSp">
-        <pc:chgData name="Riccardo Berta" userId="c8694f89-bba4-4576-b0a8-456619ca5a8c" providerId="ADAL" clId="{35C5D11B-424E-5B41-A9C4-509DD0A59BFD}" dt="2022-03-22T07:42:45.729" v="19"/>
-        <pc:sldMkLst>
-          <pc:docMk/>
-          <pc:sldMk cId="1290395919" sldId="261"/>
-        </pc:sldMkLst>
-      </pc:sldChg>
-      <pc:sldChg chg="modSp mod modNotes">
-        <pc:chgData name="Riccardo Berta" userId="c8694f89-bba4-4576-b0a8-456619ca5a8c" providerId="ADAL" clId="{35C5D11B-424E-5B41-A9C4-509DD0A59BFD}" dt="2022-03-25T14:38:53.205" v="88" actId="20577"/>
-        <pc:sldMkLst>
-          <pc:docMk/>
-          <pc:sldMk cId="4130549615" sldId="262"/>
-        </pc:sldMkLst>
-      </pc:sldChg>
-      <pc:sldChg chg="modSp">
-        <pc:chgData name="Riccardo Berta" userId="c8694f89-bba4-4576-b0a8-456619ca5a8c" providerId="ADAL" clId="{35C5D11B-424E-5B41-A9C4-509DD0A59BFD}" dt="2022-03-22T07:43:16.691" v="21"/>
-        <pc:sldMkLst>
-          <pc:docMk/>
-          <pc:sldMk cId="3102138681" sldId="263"/>
-        </pc:sldMkLst>
-      </pc:sldChg>
-      <pc:sldChg chg="modSp mod">
-        <pc:chgData name="Riccardo Berta" userId="c8694f89-bba4-4576-b0a8-456619ca5a8c" providerId="ADAL" clId="{35C5D11B-424E-5B41-A9C4-509DD0A59BFD}" dt="2022-03-25T15:16:54.434" v="126" actId="20577"/>
-        <pc:sldMkLst>
-          <pc:docMk/>
-          <pc:sldMk cId="2113557187" sldId="264"/>
-        </pc:sldMkLst>
-      </pc:sldChg>
-      <pc:sldChg chg="modSp">
-        <pc:chgData name="Riccardo Berta" userId="c8694f89-bba4-4576-b0a8-456619ca5a8c" providerId="ADAL" clId="{35C5D11B-424E-5B41-A9C4-509DD0A59BFD}" dt="2022-03-22T07:44:03.240" v="24"/>
-        <pc:sldMkLst>
-          <pc:docMk/>
-          <pc:sldMk cId="2045385232" sldId="265"/>
-        </pc:sldMkLst>
-      </pc:sldChg>
-      <pc:sldChg chg="modSp">
-        <pc:chgData name="Riccardo Berta" userId="c8694f89-bba4-4576-b0a8-456619ca5a8c" providerId="ADAL" clId="{35C5D11B-424E-5B41-A9C4-509DD0A59BFD}" dt="2022-03-22T07:44:22.734" v="25"/>
-        <pc:sldMkLst>
-          <pc:docMk/>
-          <pc:sldMk cId="4181844165" sldId="266"/>
-        </pc:sldMkLst>
-      </pc:sldChg>
-      <pc:sldChg chg="modSp mod">
-        <pc:chgData name="Riccardo Berta" userId="c8694f89-bba4-4576-b0a8-456619ca5a8c" providerId="ADAL" clId="{35C5D11B-424E-5B41-A9C4-509DD0A59BFD}" dt="2022-04-01T12:12:56.906" v="135" actId="20577"/>
-        <pc:sldMkLst>
-          <pc:docMk/>
-          <pc:sldMk cId="216455838" sldId="267"/>
-        </pc:sldMkLst>
-      </pc:sldChg>
-      <pc:sldChg chg="del">
-        <pc:chgData name="Riccardo Berta" userId="c8694f89-bba4-4576-b0a8-456619ca5a8c" providerId="ADAL" clId="{35C5D11B-424E-5B41-A9C4-509DD0A59BFD}" dt="2022-03-22T07:29:13.529" v="3" actId="2696"/>
-        <pc:sldMkLst>
-          <pc:docMk/>
-          <pc:sldMk cId="925286286" sldId="268"/>
-        </pc:sldMkLst>
-      </pc:sldChg>
-      <pc:sldChg chg="modSp">
-        <pc:chgData name="Riccardo Berta" userId="c8694f89-bba4-4576-b0a8-456619ca5a8c" providerId="ADAL" clId="{35C5D11B-424E-5B41-A9C4-509DD0A59BFD}" dt="2022-03-22T07:44:59.403" v="28"/>
-        <pc:sldMkLst>
-          <pc:docMk/>
-          <pc:sldMk cId="3471997037" sldId="269"/>
-        </pc:sldMkLst>
-      </pc:sldChg>
-      <pc:sldChg chg="modSp mod">
-        <pc:chgData name="Riccardo Berta" userId="c8694f89-bba4-4576-b0a8-456619ca5a8c" providerId="ADAL" clId="{35C5D11B-424E-5B41-A9C4-509DD0A59BFD}" dt="2022-03-22T07:47:03.443" v="33"/>
-        <pc:sldMkLst>
-          <pc:docMk/>
-          <pc:sldMk cId="3130917410" sldId="270"/>
-        </pc:sldMkLst>
-      </pc:sldChg>
-      <pc:sldChg chg="modSp mod">
-        <pc:chgData name="Riccardo Berta" userId="c8694f89-bba4-4576-b0a8-456619ca5a8c" providerId="ADAL" clId="{35C5D11B-424E-5B41-A9C4-509DD0A59BFD}" dt="2022-03-22T07:47:51.976" v="38"/>
-        <pc:sldMkLst>
-          <pc:docMk/>
-          <pc:sldMk cId="2266699268" sldId="271"/>
-        </pc:sldMkLst>
-      </pc:sldChg>
-      <pc:sldChg chg="modSp mod ord">
-        <pc:chgData name="Riccardo Berta" userId="c8694f89-bba4-4576-b0a8-456619ca5a8c" providerId="ADAL" clId="{35C5D11B-424E-5B41-A9C4-509DD0A59BFD}" dt="2022-03-22T07:29:04.952" v="2"/>
-        <pc:sldMkLst>
-          <pc:docMk/>
-          <pc:sldMk cId="993270251" sldId="272"/>
-        </pc:sldMkLst>
-      </pc:sldChg>
-      <pc:sldChg chg="modSp">
-        <pc:chgData name="Riccardo Berta" userId="c8694f89-bba4-4576-b0a8-456619ca5a8c" providerId="ADAL" clId="{35C5D11B-424E-5B41-A9C4-509DD0A59BFD}" dt="2022-03-22T07:48:04.230" v="39"/>
-        <pc:sldMkLst>
-          <pc:docMk/>
-          <pc:sldMk cId="3843819371" sldId="273"/>
-        </pc:sldMkLst>
-      </pc:sldChg>
-      <pc:sldChg chg="modSp">
-        <pc:chgData name="Riccardo Berta" userId="c8694f89-bba4-4576-b0a8-456619ca5a8c" providerId="ADAL" clId="{35C5D11B-424E-5B41-A9C4-509DD0A59BFD}" dt="2022-03-22T07:48:21.111" v="40"/>
-        <pc:sldMkLst>
-          <pc:docMk/>
-          <pc:sldMk cId="284781631" sldId="275"/>
-        </pc:sldMkLst>
-      </pc:sldChg>
-    </pc:docChg>
-  </pc:docChgLst>
-  <pc:docChgLst>
-    <pc:chgData name="Riccardo Berta" userId="c8694f89-bba4-4576-b0a8-456619ca5a8c" providerId="ADAL" clId="{4967B734-A465-2844-BA15-7FBACE49D2F8}"/>
-    <pc:docChg chg="undo redo custSel addSld delSld modSld sldOrd">
-      <pc:chgData name="Riccardo Berta" userId="c8694f89-bba4-4576-b0a8-456619ca5a8c" providerId="ADAL" clId="{4967B734-A465-2844-BA15-7FBACE49D2F8}" dt="2022-10-10T05:41:52.141" v="2700" actId="1036"/>
+    <pc:docChg chg="undo custSel addSld delSld modSld">
+      <pc:chgData name="Riccardo Berta" userId="c8694f89-bba4-4576-b0a8-456619ca5a8c" providerId="ADAL" clId="{FDDBFC5A-5EA9-5330-BEB8-433D7E3B4C4E}" dt="2025-12-12T13:24:49.779" v="155" actId="1076"/>
       <pc:docMkLst>
         <pc:docMk/>
       </pc:docMkLst>
       <pc:sldChg chg="modSp mod">
-        <pc:chgData name="Riccardo Berta" userId="c8694f89-bba4-4576-b0a8-456619ca5a8c" providerId="ADAL" clId="{4967B734-A465-2844-BA15-7FBACE49D2F8}" dt="2022-10-04T09:21:06.296" v="1514" actId="790"/>
+        <pc:chgData name="Riccardo Berta" userId="c8694f89-bba4-4576-b0a8-456619ca5a8c" providerId="ADAL" clId="{FDDBFC5A-5EA9-5330-BEB8-433D7E3B4C4E}" dt="2025-12-12T13:24:49.779" v="155" actId="1076"/>
         <pc:sldMkLst>
           <pc:docMk/>
-          <pc:sldMk cId="0" sldId="256"/>
+          <pc:sldMk cId="2988223902" sldId="279"/>
         </pc:sldMkLst>
-      </pc:sldChg>
-      <pc:sldChg chg="delSp modSp mod">
-        <pc:chgData name="Riccardo Berta" userId="c8694f89-bba4-4576-b0a8-456619ca5a8c" providerId="ADAL" clId="{4967B734-A465-2844-BA15-7FBACE49D2F8}" dt="2022-10-05T05:37:06.487" v="2566" actId="20577"/>
-        <pc:sldMkLst>
-          <pc:docMk/>
-          <pc:sldMk cId="0" sldId="257"/>
-        </pc:sldMkLst>
-      </pc:sldChg>
-      <pc:sldChg chg="del">
-        <pc:chgData name="Riccardo Berta" userId="c8694f89-bba4-4576-b0a8-456619ca5a8c" providerId="ADAL" clId="{4967B734-A465-2844-BA15-7FBACE49D2F8}" dt="2022-10-04T06:54:03.310" v="50" actId="2696"/>
-        <pc:sldMkLst>
-          <pc:docMk/>
-          <pc:sldMk cId="3018556184" sldId="259"/>
-        </pc:sldMkLst>
-      </pc:sldChg>
-      <pc:sldChg chg="del">
-        <pc:chgData name="Riccardo Berta" userId="c8694f89-bba4-4576-b0a8-456619ca5a8c" providerId="ADAL" clId="{4967B734-A465-2844-BA15-7FBACE49D2F8}" dt="2022-10-04T06:54:03.809" v="51" actId="2696"/>
-        <pc:sldMkLst>
-          <pc:docMk/>
-          <pc:sldMk cId="723946338" sldId="261"/>
-        </pc:sldMkLst>
-      </pc:sldChg>
-      <pc:sldChg chg="modSp mod">
-        <pc:chgData name="Riccardo Berta" userId="c8694f89-bba4-4576-b0a8-456619ca5a8c" providerId="ADAL" clId="{4967B734-A465-2844-BA15-7FBACE49D2F8}" dt="2022-10-04T09:53:48.313" v="2176" actId="1076"/>
-        <pc:sldMkLst>
-          <pc:docMk/>
-          <pc:sldMk cId="0" sldId="264"/>
-        </pc:sldMkLst>
-      </pc:sldChg>
-      <pc:sldChg chg="del">
-        <pc:chgData name="Riccardo Berta" userId="c8694f89-bba4-4576-b0a8-456619ca5a8c" providerId="ADAL" clId="{4967B734-A465-2844-BA15-7FBACE49D2F8}" dt="2022-10-04T06:54:04.269" v="52" actId="2696"/>
-        <pc:sldMkLst>
-          <pc:docMk/>
-          <pc:sldMk cId="2752186034" sldId="265"/>
-        </pc:sldMkLst>
-      </pc:sldChg>
-      <pc:sldChg chg="addSp modSp add mod">
-        <pc:chgData name="Riccardo Berta" userId="c8694f89-bba4-4576-b0a8-456619ca5a8c" providerId="ADAL" clId="{4967B734-A465-2844-BA15-7FBACE49D2F8}" dt="2022-10-05T05:38:43.218" v="2573" actId="20577"/>
-        <pc:sldMkLst>
-          <pc:docMk/>
-          <pc:sldMk cId="4260925133" sldId="265"/>
-        </pc:sldMkLst>
-      </pc:sldChg>
-      <pc:sldChg chg="addSp delSp modSp add mod">
-        <pc:chgData name="Riccardo Berta" userId="c8694f89-bba4-4576-b0a8-456619ca5a8c" providerId="ADAL" clId="{4967B734-A465-2844-BA15-7FBACE49D2F8}" dt="2022-10-05T05:43:30.967" v="2628" actId="20577"/>
-        <pc:sldMkLst>
-          <pc:docMk/>
-          <pc:sldMk cId="2074499598" sldId="266"/>
-        </pc:sldMkLst>
-      </pc:sldChg>
-      <pc:sldChg chg="addSp delSp modSp add mod ord">
-        <pc:chgData name="Riccardo Berta" userId="c8694f89-bba4-4576-b0a8-456619ca5a8c" providerId="ADAL" clId="{4967B734-A465-2844-BA15-7FBACE49D2F8}" dt="2022-10-05T05:40:18.404" v="2582" actId="20577"/>
-        <pc:sldMkLst>
-          <pc:docMk/>
-          <pc:sldMk cId="2259674710" sldId="267"/>
-        </pc:sldMkLst>
-      </pc:sldChg>
-      <pc:sldChg chg="addSp delSp modSp add mod ord">
-        <pc:chgData name="Riccardo Berta" userId="c8694f89-bba4-4576-b0a8-456619ca5a8c" providerId="ADAL" clId="{4967B734-A465-2844-BA15-7FBACE49D2F8}" dt="2022-10-04T08:21:03.314" v="615" actId="20577"/>
-        <pc:sldMkLst>
-          <pc:docMk/>
-          <pc:sldMk cId="2756532613" sldId="268"/>
-        </pc:sldMkLst>
-      </pc:sldChg>
-      <pc:sldChg chg="addSp delSp modSp add mod ord">
-        <pc:chgData name="Riccardo Berta" userId="c8694f89-bba4-4576-b0a8-456619ca5a8c" providerId="ADAL" clId="{4967B734-A465-2844-BA15-7FBACE49D2F8}" dt="2022-10-04T08:22:30.428" v="629" actId="20577"/>
-        <pc:sldMkLst>
-          <pc:docMk/>
-          <pc:sldMk cId="3950372499" sldId="269"/>
-        </pc:sldMkLst>
-      </pc:sldChg>
-      <pc:sldChg chg="addSp delSp modSp add mod">
-        <pc:chgData name="Riccardo Berta" userId="c8694f89-bba4-4576-b0a8-456619ca5a8c" providerId="ADAL" clId="{4967B734-A465-2844-BA15-7FBACE49D2F8}" dt="2022-10-04T08:30:10.946" v="871" actId="1076"/>
-        <pc:sldMkLst>
-          <pc:docMk/>
-          <pc:sldMk cId="3668836689" sldId="270"/>
-        </pc:sldMkLst>
-      </pc:sldChg>
-      <pc:sldChg chg="addSp modSp add mod">
-        <pc:chgData name="Riccardo Berta" userId="c8694f89-bba4-4576-b0a8-456619ca5a8c" providerId="ADAL" clId="{4967B734-A465-2844-BA15-7FBACE49D2F8}" dt="2022-10-04T08:33:08.776" v="912" actId="1076"/>
-        <pc:sldMkLst>
-          <pc:docMk/>
-          <pc:sldMk cId="1894295752" sldId="271"/>
-        </pc:sldMkLst>
-      </pc:sldChg>
-      <pc:sldChg chg="del">
-        <pc:chgData name="Riccardo Berta" userId="c8694f89-bba4-4576-b0a8-456619ca5a8c" providerId="ADAL" clId="{4967B734-A465-2844-BA15-7FBACE49D2F8}" dt="2022-10-04T06:54:05.175" v="54" actId="2696"/>
-        <pc:sldMkLst>
-          <pc:docMk/>
-          <pc:sldMk cId="1942012932" sldId="271"/>
-        </pc:sldMkLst>
-      </pc:sldChg>
-      <pc:sldChg chg="addSp modSp add mod">
-        <pc:chgData name="Riccardo Berta" userId="c8694f89-bba4-4576-b0a8-456619ca5a8c" providerId="ADAL" clId="{4967B734-A465-2844-BA15-7FBACE49D2F8}" dt="2022-10-05T05:45:21.155" v="2636" actId="20577"/>
-        <pc:sldMkLst>
-          <pc:docMk/>
-          <pc:sldMk cId="732868139" sldId="272"/>
-        </pc:sldMkLst>
-      </pc:sldChg>
-      <pc:sldChg chg="addSp delSp modSp add mod">
-        <pc:chgData name="Riccardo Berta" userId="c8694f89-bba4-4576-b0a8-456619ca5a8c" providerId="ADAL" clId="{4967B734-A465-2844-BA15-7FBACE49D2F8}" dt="2022-10-04T08:54:59.469" v="1509" actId="20577"/>
-        <pc:sldMkLst>
-          <pc:docMk/>
-          <pc:sldMk cId="3859598341" sldId="273"/>
-        </pc:sldMkLst>
-      </pc:sldChg>
-      <pc:sldChg chg="addSp modSp add mod">
-        <pc:chgData name="Riccardo Berta" userId="c8694f89-bba4-4576-b0a8-456619ca5a8c" providerId="ADAL" clId="{4967B734-A465-2844-BA15-7FBACE49D2F8}" dt="2022-10-04T08:55:10.050" v="1510" actId="1076"/>
-        <pc:sldMkLst>
-          <pc:docMk/>
-          <pc:sldMk cId="2213323745" sldId="274"/>
-        </pc:sldMkLst>
-      </pc:sldChg>
-      <pc:sldChg chg="del">
-        <pc:chgData name="Riccardo Berta" userId="c8694f89-bba4-4576-b0a8-456619ca5a8c" providerId="ADAL" clId="{4967B734-A465-2844-BA15-7FBACE49D2F8}" dt="2022-10-04T06:54:05.569" v="55" actId="2696"/>
-        <pc:sldMkLst>
-          <pc:docMk/>
-          <pc:sldMk cId="2759966790" sldId="274"/>
-        </pc:sldMkLst>
-      </pc:sldChg>
-      <pc:sldChg chg="addSp modSp add mod">
-        <pc:chgData name="Riccardo Berta" userId="c8694f89-bba4-4576-b0a8-456619ca5a8c" providerId="ADAL" clId="{4967B734-A465-2844-BA15-7FBACE49D2F8}" dt="2022-10-10T05:36:43.547" v="2688" actId="20577"/>
-        <pc:sldMkLst>
-          <pc:docMk/>
-          <pc:sldMk cId="303121765" sldId="275"/>
-        </pc:sldMkLst>
-      </pc:sldChg>
-      <pc:sldChg chg="del">
-        <pc:chgData name="Riccardo Berta" userId="c8694f89-bba4-4576-b0a8-456619ca5a8c" providerId="ADAL" clId="{4967B734-A465-2844-BA15-7FBACE49D2F8}" dt="2022-10-04T06:54:06.082" v="56" actId="2696"/>
-        <pc:sldMkLst>
-          <pc:docMk/>
-          <pc:sldMk cId="3965473342" sldId="275"/>
-        </pc:sldMkLst>
-      </pc:sldChg>
-      <pc:sldChg chg="addSp modSp add mod">
-        <pc:chgData name="Riccardo Berta" userId="c8694f89-bba4-4576-b0a8-456619ca5a8c" providerId="ADAL" clId="{4967B734-A465-2844-BA15-7FBACE49D2F8}" dt="2022-10-04T09:35:09.338" v="1844" actId="113"/>
-        <pc:sldMkLst>
-          <pc:docMk/>
-          <pc:sldMk cId="2020526202" sldId="276"/>
-        </pc:sldMkLst>
-      </pc:sldChg>
-      <pc:sldChg chg="del">
-        <pc:chgData name="Riccardo Berta" userId="c8694f89-bba4-4576-b0a8-456619ca5a8c" providerId="ADAL" clId="{4967B734-A465-2844-BA15-7FBACE49D2F8}" dt="2022-10-04T06:54:06.650" v="57" actId="2696"/>
-        <pc:sldMkLst>
-          <pc:docMk/>
-          <pc:sldMk cId="3364334937" sldId="276"/>
-        </pc:sldMkLst>
-      </pc:sldChg>
-      <pc:sldChg chg="del">
-        <pc:chgData name="Riccardo Berta" userId="c8694f89-bba4-4576-b0a8-456619ca5a8c" providerId="ADAL" clId="{4967B734-A465-2844-BA15-7FBACE49D2F8}" dt="2022-10-04T06:54:07.117" v="58" actId="2696"/>
-        <pc:sldMkLst>
-          <pc:docMk/>
-          <pc:sldMk cId="2920432797" sldId="277"/>
-        </pc:sldMkLst>
-      </pc:sldChg>
-      <pc:sldChg chg="addSp modSp add mod">
-        <pc:chgData name="Riccardo Berta" userId="c8694f89-bba4-4576-b0a8-456619ca5a8c" providerId="ADAL" clId="{4967B734-A465-2844-BA15-7FBACE49D2F8}" dt="2022-10-10T05:38:42.742" v="2693" actId="20577"/>
-        <pc:sldMkLst>
-          <pc:docMk/>
-          <pc:sldMk cId="3156887330" sldId="277"/>
-        </pc:sldMkLst>
-      </pc:sldChg>
-      <pc:sldChg chg="addSp modSp add mod">
-        <pc:chgData name="Riccardo Berta" userId="c8694f89-bba4-4576-b0a8-456619ca5a8c" providerId="ADAL" clId="{4967B734-A465-2844-BA15-7FBACE49D2F8}" dt="2022-10-04T09:50:43.485" v="2061" actId="1076"/>
-        <pc:sldMkLst>
-          <pc:docMk/>
-          <pc:sldMk cId="1586284290" sldId="278"/>
-        </pc:sldMkLst>
-      </pc:sldChg>
-      <pc:sldChg chg="del">
-        <pc:chgData name="Riccardo Berta" userId="c8694f89-bba4-4576-b0a8-456619ca5a8c" providerId="ADAL" clId="{4967B734-A465-2844-BA15-7FBACE49D2F8}" dt="2022-10-04T06:54:07.594" v="59" actId="2696"/>
-        <pc:sldMkLst>
-          <pc:docMk/>
-          <pc:sldMk cId="3024273348" sldId="278"/>
-        </pc:sldMkLst>
-      </pc:sldChg>
-      <pc:sldChg chg="del">
-        <pc:chgData name="Riccardo Berta" userId="c8694f89-bba4-4576-b0a8-456619ca5a8c" providerId="ADAL" clId="{4967B734-A465-2844-BA15-7FBACE49D2F8}" dt="2022-10-04T06:54:08.017" v="60" actId="2696"/>
-        <pc:sldMkLst>
-          <pc:docMk/>
-          <pc:sldMk cId="2505677359" sldId="279"/>
-        </pc:sldMkLst>
-      </pc:sldChg>
-      <pc:sldChg chg="modSp add mod">
-        <pc:chgData name="Riccardo Berta" userId="c8694f89-bba4-4576-b0a8-456619ca5a8c" providerId="ADAL" clId="{4967B734-A465-2844-BA15-7FBACE49D2F8}" dt="2022-10-04T09:56:29.719" v="2268" actId="404"/>
-        <pc:sldMkLst>
-          <pc:docMk/>
-          <pc:sldMk cId="2677523252" sldId="279"/>
-        </pc:sldMkLst>
-      </pc:sldChg>
-      <pc:sldChg chg="addSp delSp modSp add mod">
-        <pc:chgData name="Riccardo Berta" userId="c8694f89-bba4-4576-b0a8-456619ca5a8c" providerId="ADAL" clId="{4967B734-A465-2844-BA15-7FBACE49D2F8}" dt="2022-10-10T05:41:52.141" v="2700" actId="1036"/>
-        <pc:sldMkLst>
-          <pc:docMk/>
-          <pc:sldMk cId="635836889" sldId="280"/>
-        </pc:sldMkLst>
-      </pc:sldChg>
-      <pc:sldChg chg="del">
-        <pc:chgData name="Riccardo Berta" userId="c8694f89-bba4-4576-b0a8-456619ca5a8c" providerId="ADAL" clId="{4967B734-A465-2844-BA15-7FBACE49D2F8}" dt="2022-10-04T06:54:08.481" v="61" actId="2696"/>
-        <pc:sldMkLst>
-          <pc:docMk/>
-          <pc:sldMk cId="3525330065" sldId="280"/>
-        </pc:sldMkLst>
-      </pc:sldChg>
-      <pc:sldChg chg="del">
-        <pc:chgData name="Riccardo Berta" userId="c8694f89-bba4-4576-b0a8-456619ca5a8c" providerId="ADAL" clId="{4967B734-A465-2844-BA15-7FBACE49D2F8}" dt="2022-10-04T06:54:08.911" v="62" actId="2696"/>
-        <pc:sldMkLst>
-          <pc:docMk/>
-          <pc:sldMk cId="349541788" sldId="281"/>
-        </pc:sldMkLst>
-      </pc:sldChg>
-      <pc:sldChg chg="addSp modSp add mod">
-        <pc:chgData name="Riccardo Berta" userId="c8694f89-bba4-4576-b0a8-456619ca5a8c" providerId="ADAL" clId="{4967B734-A465-2844-BA15-7FBACE49D2F8}" dt="2022-10-04T10:06:15.809" v="2385" actId="1076"/>
-        <pc:sldMkLst>
-          <pc:docMk/>
-          <pc:sldMk cId="2288803032" sldId="281"/>
-        </pc:sldMkLst>
-      </pc:sldChg>
-      <pc:sldChg chg="addSp delSp modSp add mod">
-        <pc:chgData name="Riccardo Berta" userId="c8694f89-bba4-4576-b0a8-456619ca5a8c" providerId="ADAL" clId="{4967B734-A465-2844-BA15-7FBACE49D2F8}" dt="2022-10-04T10:16:31.835" v="2463" actId="20577"/>
-        <pc:sldMkLst>
-          <pc:docMk/>
-          <pc:sldMk cId="663506827" sldId="282"/>
-        </pc:sldMkLst>
-      </pc:sldChg>
-      <pc:sldChg chg="del">
-        <pc:chgData name="Riccardo Berta" userId="c8694f89-bba4-4576-b0a8-456619ca5a8c" providerId="ADAL" clId="{4967B734-A465-2844-BA15-7FBACE49D2F8}" dt="2022-10-04T06:54:09.464" v="63" actId="2696"/>
-        <pc:sldMkLst>
-          <pc:docMk/>
-          <pc:sldMk cId="2584172506" sldId="282"/>
-        </pc:sldMkLst>
-      </pc:sldChg>
-      <pc:sldChg chg="addSp delSp modSp add mod">
-        <pc:chgData name="Riccardo Berta" userId="c8694f89-bba4-4576-b0a8-456619ca5a8c" providerId="ADAL" clId="{4967B734-A465-2844-BA15-7FBACE49D2F8}" dt="2022-10-04T10:17:39.088" v="2550" actId="20577"/>
-        <pc:sldMkLst>
-          <pc:docMk/>
-          <pc:sldMk cId="2423864326" sldId="283"/>
-        </pc:sldMkLst>
-      </pc:sldChg>
-      <pc:sldChg chg="del">
-        <pc:chgData name="Riccardo Berta" userId="c8694f89-bba4-4576-b0a8-456619ca5a8c" providerId="ADAL" clId="{4967B734-A465-2844-BA15-7FBACE49D2F8}" dt="2022-10-04T06:54:09.892" v="64" actId="2696"/>
-        <pc:sldMkLst>
-          <pc:docMk/>
-          <pc:sldMk cId="2548826204" sldId="283"/>
-        </pc:sldMkLst>
-      </pc:sldChg>
-      <pc:sldChg chg="add del">
-        <pc:chgData name="Riccardo Berta" userId="c8694f89-bba4-4576-b0a8-456619ca5a8c" providerId="ADAL" clId="{4967B734-A465-2844-BA15-7FBACE49D2F8}" dt="2022-10-04T10:14:48.405" v="2429"/>
-        <pc:sldMkLst>
-          <pc:docMk/>
-          <pc:sldMk cId="196183857" sldId="284"/>
-        </pc:sldMkLst>
-      </pc:sldChg>
-      <pc:sldChg chg="addSp delSp modSp add mod">
-        <pc:chgData name="Riccardo Berta" userId="c8694f89-bba4-4576-b0a8-456619ca5a8c" providerId="ADAL" clId="{4967B734-A465-2844-BA15-7FBACE49D2F8}" dt="2022-10-04T10:16:23.053" v="2461" actId="1076"/>
-        <pc:sldMkLst>
-          <pc:docMk/>
-          <pc:sldMk cId="852930802" sldId="284"/>
-        </pc:sldMkLst>
-      </pc:sldChg>
-      <pc:sldChg chg="del">
-        <pc:chgData name="Riccardo Berta" userId="c8694f89-bba4-4576-b0a8-456619ca5a8c" providerId="ADAL" clId="{4967B734-A465-2844-BA15-7FBACE49D2F8}" dt="2022-10-04T06:54:10.321" v="65" actId="2696"/>
-        <pc:sldMkLst>
-          <pc:docMk/>
-          <pc:sldMk cId="3494619461" sldId="284"/>
-        </pc:sldMkLst>
-      </pc:sldChg>
-      <pc:sldChg chg="del">
-        <pc:chgData name="Riccardo Berta" userId="c8694f89-bba4-4576-b0a8-456619ca5a8c" providerId="ADAL" clId="{4967B734-A465-2844-BA15-7FBACE49D2F8}" dt="2022-10-04T06:54:10.985" v="66" actId="2696"/>
-        <pc:sldMkLst>
-          <pc:docMk/>
-          <pc:sldMk cId="3458162749" sldId="285"/>
-        </pc:sldMkLst>
-      </pc:sldChg>
-      <pc:sldChg chg="del">
-        <pc:chgData name="Riccardo Berta" userId="c8694f89-bba4-4576-b0a8-456619ca5a8c" providerId="ADAL" clId="{4967B734-A465-2844-BA15-7FBACE49D2F8}" dt="2022-10-04T06:54:13.372" v="69" actId="2696"/>
-        <pc:sldMkLst>
-          <pc:docMk/>
-          <pc:sldMk cId="3186725423" sldId="286"/>
-        </pc:sldMkLst>
-      </pc:sldChg>
-      <pc:sldChg chg="del">
-        <pc:chgData name="Riccardo Berta" userId="c8694f89-bba4-4576-b0a8-456619ca5a8c" providerId="ADAL" clId="{4967B734-A465-2844-BA15-7FBACE49D2F8}" dt="2022-10-04T06:54:04.705" v="53" actId="2696"/>
-        <pc:sldMkLst>
-          <pc:docMk/>
-          <pc:sldMk cId="1166550415" sldId="288"/>
-        </pc:sldMkLst>
-      </pc:sldChg>
-      <pc:sldChg chg="del">
-        <pc:chgData name="Riccardo Berta" userId="c8694f89-bba4-4576-b0a8-456619ca5a8c" providerId="ADAL" clId="{4967B734-A465-2844-BA15-7FBACE49D2F8}" dt="2022-10-04T06:54:12.030" v="67" actId="2696"/>
-        <pc:sldMkLst>
-          <pc:docMk/>
-          <pc:sldMk cId="0" sldId="344"/>
-        </pc:sldMkLst>
-      </pc:sldChg>
-      <pc:sldChg chg="del">
-        <pc:chgData name="Riccardo Berta" userId="c8694f89-bba4-4576-b0a8-456619ca5a8c" providerId="ADAL" clId="{4967B734-A465-2844-BA15-7FBACE49D2F8}" dt="2022-10-04T06:54:12.601" v="68" actId="2696"/>
-        <pc:sldMkLst>
-          <pc:docMk/>
-          <pc:sldMk cId="615642029" sldId="403"/>
-        </pc:sldMkLst>
-      </pc:sldChg>
-      <pc:sldMasterChg chg="delSldLayout">
-        <pc:chgData name="Riccardo Berta" userId="c8694f89-bba4-4576-b0a8-456619ca5a8c" providerId="ADAL" clId="{4967B734-A465-2844-BA15-7FBACE49D2F8}" dt="2022-10-04T06:54:12.601" v="68" actId="2696"/>
-        <pc:sldMasterMkLst>
-          <pc:docMk/>
-          <pc:sldMasterMk cId="0" sldId="2147483659"/>
-        </pc:sldMasterMkLst>
-        <pc:sldLayoutChg chg="del">
-          <pc:chgData name="Riccardo Berta" userId="c8694f89-bba4-4576-b0a8-456619ca5a8c" providerId="ADAL" clId="{4967B734-A465-2844-BA15-7FBACE49D2F8}" dt="2022-10-04T06:54:12.601" v="68" actId="2696"/>
-          <pc:sldLayoutMkLst>
+        <pc:picChg chg="mod">
+          <ac:chgData name="Riccardo Berta" userId="c8694f89-bba4-4576-b0a8-456619ca5a8c" providerId="ADAL" clId="{FDDBFC5A-5EA9-5330-BEB8-433D7E3B4C4E}" dt="2025-12-12T13:24:49.779" v="155" actId="1076"/>
+          <ac:picMkLst>
             <pc:docMk/>
-            <pc:sldMasterMk cId="0" sldId="2147483659"/>
-            <pc:sldLayoutMk cId="2937273629" sldId="2147483660"/>
-          </pc:sldLayoutMkLst>
-        </pc:sldLayoutChg>
-      </pc:sldMasterChg>
-    </pc:docChg>
-  </pc:docChgLst>
-  <pc:docChgLst>
-    <pc:chgData name="Riccardo Berta" userId="c8694f89-bba4-4576-b0a8-456619ca5a8c" providerId="ADAL" clId="{F4AAAA8C-1CB2-214C-996A-F15BCA6CB64E}"/>
-    <pc:docChg chg="undo custSel addSld delSld modSld">
-      <pc:chgData name="Riccardo Berta" userId="c8694f89-bba4-4576-b0a8-456619ca5a8c" providerId="ADAL" clId="{F4AAAA8C-1CB2-214C-996A-F15BCA6CB64E}" dt="2022-07-29T16:21:50.628" v="2975" actId="1076"/>
-      <pc:docMkLst>
-        <pc:docMk/>
-      </pc:docMkLst>
-      <pc:sldChg chg="modSp mod">
-        <pc:chgData name="Riccardo Berta" userId="c8694f89-bba4-4576-b0a8-456619ca5a8c" providerId="ADAL" clId="{F4AAAA8C-1CB2-214C-996A-F15BCA6CB64E}" dt="2022-07-27T13:37:29.445" v="2" actId="20577"/>
-        <pc:sldMkLst>
-          <pc:docMk/>
-          <pc:sldMk cId="0" sldId="256"/>
-        </pc:sldMkLst>
-      </pc:sldChg>
-      <pc:sldChg chg="addSp modSp mod">
-        <pc:chgData name="Riccardo Berta" userId="c8694f89-bba4-4576-b0a8-456619ca5a8c" providerId="ADAL" clId="{F4AAAA8C-1CB2-214C-996A-F15BCA6CB64E}" dt="2022-07-27T13:43:23.760" v="162" actId="20577"/>
-        <pc:sldMkLst>
-          <pc:docMk/>
-          <pc:sldMk cId="0" sldId="257"/>
-        </pc:sldMkLst>
-      </pc:sldChg>
-      <pc:sldChg chg="modSp del">
-        <pc:chgData name="Riccardo Berta" userId="c8694f89-bba4-4576-b0a8-456619ca5a8c" providerId="ADAL" clId="{F4AAAA8C-1CB2-214C-996A-F15BCA6CB64E}" dt="2022-07-27T13:43:43.714" v="164" actId="2696"/>
-        <pc:sldMkLst>
-          <pc:docMk/>
-          <pc:sldMk cId="1899110855" sldId="258"/>
-        </pc:sldMkLst>
-      </pc:sldChg>
-      <pc:sldChg chg="addSp delSp modSp mod">
-        <pc:chgData name="Riccardo Berta" userId="c8694f89-bba4-4576-b0a8-456619ca5a8c" providerId="ADAL" clId="{F4AAAA8C-1CB2-214C-996A-F15BCA6CB64E}" dt="2022-07-29T16:13:43.411" v="2890" actId="20577"/>
-        <pc:sldMkLst>
-          <pc:docMk/>
-          <pc:sldMk cId="3018556184" sldId="259"/>
-        </pc:sldMkLst>
-      </pc:sldChg>
-      <pc:sldChg chg="del">
-        <pc:chgData name="Riccardo Berta" userId="c8694f89-bba4-4576-b0a8-456619ca5a8c" providerId="ADAL" clId="{F4AAAA8C-1CB2-214C-996A-F15BCA6CB64E}" dt="2022-07-27T13:43:45.045" v="165" actId="2696"/>
-        <pc:sldMkLst>
-          <pc:docMk/>
-          <pc:sldMk cId="1104208334" sldId="260"/>
-        </pc:sldMkLst>
-      </pc:sldChg>
-      <pc:sldChg chg="addSp delSp modSp add mod">
-        <pc:chgData name="Riccardo Berta" userId="c8694f89-bba4-4576-b0a8-456619ca5a8c" providerId="ADAL" clId="{F4AAAA8C-1CB2-214C-996A-F15BCA6CB64E}" dt="2022-07-28T05:47:21.216" v="337" actId="1076"/>
-        <pc:sldMkLst>
-          <pc:docMk/>
-          <pc:sldMk cId="2119751735" sldId="260"/>
-        </pc:sldMkLst>
-      </pc:sldChg>
-      <pc:sldChg chg="del">
-        <pc:chgData name="Riccardo Berta" userId="c8694f89-bba4-4576-b0a8-456619ca5a8c" providerId="ADAL" clId="{F4AAAA8C-1CB2-214C-996A-F15BCA6CB64E}" dt="2022-07-27T13:43:46.058" v="166" actId="2696"/>
-        <pc:sldMkLst>
-          <pc:docMk/>
-          <pc:sldMk cId="1290395919" sldId="261"/>
-        </pc:sldMkLst>
-      </pc:sldChg>
-      <pc:sldChg chg="delSp modSp add mod">
-        <pc:chgData name="Riccardo Berta" userId="c8694f89-bba4-4576-b0a8-456619ca5a8c" providerId="ADAL" clId="{F4AAAA8C-1CB2-214C-996A-F15BCA6CB64E}" dt="2022-07-28T06:08:36.900" v="979" actId="20577"/>
-        <pc:sldMkLst>
-          <pc:docMk/>
-          <pc:sldMk cId="2389937581" sldId="261"/>
-        </pc:sldMkLst>
-      </pc:sldChg>
-      <pc:sldChg chg="addSp delSp modSp add mod">
-        <pc:chgData name="Riccardo Berta" userId="c8694f89-bba4-4576-b0a8-456619ca5a8c" providerId="ADAL" clId="{F4AAAA8C-1CB2-214C-996A-F15BCA6CB64E}" dt="2022-07-28T06:20:33.799" v="1324" actId="58"/>
-        <pc:sldMkLst>
-          <pc:docMk/>
-          <pc:sldMk cId="1270389364" sldId="262"/>
-        </pc:sldMkLst>
-      </pc:sldChg>
-      <pc:sldChg chg="del">
-        <pc:chgData name="Riccardo Berta" userId="c8694f89-bba4-4576-b0a8-456619ca5a8c" providerId="ADAL" clId="{F4AAAA8C-1CB2-214C-996A-F15BCA6CB64E}" dt="2022-07-27T13:43:47.251" v="167" actId="2696"/>
-        <pc:sldMkLst>
-          <pc:docMk/>
-          <pc:sldMk cId="4130549615" sldId="262"/>
-        </pc:sldMkLst>
-      </pc:sldChg>
-      <pc:sldChg chg="modSp add mod">
-        <pc:chgData name="Riccardo Berta" userId="c8694f89-bba4-4576-b0a8-456619ca5a8c" providerId="ADAL" clId="{F4AAAA8C-1CB2-214C-996A-F15BCA6CB64E}" dt="2022-07-29T07:18:15.970" v="2126" actId="1076"/>
-        <pc:sldMkLst>
-          <pc:docMk/>
-          <pc:sldMk cId="2644872656" sldId="263"/>
-        </pc:sldMkLst>
-      </pc:sldChg>
-      <pc:sldChg chg="del">
-        <pc:chgData name="Riccardo Berta" userId="c8694f89-bba4-4576-b0a8-456619ca5a8c" providerId="ADAL" clId="{F4AAAA8C-1CB2-214C-996A-F15BCA6CB64E}" dt="2022-07-27T13:43:48.139" v="168" actId="2696"/>
-        <pc:sldMkLst>
-          <pc:docMk/>
-          <pc:sldMk cId="3102138681" sldId="263"/>
-        </pc:sldMkLst>
-      </pc:sldChg>
-      <pc:sldChg chg="modSp add mod">
-        <pc:chgData name="Riccardo Berta" userId="c8694f89-bba4-4576-b0a8-456619ca5a8c" providerId="ADAL" clId="{F4AAAA8C-1CB2-214C-996A-F15BCA6CB64E}" dt="2022-07-28T13:59:43.403" v="1794" actId="20577"/>
-        <pc:sldMkLst>
-          <pc:docMk/>
-          <pc:sldMk cId="1681389695" sldId="264"/>
-        </pc:sldMkLst>
-      </pc:sldChg>
-      <pc:sldChg chg="del">
-        <pc:chgData name="Riccardo Berta" userId="c8694f89-bba4-4576-b0a8-456619ca5a8c" providerId="ADAL" clId="{F4AAAA8C-1CB2-214C-996A-F15BCA6CB64E}" dt="2022-07-27T13:43:49.652" v="169" actId="2696"/>
-        <pc:sldMkLst>
-          <pc:docMk/>
-          <pc:sldMk cId="2113557187" sldId="264"/>
-        </pc:sldMkLst>
-      </pc:sldChg>
-      <pc:sldChg chg="del">
-        <pc:chgData name="Riccardo Berta" userId="c8694f89-bba4-4576-b0a8-456619ca5a8c" providerId="ADAL" clId="{F4AAAA8C-1CB2-214C-996A-F15BCA6CB64E}" dt="2022-07-27T13:43:57.658" v="170" actId="2696"/>
-        <pc:sldMkLst>
-          <pc:docMk/>
-          <pc:sldMk cId="2045385232" sldId="265"/>
-        </pc:sldMkLst>
-      </pc:sldChg>
-      <pc:sldChg chg="addSp modSp add mod">
-        <pc:chgData name="Riccardo Berta" userId="c8694f89-bba4-4576-b0a8-456619ca5a8c" providerId="ADAL" clId="{F4AAAA8C-1CB2-214C-996A-F15BCA6CB64E}" dt="2022-07-29T07:15:19.612" v="2059" actId="1037"/>
-        <pc:sldMkLst>
-          <pc:docMk/>
-          <pc:sldMk cId="2862573505" sldId="265"/>
-        </pc:sldMkLst>
-      </pc:sldChg>
-      <pc:sldChg chg="modSp add mod">
-        <pc:chgData name="Riccardo Berta" userId="c8694f89-bba4-4576-b0a8-456619ca5a8c" providerId="ADAL" clId="{F4AAAA8C-1CB2-214C-996A-F15BCA6CB64E}" dt="2022-07-29T15:42:16.243" v="2364" actId="404"/>
-        <pc:sldMkLst>
-          <pc:docMk/>
-          <pc:sldMk cId="4181844165" sldId="266"/>
-        </pc:sldMkLst>
-      </pc:sldChg>
-      <pc:sldChg chg="addSp delSp modSp add mod">
-        <pc:chgData name="Riccardo Berta" userId="c8694f89-bba4-4576-b0a8-456619ca5a8c" providerId="ADAL" clId="{F4AAAA8C-1CB2-214C-996A-F15BCA6CB64E}" dt="2022-07-29T16:21:50.628" v="2975" actId="1076"/>
-        <pc:sldMkLst>
-          <pc:docMk/>
-          <pc:sldMk cId="216455838" sldId="267"/>
-        </pc:sldMkLst>
-      </pc:sldChg>
-      <pc:sldChg chg="modSp add mod">
-        <pc:chgData name="Riccardo Berta" userId="c8694f89-bba4-4576-b0a8-456619ca5a8c" providerId="ADAL" clId="{F4AAAA8C-1CB2-214C-996A-F15BCA6CB64E}" dt="2022-07-29T16:13:07.544" v="2873" actId="20577"/>
-        <pc:sldMkLst>
-          <pc:docMk/>
-          <pc:sldMk cId="925286286" sldId="268"/>
-        </pc:sldMkLst>
-      </pc:sldChg>
-      <pc:sldChg chg="addSp modSp add mod">
-        <pc:chgData name="Riccardo Berta" userId="c8694f89-bba4-4576-b0a8-456619ca5a8c" providerId="ADAL" clId="{F4AAAA8C-1CB2-214C-996A-F15BCA6CB64E}" dt="2022-07-29T16:20:35.039" v="2951" actId="962"/>
-        <pc:sldMkLst>
-          <pc:docMk/>
-          <pc:sldMk cId="3471997037" sldId="269"/>
-        </pc:sldMkLst>
-      </pc:sldChg>
-      <pc:sldChg chg="add">
-        <pc:chgData name="Riccardo Berta" userId="c8694f89-bba4-4576-b0a8-456619ca5a8c" providerId="ADAL" clId="{F4AAAA8C-1CB2-214C-996A-F15BCA6CB64E}" dt="2022-07-28T14:01:20.148" v="1808"/>
-        <pc:sldMkLst>
-          <pc:docMk/>
-          <pc:sldMk cId="3130917410" sldId="270"/>
-        </pc:sldMkLst>
-      </pc:sldChg>
-      <pc:sldChg chg="add">
-        <pc:chgData name="Riccardo Berta" userId="c8694f89-bba4-4576-b0a8-456619ca5a8c" providerId="ADAL" clId="{F4AAAA8C-1CB2-214C-996A-F15BCA6CB64E}" dt="2022-07-28T14:01:20.483" v="1809"/>
-        <pc:sldMkLst>
-          <pc:docMk/>
-          <pc:sldMk cId="2266699268" sldId="271"/>
-        </pc:sldMkLst>
-      </pc:sldChg>
-    </pc:docChg>
-  </pc:docChgLst>
-  <pc:docChgLst>
-    <pc:chgData name="Riccardo Berta" userId="c8694f89-bba4-4576-b0a8-456619ca5a8c" providerId="ADAL" clId="{A8290FA7-622A-D149-8650-9DF3F18680D5}"/>
-    <pc:docChg chg="undo redo custSel addSld delSld modSld sldOrd modMainMaster">
-      <pc:chgData name="Riccardo Berta" userId="c8694f89-bba4-4576-b0a8-456619ca5a8c" providerId="ADAL" clId="{A8290FA7-622A-D149-8650-9DF3F18680D5}" dt="2022-07-27T13:36:04.688" v="2998"/>
-      <pc:docMkLst>
-        <pc:docMk/>
-      </pc:docMkLst>
-      <pc:sldChg chg="delSp modSp mod">
-        <pc:chgData name="Riccardo Berta" userId="c8694f89-bba4-4576-b0a8-456619ca5a8c" providerId="ADAL" clId="{A8290FA7-622A-D149-8650-9DF3F18680D5}" dt="2022-07-27T13:35:14.530" v="2993" actId="20577"/>
-        <pc:sldMkLst>
-          <pc:docMk/>
-          <pc:sldMk cId="0" sldId="256"/>
-        </pc:sldMkLst>
-      </pc:sldChg>
-      <pc:sldChg chg="delSp modSp mod">
-        <pc:chgData name="Riccardo Berta" userId="c8694f89-bba4-4576-b0a8-456619ca5a8c" providerId="ADAL" clId="{A8290FA7-622A-D149-8650-9DF3F18680D5}" dt="2022-07-27T08:46:23.569" v="1166" actId="948"/>
-        <pc:sldMkLst>
-          <pc:docMk/>
-          <pc:sldMk cId="0" sldId="257"/>
-        </pc:sldMkLst>
-      </pc:sldChg>
-      <pc:sldChg chg="addSp modSp new mod modNotes">
-        <pc:chgData name="Riccardo Berta" userId="c8694f89-bba4-4576-b0a8-456619ca5a8c" providerId="ADAL" clId="{A8290FA7-622A-D149-8650-9DF3F18680D5}" dt="2022-07-27T08:52:46.755" v="1313" actId="113"/>
-        <pc:sldMkLst>
-          <pc:docMk/>
-          <pc:sldMk cId="1899110855" sldId="258"/>
-        </pc:sldMkLst>
-      </pc:sldChg>
-      <pc:sldChg chg="new del">
-        <pc:chgData name="Riccardo Berta" userId="c8694f89-bba4-4576-b0a8-456619ca5a8c" providerId="ADAL" clId="{A8290FA7-622A-D149-8650-9DF3F18680D5}" dt="2022-07-27T07:48:28.832" v="223" actId="2696"/>
-        <pc:sldMkLst>
-          <pc:docMk/>
-          <pc:sldMk cId="182339981" sldId="259"/>
-        </pc:sldMkLst>
-      </pc:sldChg>
-      <pc:sldChg chg="del">
-        <pc:chgData name="Riccardo Berta" userId="c8694f89-bba4-4576-b0a8-456619ca5a8c" providerId="ADAL" clId="{A8290FA7-622A-D149-8650-9DF3F18680D5}" dt="2022-07-18T11:39:57.790" v="23" actId="2696"/>
-        <pc:sldMkLst>
-          <pc:docMk/>
-          <pc:sldMk cId="3018556184" sldId="259"/>
-        </pc:sldMkLst>
-      </pc:sldChg>
-      <pc:sldChg chg="addSp modSp new mod">
-        <pc:chgData name="Riccardo Berta" userId="c8694f89-bba4-4576-b0a8-456619ca5a8c" providerId="ADAL" clId="{A8290FA7-622A-D149-8650-9DF3F18680D5}" dt="2022-07-27T08:48:59.292" v="1210" actId="1076"/>
-        <pc:sldMkLst>
-          <pc:docMk/>
-          <pc:sldMk cId="1104208334" sldId="260"/>
-        </pc:sldMkLst>
-      </pc:sldChg>
-      <pc:sldChg chg="del">
-        <pc:chgData name="Riccardo Berta" userId="c8694f89-bba4-4576-b0a8-456619ca5a8c" providerId="ADAL" clId="{A8290FA7-622A-D149-8650-9DF3F18680D5}" dt="2022-07-18T11:39:58.142" v="25" actId="2696"/>
-        <pc:sldMkLst>
-          <pc:docMk/>
-          <pc:sldMk cId="1290395919" sldId="261"/>
-        </pc:sldMkLst>
-      </pc:sldChg>
-      <pc:sldChg chg="new del">
-        <pc:chgData name="Riccardo Berta" userId="c8694f89-bba4-4576-b0a8-456619ca5a8c" providerId="ADAL" clId="{A8290FA7-622A-D149-8650-9DF3F18680D5}" dt="2022-07-27T10:14:34.151" v="1776" actId="2696"/>
-        <pc:sldMkLst>
-          <pc:docMk/>
-          <pc:sldMk cId="1228403239" sldId="262"/>
-        </pc:sldMkLst>
-      </pc:sldChg>
-      <pc:sldChg chg="addSp modSp add mod">
-        <pc:chgData name="Riccardo Berta" userId="c8694f89-bba4-4576-b0a8-456619ca5a8c" providerId="ADAL" clId="{A8290FA7-622A-D149-8650-9DF3F18680D5}" dt="2022-07-27T10:42:13.820" v="2230" actId="113"/>
-        <pc:sldMkLst>
-          <pc:docMk/>
-          <pc:sldMk cId="4130549615" sldId="262"/>
-        </pc:sldMkLst>
-      </pc:sldChg>
-      <pc:sldChg chg="new del">
-        <pc:chgData name="Riccardo Berta" userId="c8694f89-bba4-4576-b0a8-456619ca5a8c" providerId="ADAL" clId="{A8290FA7-622A-D149-8650-9DF3F18680D5}" dt="2022-07-27T10:14:17.648" v="1770" actId="2696"/>
-        <pc:sldMkLst>
-          <pc:docMk/>
-          <pc:sldMk cId="4179454221" sldId="262"/>
-        </pc:sldMkLst>
-      </pc:sldChg>
-      <pc:sldChg chg="addSp delSp modSp new del mod">
-        <pc:chgData name="Riccardo Berta" userId="c8694f89-bba4-4576-b0a8-456619ca5a8c" providerId="ADAL" clId="{A8290FA7-622A-D149-8650-9DF3F18680D5}" dt="2022-07-27T10:14:36.007" v="1777" actId="2696"/>
-        <pc:sldMkLst>
-          <pc:docMk/>
-          <pc:sldMk cId="2702540954" sldId="263"/>
-        </pc:sldMkLst>
-      </pc:sldChg>
-      <pc:sldChg chg="del">
-        <pc:chgData name="Riccardo Berta" userId="c8694f89-bba4-4576-b0a8-456619ca5a8c" providerId="ADAL" clId="{A8290FA7-622A-D149-8650-9DF3F18680D5}" dt="2022-07-18T11:39:58.451" v="27" actId="2696"/>
-        <pc:sldMkLst>
-          <pc:docMk/>
-          <pc:sldMk cId="3102138681" sldId="263"/>
-        </pc:sldMkLst>
-      </pc:sldChg>
-      <pc:sldChg chg="addSp modSp add del mod">
-        <pc:chgData name="Riccardo Berta" userId="c8694f89-bba4-4576-b0a8-456619ca5a8c" providerId="ADAL" clId="{A8290FA7-622A-D149-8650-9DF3F18680D5}" dt="2022-07-27T10:42:20.886" v="2231" actId="2696"/>
-        <pc:sldMkLst>
-          <pc:docMk/>
-          <pc:sldMk cId="3911169705" sldId="263"/>
-        </pc:sldMkLst>
-      </pc:sldChg>
-      <pc:sldChg chg="del">
-        <pc:chgData name="Riccardo Berta" userId="c8694f89-bba4-4576-b0a8-456619ca5a8c" providerId="ADAL" clId="{A8290FA7-622A-D149-8650-9DF3F18680D5}" dt="2022-07-18T11:39:58.616" v="28" actId="2696"/>
-        <pc:sldMkLst>
-          <pc:docMk/>
-          <pc:sldMk cId="2113557187" sldId="264"/>
-        </pc:sldMkLst>
-      </pc:sldChg>
-      <pc:sldChg chg="del">
-        <pc:chgData name="Riccardo Berta" userId="c8694f89-bba4-4576-b0a8-456619ca5a8c" providerId="ADAL" clId="{A8290FA7-622A-D149-8650-9DF3F18680D5}" dt="2022-07-18T11:39:58.749" v="29" actId="2696"/>
-        <pc:sldMkLst>
-          <pc:docMk/>
-          <pc:sldMk cId="2045385232" sldId="265"/>
-        </pc:sldMkLst>
-      </pc:sldChg>
-      <pc:sldChg chg="del">
-        <pc:chgData name="Riccardo Berta" userId="c8694f89-bba4-4576-b0a8-456619ca5a8c" providerId="ADAL" clId="{A8290FA7-622A-D149-8650-9DF3F18680D5}" dt="2022-07-18T11:39:58.869" v="30" actId="2696"/>
-        <pc:sldMkLst>
-          <pc:docMk/>
-          <pc:sldMk cId="4181844165" sldId="266"/>
-        </pc:sldMkLst>
-      </pc:sldChg>
-      <pc:sldChg chg="del">
-        <pc:chgData name="Riccardo Berta" userId="c8694f89-bba4-4576-b0a8-456619ca5a8c" providerId="ADAL" clId="{A8290FA7-622A-D149-8650-9DF3F18680D5}" dt="2022-07-18T11:39:59.035" v="31" actId="2696"/>
-        <pc:sldMkLst>
-          <pc:docMk/>
-          <pc:sldMk cId="216455838" sldId="267"/>
-        </pc:sldMkLst>
-      </pc:sldChg>
-      <pc:sldChg chg="del">
-        <pc:chgData name="Riccardo Berta" userId="c8694f89-bba4-4576-b0a8-456619ca5a8c" providerId="ADAL" clId="{A8290FA7-622A-D149-8650-9DF3F18680D5}" dt="2022-07-18T11:39:59.202" v="32" actId="2696"/>
-        <pc:sldMkLst>
-          <pc:docMk/>
-          <pc:sldMk cId="3471997037" sldId="269"/>
-        </pc:sldMkLst>
-      </pc:sldChg>
-      <pc:sldChg chg="del">
-        <pc:chgData name="Riccardo Berta" userId="c8694f89-bba4-4576-b0a8-456619ca5a8c" providerId="ADAL" clId="{A8290FA7-622A-D149-8650-9DF3F18680D5}" dt="2022-07-18T11:39:59.363" v="33" actId="2696"/>
-        <pc:sldMkLst>
-          <pc:docMk/>
-          <pc:sldMk cId="3130917410" sldId="270"/>
-        </pc:sldMkLst>
-      </pc:sldChg>
-      <pc:sldChg chg="del">
-        <pc:chgData name="Riccardo Berta" userId="c8694f89-bba4-4576-b0a8-456619ca5a8c" providerId="ADAL" clId="{A8290FA7-622A-D149-8650-9DF3F18680D5}" dt="2022-07-18T11:39:59.502" v="34" actId="2696"/>
-        <pc:sldMkLst>
-          <pc:docMk/>
-          <pc:sldMk cId="2266699268" sldId="271"/>
-        </pc:sldMkLst>
-      </pc:sldChg>
-      <pc:sldChg chg="del">
-        <pc:chgData name="Riccardo Berta" userId="c8694f89-bba4-4576-b0a8-456619ca5a8c" providerId="ADAL" clId="{A8290FA7-622A-D149-8650-9DF3F18680D5}" dt="2022-07-18T11:40:00.091" v="38" actId="2696"/>
-        <pc:sldMkLst>
-          <pc:docMk/>
-          <pc:sldMk cId="993270251" sldId="272"/>
-        </pc:sldMkLst>
-      </pc:sldChg>
-      <pc:sldChg chg="del">
-        <pc:chgData name="Riccardo Berta" userId="c8694f89-bba4-4576-b0a8-456619ca5a8c" providerId="ADAL" clId="{A8290FA7-622A-D149-8650-9DF3F18680D5}" dt="2022-07-18T11:39:59.623" v="35" actId="2696"/>
-        <pc:sldMkLst>
-          <pc:docMk/>
-          <pc:sldMk cId="3843819371" sldId="273"/>
-        </pc:sldMkLst>
-      </pc:sldChg>
-      <pc:sldChg chg="del">
-        <pc:chgData name="Riccardo Berta" userId="c8694f89-bba4-4576-b0a8-456619ca5a8c" providerId="ADAL" clId="{A8290FA7-622A-D149-8650-9DF3F18680D5}" dt="2022-07-18T11:39:59.806" v="36" actId="2696"/>
-        <pc:sldMkLst>
-          <pc:docMk/>
-          <pc:sldMk cId="3084049364" sldId="274"/>
-        </pc:sldMkLst>
-      </pc:sldChg>
-      <pc:sldChg chg="del">
-        <pc:chgData name="Riccardo Berta" userId="c8694f89-bba4-4576-b0a8-456619ca5a8c" providerId="ADAL" clId="{A8290FA7-622A-D149-8650-9DF3F18680D5}" dt="2022-07-18T11:39:59.937" v="37" actId="2696"/>
-        <pc:sldMkLst>
-          <pc:docMk/>
-          <pc:sldMk cId="284781631" sldId="275"/>
-        </pc:sldMkLst>
-      </pc:sldChg>
-      <pc:sldMasterChg chg="modSp mod delSldLayout modSldLayout">
-        <pc:chgData name="Riccardo Berta" userId="c8694f89-bba4-4576-b0a8-456619ca5a8c" providerId="ADAL" clId="{A8290FA7-622A-D149-8650-9DF3F18680D5}" dt="2022-07-27T08:45:00.853" v="1135" actId="20577"/>
-        <pc:sldMasterMkLst>
-          <pc:docMk/>
-          <pc:sldMasterMk cId="0" sldId="2147483659"/>
-        </pc:sldMasterMkLst>
-        <pc:sldLayoutChg chg="del">
-          <pc:chgData name="Riccardo Berta" userId="c8694f89-bba4-4576-b0a8-456619ca5a8c" providerId="ADAL" clId="{A8290FA7-622A-D149-8650-9DF3F18680D5}" dt="2022-07-27T07:48:28.832" v="223" actId="2696"/>
-          <pc:sldLayoutMkLst>
-            <pc:docMk/>
-            <pc:sldMasterMk cId="0" sldId="2147483659"/>
-            <pc:sldLayoutMk cId="0" sldId="2147483649"/>
-          </pc:sldLayoutMkLst>
-        </pc:sldLayoutChg>
-        <pc:sldLayoutChg chg="delSp">
-          <pc:chgData name="Riccardo Berta" userId="c8694f89-bba4-4576-b0a8-456619ca5a8c" providerId="ADAL" clId="{A8290FA7-622A-D149-8650-9DF3F18680D5}" dt="2022-07-27T08:44:23.725" v="1124"/>
-          <pc:sldLayoutMkLst>
-            <pc:docMk/>
-            <pc:sldMasterMk cId="0" sldId="2147483659"/>
-            <pc:sldLayoutMk cId="0" sldId="2147483650"/>
-          </pc:sldLayoutMkLst>
-        </pc:sldLayoutChg>
-      </pc:sldMasterChg>
-    </pc:docChg>
-  </pc:docChgLst>
-  <pc:docChgLst>
-    <pc:chgData name="Riccardo Berta" userId="c8694f89-bba4-4576-b0a8-456619ca5a8c" providerId="ADAL" clId="{3E7BAF75-66AC-6246-A6D2-BF46DE9AAFF9}"/>
-    <pc:docChg chg="undo custSel addSld delSld modSld sldOrd">
-      <pc:chgData name="Riccardo Berta" userId="c8694f89-bba4-4576-b0a8-456619ca5a8c" providerId="ADAL" clId="{3E7BAF75-66AC-6246-A6D2-BF46DE9AAFF9}" dt="2022-10-10T06:50:03.464" v="408" actId="2696"/>
-      <pc:docMkLst>
-        <pc:docMk/>
-      </pc:docMkLst>
-      <pc:sldChg chg="modSp mod">
-        <pc:chgData name="Riccardo Berta" userId="c8694f89-bba4-4576-b0a8-456619ca5a8c" providerId="ADAL" clId="{3E7BAF75-66AC-6246-A6D2-BF46DE9AAFF9}" dt="2022-10-10T05:46:15.837" v="2"/>
-        <pc:sldMkLst>
-          <pc:docMk/>
-          <pc:sldMk cId="0" sldId="256"/>
-        </pc:sldMkLst>
-      </pc:sldChg>
-      <pc:sldChg chg="addSp delSp modSp del mod">
-        <pc:chgData name="Riccardo Berta" userId="c8694f89-bba4-4576-b0a8-456619ca5a8c" providerId="ADAL" clId="{3E7BAF75-66AC-6246-A6D2-BF46DE9AAFF9}" dt="2022-10-10T06:50:03.464" v="408" actId="2696"/>
-        <pc:sldMkLst>
-          <pc:docMk/>
-          <pc:sldMk cId="0" sldId="257"/>
-        </pc:sldMkLst>
-      </pc:sldChg>
-      <pc:sldChg chg="modSp mod">
-        <pc:chgData name="Riccardo Berta" userId="c8694f89-bba4-4576-b0a8-456619ca5a8c" providerId="ADAL" clId="{3E7BAF75-66AC-6246-A6D2-BF46DE9AAFF9}" dt="2022-10-10T06:49:57.961" v="406" actId="20577"/>
-        <pc:sldMkLst>
-          <pc:docMk/>
-          <pc:sldMk cId="0" sldId="264"/>
-        </pc:sldMkLst>
-      </pc:sldChg>
-      <pc:sldChg chg="add">
-        <pc:chgData name="Riccardo Berta" userId="c8694f89-bba4-4576-b0a8-456619ca5a8c" providerId="ADAL" clId="{3E7BAF75-66AC-6246-A6D2-BF46DE9AAFF9}" dt="2022-10-10T05:46:57.632" v="59"/>
-        <pc:sldMkLst>
-          <pc:docMk/>
-          <pc:sldMk cId="2056707301" sldId="265"/>
-        </pc:sldMkLst>
-      </pc:sldChg>
-      <pc:sldChg chg="del">
-        <pc:chgData name="Riccardo Berta" userId="c8694f89-bba4-4576-b0a8-456619ca5a8c" providerId="ADAL" clId="{3E7BAF75-66AC-6246-A6D2-BF46DE9AAFF9}" dt="2022-10-10T05:46:43.197" v="39" actId="2696"/>
-        <pc:sldMkLst>
-          <pc:docMk/>
-          <pc:sldMk cId="4260925133" sldId="265"/>
-        </pc:sldMkLst>
-      </pc:sldChg>
-      <pc:sldChg chg="del">
-        <pc:chgData name="Riccardo Berta" userId="c8694f89-bba4-4576-b0a8-456619ca5a8c" providerId="ADAL" clId="{3E7BAF75-66AC-6246-A6D2-BF46DE9AAFF9}" dt="2022-10-10T05:46:44.845" v="43" actId="2696"/>
-        <pc:sldMkLst>
-          <pc:docMk/>
-          <pc:sldMk cId="2074499598" sldId="266"/>
-        </pc:sldMkLst>
-      </pc:sldChg>
-      <pc:sldChg chg="add">
-        <pc:chgData name="Riccardo Berta" userId="c8694f89-bba4-4576-b0a8-456619ca5a8c" providerId="ADAL" clId="{3E7BAF75-66AC-6246-A6D2-BF46DE9AAFF9}" dt="2022-10-10T05:46:58.085" v="60"/>
-        <pc:sldMkLst>
-          <pc:docMk/>
-          <pc:sldMk cId="3627108427" sldId="266"/>
-        </pc:sldMkLst>
-      </pc:sldChg>
-      <pc:sldChg chg="add">
-        <pc:chgData name="Riccardo Berta" userId="c8694f89-bba4-4576-b0a8-456619ca5a8c" providerId="ADAL" clId="{3E7BAF75-66AC-6246-A6D2-BF46DE9AAFF9}" dt="2022-10-10T05:46:58.436" v="61"/>
-        <pc:sldMkLst>
-          <pc:docMk/>
-          <pc:sldMk cId="755056336" sldId="267"/>
-        </pc:sldMkLst>
-      </pc:sldChg>
-      <pc:sldChg chg="del">
-        <pc:chgData name="Riccardo Berta" userId="c8694f89-bba4-4576-b0a8-456619ca5a8c" providerId="ADAL" clId="{3E7BAF75-66AC-6246-A6D2-BF46DE9AAFF9}" dt="2022-10-10T05:46:43.684" v="40" actId="2696"/>
-        <pc:sldMkLst>
-          <pc:docMk/>
-          <pc:sldMk cId="2259674710" sldId="267"/>
-        </pc:sldMkLst>
-      </pc:sldChg>
-      <pc:sldChg chg="add">
-        <pc:chgData name="Riccardo Berta" userId="c8694f89-bba4-4576-b0a8-456619ca5a8c" providerId="ADAL" clId="{3E7BAF75-66AC-6246-A6D2-BF46DE9AAFF9}" dt="2022-10-10T05:46:58.789" v="62"/>
-        <pc:sldMkLst>
-          <pc:docMk/>
-          <pc:sldMk cId="2533931395" sldId="268"/>
-        </pc:sldMkLst>
-      </pc:sldChg>
-      <pc:sldChg chg="del">
-        <pc:chgData name="Riccardo Berta" userId="c8694f89-bba4-4576-b0a8-456619ca5a8c" providerId="ADAL" clId="{3E7BAF75-66AC-6246-A6D2-BF46DE9AAFF9}" dt="2022-10-10T05:46:44.071" v="41" actId="2696"/>
-        <pc:sldMkLst>
-          <pc:docMk/>
-          <pc:sldMk cId="2756532613" sldId="268"/>
-        </pc:sldMkLst>
-      </pc:sldChg>
-      <pc:sldChg chg="add">
-        <pc:chgData name="Riccardo Berta" userId="c8694f89-bba4-4576-b0a8-456619ca5a8c" providerId="ADAL" clId="{3E7BAF75-66AC-6246-A6D2-BF46DE9AAFF9}" dt="2022-10-10T05:46:59.115" v="63"/>
-        <pc:sldMkLst>
-          <pc:docMk/>
-          <pc:sldMk cId="3588489452" sldId="269"/>
-        </pc:sldMkLst>
-      </pc:sldChg>
-      <pc:sldChg chg="del">
-        <pc:chgData name="Riccardo Berta" userId="c8694f89-bba4-4576-b0a8-456619ca5a8c" providerId="ADAL" clId="{3E7BAF75-66AC-6246-A6D2-BF46DE9AAFF9}" dt="2022-10-10T05:46:44.473" v="42" actId="2696"/>
-        <pc:sldMkLst>
-          <pc:docMk/>
-          <pc:sldMk cId="3950372499" sldId="269"/>
-        </pc:sldMkLst>
-      </pc:sldChg>
-      <pc:sldChg chg="addSp delSp modSp add del mod ord">
-        <pc:chgData name="Riccardo Berta" userId="c8694f89-bba4-4576-b0a8-456619ca5a8c" providerId="ADAL" clId="{3E7BAF75-66AC-6246-A6D2-BF46DE9AAFF9}" dt="2022-10-10T06:50:00.088" v="407" actId="2696"/>
-        <pc:sldMkLst>
-          <pc:docMk/>
-          <pc:sldMk cId="1602265730" sldId="270"/>
-        </pc:sldMkLst>
-      </pc:sldChg>
-      <pc:sldChg chg="del">
-        <pc:chgData name="Riccardo Berta" userId="c8694f89-bba4-4576-b0a8-456619ca5a8c" providerId="ADAL" clId="{3E7BAF75-66AC-6246-A6D2-BF46DE9AAFF9}" dt="2022-10-10T05:46:45.250" v="44" actId="2696"/>
-        <pc:sldMkLst>
-          <pc:docMk/>
-          <pc:sldMk cId="3668836689" sldId="270"/>
-        </pc:sldMkLst>
-      </pc:sldChg>
-      <pc:sldChg chg="del">
-        <pc:chgData name="Riccardo Berta" userId="c8694f89-bba4-4576-b0a8-456619ca5a8c" providerId="ADAL" clId="{3E7BAF75-66AC-6246-A6D2-BF46DE9AAFF9}" dt="2022-10-10T05:46:45.673" v="45" actId="2696"/>
-        <pc:sldMkLst>
-          <pc:docMk/>
-          <pc:sldMk cId="1894295752" sldId="271"/>
-        </pc:sldMkLst>
-      </pc:sldChg>
-      <pc:sldChg chg="del">
-        <pc:chgData name="Riccardo Berta" userId="c8694f89-bba4-4576-b0a8-456619ca5a8c" providerId="ADAL" clId="{3E7BAF75-66AC-6246-A6D2-BF46DE9AAFF9}" dt="2022-10-10T05:46:46.147" v="46" actId="2696"/>
-        <pc:sldMkLst>
-          <pc:docMk/>
-          <pc:sldMk cId="732868139" sldId="272"/>
-        </pc:sldMkLst>
-      </pc:sldChg>
-      <pc:sldChg chg="del">
-        <pc:chgData name="Riccardo Berta" userId="c8694f89-bba4-4576-b0a8-456619ca5a8c" providerId="ADAL" clId="{3E7BAF75-66AC-6246-A6D2-BF46DE9AAFF9}" dt="2022-10-10T05:46:46.631" v="47" actId="2696"/>
-        <pc:sldMkLst>
-          <pc:docMk/>
-          <pc:sldMk cId="3859598341" sldId="273"/>
-        </pc:sldMkLst>
-      </pc:sldChg>
-      <pc:sldChg chg="del">
-        <pc:chgData name="Riccardo Berta" userId="c8694f89-bba4-4576-b0a8-456619ca5a8c" providerId="ADAL" clId="{3E7BAF75-66AC-6246-A6D2-BF46DE9AAFF9}" dt="2022-10-10T05:46:47.315" v="48" actId="2696"/>
-        <pc:sldMkLst>
-          <pc:docMk/>
-          <pc:sldMk cId="2213323745" sldId="274"/>
-        </pc:sldMkLst>
-      </pc:sldChg>
-      <pc:sldChg chg="del">
-        <pc:chgData name="Riccardo Berta" userId="c8694f89-bba4-4576-b0a8-456619ca5a8c" providerId="ADAL" clId="{3E7BAF75-66AC-6246-A6D2-BF46DE9AAFF9}" dt="2022-10-10T05:46:47.713" v="49" actId="2696"/>
-        <pc:sldMkLst>
-          <pc:docMk/>
-          <pc:sldMk cId="303121765" sldId="275"/>
-        </pc:sldMkLst>
-      </pc:sldChg>
-      <pc:sldChg chg="del">
-        <pc:chgData name="Riccardo Berta" userId="c8694f89-bba4-4576-b0a8-456619ca5a8c" providerId="ADAL" clId="{3E7BAF75-66AC-6246-A6D2-BF46DE9AAFF9}" dt="2022-10-10T05:46:48.481" v="50" actId="2696"/>
-        <pc:sldMkLst>
-          <pc:docMk/>
-          <pc:sldMk cId="2020526202" sldId="276"/>
-        </pc:sldMkLst>
-      </pc:sldChg>
-      <pc:sldChg chg="del">
-        <pc:chgData name="Riccardo Berta" userId="c8694f89-bba4-4576-b0a8-456619ca5a8c" providerId="ADAL" clId="{3E7BAF75-66AC-6246-A6D2-BF46DE9AAFF9}" dt="2022-10-10T05:46:48.981" v="51" actId="2696"/>
-        <pc:sldMkLst>
-          <pc:docMk/>
-          <pc:sldMk cId="3156887330" sldId="277"/>
-        </pc:sldMkLst>
-      </pc:sldChg>
-      <pc:sldChg chg="del">
-        <pc:chgData name="Riccardo Berta" userId="c8694f89-bba4-4576-b0a8-456619ca5a8c" providerId="ADAL" clId="{3E7BAF75-66AC-6246-A6D2-BF46DE9AAFF9}" dt="2022-10-10T05:46:49.684" v="52" actId="2696"/>
-        <pc:sldMkLst>
-          <pc:docMk/>
-          <pc:sldMk cId="1586284290" sldId="278"/>
-        </pc:sldMkLst>
-      </pc:sldChg>
-      <pc:sldChg chg="del">
-        <pc:chgData name="Riccardo Berta" userId="c8694f89-bba4-4576-b0a8-456619ca5a8c" providerId="ADAL" clId="{3E7BAF75-66AC-6246-A6D2-BF46DE9AAFF9}" dt="2022-10-10T05:46:50.239" v="53" actId="2696"/>
-        <pc:sldMkLst>
-          <pc:docMk/>
-          <pc:sldMk cId="2677523252" sldId="279"/>
-        </pc:sldMkLst>
-      </pc:sldChg>
-      <pc:sldChg chg="del">
-        <pc:chgData name="Riccardo Berta" userId="c8694f89-bba4-4576-b0a8-456619ca5a8c" providerId="ADAL" clId="{3E7BAF75-66AC-6246-A6D2-BF46DE9AAFF9}" dt="2022-10-10T05:46:52.009" v="54" actId="2696"/>
-        <pc:sldMkLst>
-          <pc:docMk/>
-          <pc:sldMk cId="635836889" sldId="280"/>
-        </pc:sldMkLst>
-      </pc:sldChg>
-      <pc:sldChg chg="del">
-        <pc:chgData name="Riccardo Berta" userId="c8694f89-bba4-4576-b0a8-456619ca5a8c" providerId="ADAL" clId="{3E7BAF75-66AC-6246-A6D2-BF46DE9AAFF9}" dt="2022-10-10T05:46:52.591" v="55" actId="2696"/>
-        <pc:sldMkLst>
-          <pc:docMk/>
-          <pc:sldMk cId="2288803032" sldId="281"/>
-        </pc:sldMkLst>
-      </pc:sldChg>
-      <pc:sldChg chg="del">
-        <pc:chgData name="Riccardo Berta" userId="c8694f89-bba4-4576-b0a8-456619ca5a8c" providerId="ADAL" clId="{3E7BAF75-66AC-6246-A6D2-BF46DE9AAFF9}" dt="2022-10-10T05:46:53.984" v="57" actId="2696"/>
-        <pc:sldMkLst>
-          <pc:docMk/>
-          <pc:sldMk cId="663506827" sldId="282"/>
-        </pc:sldMkLst>
-      </pc:sldChg>
-      <pc:sldChg chg="del">
-        <pc:chgData name="Riccardo Berta" userId="c8694f89-bba4-4576-b0a8-456619ca5a8c" providerId="ADAL" clId="{3E7BAF75-66AC-6246-A6D2-BF46DE9AAFF9}" dt="2022-10-10T05:46:55.020" v="58" actId="2696"/>
-        <pc:sldMkLst>
-          <pc:docMk/>
-          <pc:sldMk cId="2423864326" sldId="283"/>
-        </pc:sldMkLst>
-      </pc:sldChg>
-      <pc:sldChg chg="del">
-        <pc:chgData name="Riccardo Berta" userId="c8694f89-bba4-4576-b0a8-456619ca5a8c" providerId="ADAL" clId="{3E7BAF75-66AC-6246-A6D2-BF46DE9AAFF9}" dt="2022-10-10T05:46:53.442" v="56" actId="2696"/>
-        <pc:sldMkLst>
-          <pc:docMk/>
-          <pc:sldMk cId="852930802" sldId="284"/>
-        </pc:sldMkLst>
-      </pc:sldChg>
-    </pc:docChg>
-  </pc:docChgLst>
-  <pc:docChgLst>
-    <pc:chgData name="Riccardo Berta" userId="c8694f89-bba4-4576-b0a8-456619ca5a8c" providerId="ADAL" clId="{285D91C1-4BF4-0841-A283-B28F698AE366}"/>
-    <pc:docChg chg="custSel addSld modSld">
-      <pc:chgData name="Riccardo Berta" userId="c8694f89-bba4-4576-b0a8-456619ca5a8c" providerId="ADAL" clId="{285D91C1-4BF4-0841-A283-B28F698AE366}" dt="2022-08-26T17:01:29.210" v="222" actId="20577"/>
-      <pc:docMkLst>
-        <pc:docMk/>
-      </pc:docMkLst>
-      <pc:sldChg chg="addSp delSp modSp add mod">
-        <pc:chgData name="Riccardo Berta" userId="c8694f89-bba4-4576-b0a8-456619ca5a8c" providerId="ADAL" clId="{285D91C1-4BF4-0841-A283-B28F698AE366}" dt="2022-08-26T17:01:29.210" v="222" actId="20577"/>
-        <pc:sldMkLst>
-          <pc:docMk/>
-          <pc:sldMk cId="1388305878" sldId="277"/>
-        </pc:sldMkLst>
-      </pc:sldChg>
-      <pc:sldChg chg="addSp delSp modSp add mod">
-        <pc:chgData name="Riccardo Berta" userId="c8694f89-bba4-4576-b0a8-456619ca5a8c" providerId="ADAL" clId="{285D91C1-4BF4-0841-A283-B28F698AE366}" dt="2022-08-26T17:01:19.085" v="220" actId="1076"/>
-        <pc:sldMkLst>
-          <pc:docMk/>
-          <pc:sldMk cId="2276488042" sldId="278"/>
-        </pc:sldMkLst>
-      </pc:sldChg>
-    </pc:docChg>
-  </pc:docChgLst>
-  <pc:docChgLst>
-    <pc:chgData name="Riccardo Berta" userId="c8694f89-bba4-4576-b0a8-456619ca5a8c" providerId="ADAL" clId="{58424B7E-67A2-E24B-9516-C248AFA19009}"/>
-    <pc:docChg chg="undo custSel addSld delSld modSld sldOrd modMainMaster">
-      <pc:chgData name="Riccardo Berta" userId="c8694f89-bba4-4576-b0a8-456619ca5a8c" providerId="ADAL" clId="{58424B7E-67A2-E24B-9516-C248AFA19009}" dt="2022-08-30T09:41:00.751" v="1457" actId="20577"/>
-      <pc:docMkLst>
-        <pc:docMk/>
-      </pc:docMkLst>
-      <pc:sldChg chg="modSp mod">
-        <pc:chgData name="Riccardo Berta" userId="c8694f89-bba4-4576-b0a8-456619ca5a8c" providerId="ADAL" clId="{58424B7E-67A2-E24B-9516-C248AFA19009}" dt="2022-08-30T09:38:38.114" v="1432" actId="790"/>
-        <pc:sldMkLst>
-          <pc:docMk/>
-          <pc:sldMk cId="0" sldId="256"/>
-        </pc:sldMkLst>
-      </pc:sldChg>
-      <pc:sldChg chg="addSp modSp mod">
-        <pc:chgData name="Riccardo Berta" userId="c8694f89-bba4-4576-b0a8-456619ca5a8c" providerId="ADAL" clId="{58424B7E-67A2-E24B-9516-C248AFA19009}" dt="2022-08-30T09:37:52.468" v="1397" actId="20577"/>
-        <pc:sldMkLst>
-          <pc:docMk/>
-          <pc:sldMk cId="0" sldId="257"/>
-        </pc:sldMkLst>
-      </pc:sldChg>
-      <pc:sldChg chg="modSp mod">
-        <pc:chgData name="Riccardo Berta" userId="c8694f89-bba4-4576-b0a8-456619ca5a8c" providerId="ADAL" clId="{58424B7E-67A2-E24B-9516-C248AFA19009}" dt="2022-08-30T09:41:00.751" v="1457" actId="20577"/>
-        <pc:sldMkLst>
-          <pc:docMk/>
-          <pc:sldMk cId="3018556184" sldId="259"/>
-        </pc:sldMkLst>
-      </pc:sldChg>
-      <pc:sldChg chg="del">
-        <pc:chgData name="Riccardo Berta" userId="c8694f89-bba4-4576-b0a8-456619ca5a8c" providerId="ADAL" clId="{58424B7E-67A2-E24B-9516-C248AFA19009}" dt="2022-08-30T08:44:09.932" v="12" actId="2696"/>
-        <pc:sldMkLst>
-          <pc:docMk/>
-          <pc:sldMk cId="1066709261" sldId="260"/>
-        </pc:sldMkLst>
-      </pc:sldChg>
-      <pc:sldChg chg="addSp modSp add mod">
-        <pc:chgData name="Riccardo Berta" userId="c8694f89-bba4-4576-b0a8-456619ca5a8c" providerId="ADAL" clId="{58424B7E-67A2-E24B-9516-C248AFA19009}" dt="2022-08-30T09:38:04.406" v="1411" actId="20577"/>
-        <pc:sldMkLst>
-          <pc:docMk/>
-          <pc:sldMk cId="3692252167" sldId="260"/>
-        </pc:sldMkLst>
-      </pc:sldChg>
-      <pc:sldChg chg="addSp modSp add mod">
-        <pc:chgData name="Riccardo Berta" userId="c8694f89-bba4-4576-b0a8-456619ca5a8c" providerId="ADAL" clId="{58424B7E-67A2-E24B-9516-C248AFA19009}" dt="2022-08-30T09:35:29.211" v="1307" actId="21"/>
-        <pc:sldMkLst>
-          <pc:docMk/>
-          <pc:sldMk cId="846979211" sldId="261"/>
-        </pc:sldMkLst>
-      </pc:sldChg>
-      <pc:sldChg chg="modSp add mod">
-        <pc:chgData name="Riccardo Berta" userId="c8694f89-bba4-4576-b0a8-456619ca5a8c" providerId="ADAL" clId="{58424B7E-67A2-E24B-9516-C248AFA19009}" dt="2022-08-30T09:19:27.119" v="830" actId="20577"/>
-        <pc:sldMkLst>
-          <pc:docMk/>
-          <pc:sldMk cId="447929702" sldId="262"/>
-        </pc:sldMkLst>
-      </pc:sldChg>
-      <pc:sldChg chg="addSp modSp add mod ord">
-        <pc:chgData name="Riccardo Berta" userId="c8694f89-bba4-4576-b0a8-456619ca5a8c" providerId="ADAL" clId="{58424B7E-67A2-E24B-9516-C248AFA19009}" dt="2022-08-30T09:40:40.663" v="1434" actId="20578"/>
-        <pc:sldMkLst>
-          <pc:docMk/>
-          <pc:sldMk cId="11402927" sldId="263"/>
-        </pc:sldMkLst>
-      </pc:sldChg>
-      <pc:sldChg chg="del">
-        <pc:chgData name="Riccardo Berta" userId="c8694f89-bba4-4576-b0a8-456619ca5a8c" providerId="ADAL" clId="{58424B7E-67A2-E24B-9516-C248AFA19009}" dt="2022-08-30T08:44:10.781" v="14" actId="2696"/>
-        <pc:sldMkLst>
-          <pc:docMk/>
-          <pc:sldMk cId="2190566097" sldId="263"/>
-        </pc:sldMkLst>
-      </pc:sldChg>
-      <pc:sldChg chg="modSp add mod ord">
-        <pc:chgData name="Riccardo Berta" userId="c8694f89-bba4-4576-b0a8-456619ca5a8c" providerId="ADAL" clId="{58424B7E-67A2-E24B-9516-C248AFA19009}" dt="2022-08-30T09:40:38.066" v="1433" actId="20578"/>
-        <pc:sldMkLst>
-          <pc:docMk/>
-          <pc:sldMk cId="2794482370" sldId="264"/>
-        </pc:sldMkLst>
-      </pc:sldChg>
-      <pc:sldChg chg="del">
-        <pc:chgData name="Riccardo Berta" userId="c8694f89-bba4-4576-b0a8-456619ca5a8c" providerId="ADAL" clId="{58424B7E-67A2-E24B-9516-C248AFA19009}" dt="2022-08-30T08:44:11.185" v="15" actId="2696"/>
-        <pc:sldMkLst>
-          <pc:docMk/>
-          <pc:sldMk cId="3888810046" sldId="264"/>
-        </pc:sldMkLst>
-      </pc:sldChg>
-      <pc:sldChg chg="add del">
-        <pc:chgData name="Riccardo Berta" userId="c8694f89-bba4-4576-b0a8-456619ca5a8c" providerId="ADAL" clId="{58424B7E-67A2-E24B-9516-C248AFA19009}" dt="2022-08-30T09:40:43.113" v="1435" actId="2696"/>
-        <pc:sldMkLst>
-          <pc:docMk/>
-          <pc:sldMk cId="1840044115" sldId="265"/>
-        </pc:sldMkLst>
-      </pc:sldChg>
-      <pc:sldChg chg="del">
-        <pc:chgData name="Riccardo Berta" userId="c8694f89-bba4-4576-b0a8-456619ca5a8c" providerId="ADAL" clId="{58424B7E-67A2-E24B-9516-C248AFA19009}" dt="2022-08-30T08:44:10.392" v="13" actId="2696"/>
-        <pc:sldMkLst>
-          <pc:docMk/>
-          <pc:sldMk cId="2733657070" sldId="265"/>
-        </pc:sldMkLst>
-      </pc:sldChg>
-      <pc:sldChg chg="del">
-        <pc:chgData name="Riccardo Berta" userId="c8694f89-bba4-4576-b0a8-456619ca5a8c" providerId="ADAL" clId="{58424B7E-67A2-E24B-9516-C248AFA19009}" dt="2022-08-30T08:44:11.546" v="16" actId="2696"/>
-        <pc:sldMkLst>
-          <pc:docMk/>
-          <pc:sldMk cId="2836957529" sldId="266"/>
-        </pc:sldMkLst>
-      </pc:sldChg>
-      <pc:sldChg chg="add del">
-        <pc:chgData name="Riccardo Berta" userId="c8694f89-bba4-4576-b0a8-456619ca5a8c" providerId="ADAL" clId="{58424B7E-67A2-E24B-9516-C248AFA19009}" dt="2022-08-30T09:40:44.686" v="1436" actId="2696"/>
-        <pc:sldMkLst>
-          <pc:docMk/>
-          <pc:sldMk cId="3173063083" sldId="266"/>
-        </pc:sldMkLst>
-      </pc:sldChg>
-      <pc:sldChg chg="del">
-        <pc:chgData name="Riccardo Berta" userId="c8694f89-bba4-4576-b0a8-456619ca5a8c" providerId="ADAL" clId="{58424B7E-67A2-E24B-9516-C248AFA19009}" dt="2022-08-30T08:44:11.879" v="17" actId="2696"/>
-        <pc:sldMkLst>
-          <pc:docMk/>
-          <pc:sldMk cId="3519359877" sldId="267"/>
-        </pc:sldMkLst>
-      </pc:sldChg>
-      <pc:sldChg chg="add del">
-        <pc:chgData name="Riccardo Berta" userId="c8694f89-bba4-4576-b0a8-456619ca5a8c" providerId="ADAL" clId="{58424B7E-67A2-E24B-9516-C248AFA19009}" dt="2022-08-30T09:40:45.351" v="1437" actId="2696"/>
-        <pc:sldMkLst>
-          <pc:docMk/>
-          <pc:sldMk cId="4284808824" sldId="267"/>
-        </pc:sldMkLst>
-      </pc:sldChg>
-      <pc:sldChg chg="add del">
-        <pc:chgData name="Riccardo Berta" userId="c8694f89-bba4-4576-b0a8-456619ca5a8c" providerId="ADAL" clId="{58424B7E-67A2-E24B-9516-C248AFA19009}" dt="2022-08-30T09:40:46.386" v="1438" actId="2696"/>
-        <pc:sldMkLst>
-          <pc:docMk/>
-          <pc:sldMk cId="2262434218" sldId="268"/>
-        </pc:sldMkLst>
-      </pc:sldChg>
-      <pc:sldChg chg="del">
-        <pc:chgData name="Riccardo Berta" userId="c8694f89-bba4-4576-b0a8-456619ca5a8c" providerId="ADAL" clId="{58424B7E-67A2-E24B-9516-C248AFA19009}" dt="2022-08-30T08:44:12.296" v="18" actId="2696"/>
-        <pc:sldMkLst>
-          <pc:docMk/>
-          <pc:sldMk cId="3883776362" sldId="268"/>
-        </pc:sldMkLst>
-      </pc:sldChg>
-      <pc:sldChg chg="del">
-        <pc:chgData name="Riccardo Berta" userId="c8694f89-bba4-4576-b0a8-456619ca5a8c" providerId="ADAL" clId="{58424B7E-67A2-E24B-9516-C248AFA19009}" dt="2022-08-30T08:44:12.734" v="19" actId="2696"/>
-        <pc:sldMkLst>
-          <pc:docMk/>
-          <pc:sldMk cId="482081013" sldId="269"/>
-        </pc:sldMkLst>
-      </pc:sldChg>
-      <pc:sldChg chg="del">
-        <pc:chgData name="Riccardo Berta" userId="c8694f89-bba4-4576-b0a8-456619ca5a8c" providerId="ADAL" clId="{58424B7E-67A2-E24B-9516-C248AFA19009}" dt="2022-08-30T08:44:13.162" v="20" actId="2696"/>
-        <pc:sldMkLst>
-          <pc:docMk/>
-          <pc:sldMk cId="761532774" sldId="270"/>
-        </pc:sldMkLst>
-      </pc:sldChg>
-      <pc:sldChg chg="del">
-        <pc:chgData name="Riccardo Berta" userId="c8694f89-bba4-4576-b0a8-456619ca5a8c" providerId="ADAL" clId="{58424B7E-67A2-E24B-9516-C248AFA19009}" dt="2022-08-30T08:44:13.596" v="21" actId="2696"/>
-        <pc:sldMkLst>
-          <pc:docMk/>
-          <pc:sldMk cId="3967202540" sldId="271"/>
-        </pc:sldMkLst>
-      </pc:sldChg>
-      <pc:sldChg chg="del">
-        <pc:chgData name="Riccardo Berta" userId="c8694f89-bba4-4576-b0a8-456619ca5a8c" providerId="ADAL" clId="{58424B7E-67A2-E24B-9516-C248AFA19009}" dt="2022-08-30T08:44:14.037" v="22" actId="2696"/>
-        <pc:sldMkLst>
-          <pc:docMk/>
-          <pc:sldMk cId="2355894371" sldId="272"/>
-        </pc:sldMkLst>
-      </pc:sldChg>
-      <pc:sldChg chg="del">
-        <pc:chgData name="Riccardo Berta" userId="c8694f89-bba4-4576-b0a8-456619ca5a8c" providerId="ADAL" clId="{58424B7E-67A2-E24B-9516-C248AFA19009}" dt="2022-08-30T08:44:14.570" v="23" actId="2696"/>
-        <pc:sldMkLst>
-          <pc:docMk/>
-          <pc:sldMk cId="3843819371" sldId="273"/>
-        </pc:sldMkLst>
-      </pc:sldChg>
-      <pc:sldChg chg="del">
-        <pc:chgData name="Riccardo Berta" userId="c8694f89-bba4-4576-b0a8-456619ca5a8c" providerId="ADAL" clId="{58424B7E-67A2-E24B-9516-C248AFA19009}" dt="2022-08-30T08:44:15.613" v="24" actId="2696"/>
-        <pc:sldMkLst>
-          <pc:docMk/>
-          <pc:sldMk cId="806177680" sldId="274"/>
-        </pc:sldMkLst>
-      </pc:sldChg>
-      <pc:sldChg chg="del">
-        <pc:chgData name="Riccardo Berta" userId="c8694f89-bba4-4576-b0a8-456619ca5a8c" providerId="ADAL" clId="{58424B7E-67A2-E24B-9516-C248AFA19009}" dt="2022-08-30T08:44:16.250" v="25" actId="2696"/>
-        <pc:sldMkLst>
-          <pc:docMk/>
-          <pc:sldMk cId="284781631" sldId="275"/>
-        </pc:sldMkLst>
-      </pc:sldChg>
-      <pc:sldChg chg="del">
-        <pc:chgData name="Riccardo Berta" userId="c8694f89-bba4-4576-b0a8-456619ca5a8c" providerId="ADAL" clId="{58424B7E-67A2-E24B-9516-C248AFA19009}" dt="2022-08-30T08:44:17.013" v="26" actId="2696"/>
-        <pc:sldMkLst>
-          <pc:docMk/>
-          <pc:sldMk cId="4125292156" sldId="276"/>
-        </pc:sldMkLst>
-      </pc:sldChg>
-      <pc:sldChg chg="del">
-        <pc:chgData name="Riccardo Berta" userId="c8694f89-bba4-4576-b0a8-456619ca5a8c" providerId="ADAL" clId="{58424B7E-67A2-E24B-9516-C248AFA19009}" dt="2022-08-30T08:44:17.602" v="27" actId="2696"/>
-        <pc:sldMkLst>
-          <pc:docMk/>
-          <pc:sldMk cId="1388305878" sldId="277"/>
-        </pc:sldMkLst>
-      </pc:sldChg>
-      <pc:sldChg chg="del">
-        <pc:chgData name="Riccardo Berta" userId="c8694f89-bba4-4576-b0a8-456619ca5a8c" providerId="ADAL" clId="{58424B7E-67A2-E24B-9516-C248AFA19009}" dt="2022-08-30T08:44:18.091" v="28" actId="2696"/>
-        <pc:sldMkLst>
-          <pc:docMk/>
-          <pc:sldMk cId="2276488042" sldId="278"/>
-        </pc:sldMkLst>
-      </pc:sldChg>
-      <pc:sldMasterChg chg="modSldLayout">
-        <pc:chgData name="Riccardo Berta" userId="c8694f89-bba4-4576-b0a8-456619ca5a8c" providerId="ADAL" clId="{58424B7E-67A2-E24B-9516-C248AFA19009}" dt="2022-08-30T08:51:17.059" v="152" actId="948"/>
-        <pc:sldMasterMkLst>
-          <pc:docMk/>
-          <pc:sldMasterMk cId="0" sldId="2147483659"/>
-        </pc:sldMasterMkLst>
-        <pc:sldLayoutChg chg="modSp mod">
-          <pc:chgData name="Riccardo Berta" userId="c8694f89-bba4-4576-b0a8-456619ca5a8c" providerId="ADAL" clId="{58424B7E-67A2-E24B-9516-C248AFA19009}" dt="2022-08-30T08:51:17.059" v="152" actId="948"/>
-          <pc:sldLayoutMkLst>
-            <pc:docMk/>
-            <pc:sldMasterMk cId="0" sldId="2147483659"/>
-            <pc:sldLayoutMk cId="0" sldId="2147483650"/>
-          </pc:sldLayoutMkLst>
-        </pc:sldLayoutChg>
-      </pc:sldMasterChg>
-    </pc:docChg>
-  </pc:docChgLst>
-  <pc:docChgLst>
-    <pc:chgData name="Riccardo Berta" userId="c8694f89-bba4-4576-b0a8-456619ca5a8c" providerId="ADAL" clId="{89457721-8AF9-BB44-BAF2-46F7B0D7D7E8}"/>
-    <pc:docChg chg="custSel addSld delSld modSld">
-      <pc:chgData name="Riccardo Berta" userId="c8694f89-bba4-4576-b0a8-456619ca5a8c" providerId="ADAL" clId="{89457721-8AF9-BB44-BAF2-46F7B0D7D7E8}" dt="2022-08-30T09:55:24.863" v="44" actId="20577"/>
-      <pc:docMkLst>
-        <pc:docMk/>
-      </pc:docMkLst>
-      <pc:sldChg chg="modSp mod">
-        <pc:chgData name="Riccardo Berta" userId="c8694f89-bba4-4576-b0a8-456619ca5a8c" providerId="ADAL" clId="{89457721-8AF9-BB44-BAF2-46F7B0D7D7E8}" dt="2022-08-30T09:54:06.379" v="7" actId="20577"/>
-        <pc:sldMkLst>
-          <pc:docMk/>
-          <pc:sldMk cId="0" sldId="256"/>
-        </pc:sldMkLst>
-      </pc:sldChg>
-      <pc:sldChg chg="delSp modSp mod">
-        <pc:chgData name="Riccardo Berta" userId="c8694f89-bba4-4576-b0a8-456619ca5a8c" providerId="ADAL" clId="{89457721-8AF9-BB44-BAF2-46F7B0D7D7E8}" dt="2022-08-30T09:54:23.221" v="18" actId="478"/>
-        <pc:sldMkLst>
-          <pc:docMk/>
-          <pc:sldMk cId="0" sldId="257"/>
-        </pc:sldMkLst>
-      </pc:sldChg>
-      <pc:sldChg chg="modSp mod">
-        <pc:chgData name="Riccardo Berta" userId="c8694f89-bba4-4576-b0a8-456619ca5a8c" providerId="ADAL" clId="{89457721-8AF9-BB44-BAF2-46F7B0D7D7E8}" dt="2022-08-30T09:54:11.362" v="10" actId="20577"/>
-        <pc:sldMkLst>
-          <pc:docMk/>
-          <pc:sldMk cId="3018556184" sldId="259"/>
-        </pc:sldMkLst>
-      </pc:sldChg>
-      <pc:sldChg chg="add">
-        <pc:chgData name="Riccardo Berta" userId="c8694f89-bba4-4576-b0a8-456619ca5a8c" providerId="ADAL" clId="{89457721-8AF9-BB44-BAF2-46F7B0D7D7E8}" dt="2022-08-30T09:54:31.238" v="24"/>
-        <pc:sldMkLst>
-          <pc:docMk/>
-          <pc:sldMk cId="3239712184" sldId="260"/>
-        </pc:sldMkLst>
-      </pc:sldChg>
-      <pc:sldChg chg="del">
-        <pc:chgData name="Riccardo Berta" userId="c8694f89-bba4-4576-b0a8-456619ca5a8c" providerId="ADAL" clId="{89457721-8AF9-BB44-BAF2-46F7B0D7D7E8}" dt="2022-08-30T09:54:26.068" v="19" actId="2696"/>
-        <pc:sldMkLst>
-          <pc:docMk/>
-          <pc:sldMk cId="3692252167" sldId="260"/>
-        </pc:sldMkLst>
-      </pc:sldChg>
-      <pc:sldChg chg="add">
-        <pc:chgData name="Riccardo Berta" userId="c8694f89-bba4-4576-b0a8-456619ca5a8c" providerId="ADAL" clId="{89457721-8AF9-BB44-BAF2-46F7B0D7D7E8}" dt="2022-08-30T09:54:32.176" v="25"/>
-        <pc:sldMkLst>
-          <pc:docMk/>
-          <pc:sldMk cId="723946338" sldId="261"/>
-        </pc:sldMkLst>
-      </pc:sldChg>
-      <pc:sldChg chg="del">
-        <pc:chgData name="Riccardo Berta" userId="c8694f89-bba4-4576-b0a8-456619ca5a8c" providerId="ADAL" clId="{89457721-8AF9-BB44-BAF2-46F7B0D7D7E8}" dt="2022-08-30T09:54:26.532" v="20" actId="2696"/>
-        <pc:sldMkLst>
-          <pc:docMk/>
-          <pc:sldMk cId="846979211" sldId="261"/>
-        </pc:sldMkLst>
-      </pc:sldChg>
-      <pc:sldChg chg="del">
-        <pc:chgData name="Riccardo Berta" userId="c8694f89-bba4-4576-b0a8-456619ca5a8c" providerId="ADAL" clId="{89457721-8AF9-BB44-BAF2-46F7B0D7D7E8}" dt="2022-08-30T09:54:26.938" v="21" actId="2696"/>
-        <pc:sldMkLst>
-          <pc:docMk/>
-          <pc:sldMk cId="447929702" sldId="262"/>
-        </pc:sldMkLst>
-      </pc:sldChg>
-      <pc:sldChg chg="add">
-        <pc:chgData name="Riccardo Berta" userId="c8694f89-bba4-4576-b0a8-456619ca5a8c" providerId="ADAL" clId="{89457721-8AF9-BB44-BAF2-46F7B0D7D7E8}" dt="2022-08-30T09:54:33.167" v="26"/>
-        <pc:sldMkLst>
-          <pc:docMk/>
-          <pc:sldMk cId="1167696200" sldId="262"/>
-        </pc:sldMkLst>
-      </pc:sldChg>
-      <pc:sldChg chg="del">
-        <pc:chgData name="Riccardo Berta" userId="c8694f89-bba4-4576-b0a8-456619ca5a8c" providerId="ADAL" clId="{89457721-8AF9-BB44-BAF2-46F7B0D7D7E8}" dt="2022-08-30T09:54:27.400" v="22" actId="2696"/>
-        <pc:sldMkLst>
-          <pc:docMk/>
-          <pc:sldMk cId="11402927" sldId="263"/>
-        </pc:sldMkLst>
-      </pc:sldChg>
-      <pc:sldChg chg="modSp add mod">
-        <pc:chgData name="Riccardo Berta" userId="c8694f89-bba4-4576-b0a8-456619ca5a8c" providerId="ADAL" clId="{89457721-8AF9-BB44-BAF2-46F7B0D7D7E8}" dt="2022-08-30T09:55:24.863" v="44" actId="20577"/>
-        <pc:sldMkLst>
-          <pc:docMk/>
-          <pc:sldMk cId="1817587258" sldId="263"/>
-        </pc:sldMkLst>
-      </pc:sldChg>
-      <pc:sldChg chg="del">
-        <pc:chgData name="Riccardo Berta" userId="c8694f89-bba4-4576-b0a8-456619ca5a8c" providerId="ADAL" clId="{89457721-8AF9-BB44-BAF2-46F7B0D7D7E8}" dt="2022-08-30T09:54:27.959" v="23" actId="2696"/>
-        <pc:sldMkLst>
-          <pc:docMk/>
-          <pc:sldMk cId="2794482370" sldId="264"/>
-        </pc:sldMkLst>
+            <pc:sldMk cId="2988223902" sldId="279"/>
+            <ac:picMk id="2" creationId="{956D1750-AF73-2EE1-808A-1B03FEECB59B}"/>
+          </ac:picMkLst>
+        </pc:picChg>
       </pc:sldChg>
     </pc:docChg>
   </pc:docChgLst>
@@ -3519,7 +2089,13 @@
   <p:cSld>
     <p:spTree>
       <p:nvGrpSpPr>
-        <p:cNvPr id="1" name="Shape 79"/>
+        <p:cNvPr id="1" name="Shape 79">
+          <a:extLst>
+            <a:ext uri="{FF2B5EF4-FFF2-40B4-BE49-F238E27FC236}">
+              <a16:creationId xmlns:a16="http://schemas.microsoft.com/office/drawing/2014/main" id="{84971FCA-430F-4E98-634F-A2174732D5F2}"/>
+            </a:ext>
+          </a:extLst>
+        </p:cNvPr>
         <p:cNvGrpSpPr/>
         <p:nvPr/>
       </p:nvGrpSpPr>
@@ -3533,7 +2109,13 @@
       </p:grpSpPr>
       <p:sp>
         <p:nvSpPr>
-          <p:cNvPr id="80" name="Google Shape;80;geed6aedbf_0_0:notes"/>
+          <p:cNvPr id="80" name="Google Shape;80;geed6aedbf_0_0:notes">
+            <a:extLst>
+              <a:ext uri="{FF2B5EF4-FFF2-40B4-BE49-F238E27FC236}">
+                <a16:creationId xmlns:a16="http://schemas.microsoft.com/office/drawing/2014/main" id="{796B70BF-80C1-43B3-CA67-941B03E4D147}"/>
+              </a:ext>
+            </a:extLst>
+          </p:cNvPr>
           <p:cNvSpPr>
             <a:spLocks noGrp="1" noRot="1" noChangeAspect="1"/>
           </p:cNvSpPr>
@@ -3574,7 +2156,13 @@
       </p:sp>
       <p:sp>
         <p:nvSpPr>
-          <p:cNvPr id="81" name="Google Shape;81;geed6aedbf_0_0:notes"/>
+          <p:cNvPr id="81" name="Google Shape;81;geed6aedbf_0_0:notes">
+            <a:extLst>
+              <a:ext uri="{FF2B5EF4-FFF2-40B4-BE49-F238E27FC236}">
+                <a16:creationId xmlns:a16="http://schemas.microsoft.com/office/drawing/2014/main" id="{CE6D6046-4A52-F4BB-58D2-67A15E7A15CE}"/>
+              </a:ext>
+            </a:extLst>
+          </p:cNvPr>
           <p:cNvSpPr txBox="1">
             <a:spLocks noGrp="1"/>
           </p:cNvSpPr>
@@ -3613,7 +2201,7 @@
     </p:spTree>
     <p:extLst>
       <p:ext uri="{BB962C8B-B14F-4D97-AF65-F5344CB8AC3E}">
-        <p14:creationId xmlns:p14="http://schemas.microsoft.com/office/powerpoint/2010/main" val="3993875207"/>
+        <p14:creationId xmlns:p14="http://schemas.microsoft.com/office/powerpoint/2010/main" val="713588276"/>
       </p:ext>
     </p:extLst>
   </p:cSld>
@@ -3722,7 +2310,7 @@
     </p:spTree>
     <p:extLst>
       <p:ext uri="{BB962C8B-B14F-4D97-AF65-F5344CB8AC3E}">
-        <p14:creationId xmlns:p14="http://schemas.microsoft.com/office/powerpoint/2010/main" val="3074635309"/>
+        <p14:creationId xmlns:p14="http://schemas.microsoft.com/office/powerpoint/2010/main" val="3993875207"/>
       </p:ext>
     </p:extLst>
   </p:cSld>
@@ -3831,7 +2419,7 @@
     </p:spTree>
     <p:extLst>
       <p:ext uri="{BB962C8B-B14F-4D97-AF65-F5344CB8AC3E}">
-        <p14:creationId xmlns:p14="http://schemas.microsoft.com/office/powerpoint/2010/main" val="175154283"/>
+        <p14:creationId xmlns:p14="http://schemas.microsoft.com/office/powerpoint/2010/main" val="3074635309"/>
       </p:ext>
     </p:extLst>
   </p:cSld>
@@ -3940,7 +2528,7 @@
     </p:spTree>
     <p:extLst>
       <p:ext uri="{BB962C8B-B14F-4D97-AF65-F5344CB8AC3E}">
-        <p14:creationId xmlns:p14="http://schemas.microsoft.com/office/powerpoint/2010/main" val="2480102311"/>
+        <p14:creationId xmlns:p14="http://schemas.microsoft.com/office/powerpoint/2010/main" val="175154283"/>
       </p:ext>
     </p:extLst>
   </p:cSld>
@@ -4049,6 +2637,115 @@
     </p:spTree>
     <p:extLst>
       <p:ext uri="{BB962C8B-B14F-4D97-AF65-F5344CB8AC3E}">
+        <p14:creationId xmlns:p14="http://schemas.microsoft.com/office/powerpoint/2010/main" val="2480102311"/>
+      </p:ext>
+    </p:extLst>
+  </p:cSld>
+  <p:clrMapOvr>
+    <a:masterClrMapping/>
+  </p:clrMapOvr>
+</p:notes>
+</file>
+
+<file path=ppt/notesSlides/notesSlide25.xml><?xml version="1.0" encoding="utf-8"?>
+<p:notes xmlns:a="http://schemas.openxmlformats.org/drawingml/2006/main" xmlns:r="http://schemas.openxmlformats.org/officeDocument/2006/relationships" xmlns:p="http://schemas.openxmlformats.org/presentationml/2006/main" showMasterSp="0" showMasterPhAnim="0">
+  <p:cSld>
+    <p:spTree>
+      <p:nvGrpSpPr>
+        <p:cNvPr id="1" name="Shape 79"/>
+        <p:cNvGrpSpPr/>
+        <p:nvPr/>
+      </p:nvGrpSpPr>
+      <p:grpSpPr>
+        <a:xfrm>
+          <a:off x="0" y="0"/>
+          <a:ext cx="0" cy="0"/>
+          <a:chOff x="0" y="0"/>
+          <a:chExt cx="0" cy="0"/>
+        </a:xfrm>
+      </p:grpSpPr>
+      <p:sp>
+        <p:nvSpPr>
+          <p:cNvPr id="80" name="Google Shape;80;geed6aedbf_0_0:notes"/>
+          <p:cNvSpPr>
+            <a:spLocks noGrp="1" noRot="1" noChangeAspect="1"/>
+          </p:cNvSpPr>
+          <p:nvPr>
+            <p:ph type="sldImg" idx="2"/>
+          </p:nvPr>
+        </p:nvSpPr>
+        <p:spPr>
+          <a:xfrm>
+            <a:off x="1143000" y="685800"/>
+            <a:ext cx="4572000" cy="3429000"/>
+          </a:xfrm>
+          <a:custGeom>
+            <a:avLst/>
+            <a:gdLst/>
+            <a:ahLst/>
+            <a:cxnLst/>
+            <a:rect l="l" t="t" r="r" b="b"/>
+            <a:pathLst>
+              <a:path w="120000" h="120000" extrusionOk="0">
+                <a:moveTo>
+                  <a:pt x="0" y="0"/>
+                </a:moveTo>
+                <a:lnTo>
+                  <a:pt x="120000" y="0"/>
+                </a:lnTo>
+                <a:lnTo>
+                  <a:pt x="120000" y="120000"/>
+                </a:lnTo>
+                <a:lnTo>
+                  <a:pt x="0" y="120000"/>
+                </a:lnTo>
+                <a:close/>
+              </a:path>
+            </a:pathLst>
+          </a:custGeom>
+        </p:spPr>
+      </p:sp>
+      <p:sp>
+        <p:nvSpPr>
+          <p:cNvPr id="81" name="Google Shape;81;geed6aedbf_0_0:notes"/>
+          <p:cNvSpPr txBox="1">
+            <a:spLocks noGrp="1"/>
+          </p:cNvSpPr>
+          <p:nvPr>
+            <p:ph type="body" idx="1"/>
+          </p:nvPr>
+        </p:nvSpPr>
+        <p:spPr>
+          <a:xfrm>
+            <a:off x="685800" y="4343400"/>
+            <a:ext cx="5486400" cy="4114800"/>
+          </a:xfrm>
+          <a:prstGeom prst="rect">
+            <a:avLst/>
+          </a:prstGeom>
+        </p:spPr>
+        <p:txBody>
+          <a:bodyPr spcFirstLastPara="1" wrap="square" lIns="91425" tIns="91425" rIns="91425" bIns="91425" anchor="t" anchorCtr="0">
+            <a:noAutofit/>
+          </a:bodyPr>
+          <a:lstStyle/>
+          <a:p>
+            <a:pPr marL="0" lvl="0" indent="0" algn="l" rtl="0">
+              <a:spcBef>
+                <a:spcPts val="0"/>
+              </a:spcBef>
+              <a:spcAft>
+                <a:spcPts val="0"/>
+              </a:spcAft>
+              <a:buNone/>
+            </a:pPr>
+            <a:endParaRPr dirty="0"/>
+          </a:p>
+        </p:txBody>
+      </p:sp>
+    </p:spTree>
+    <p:extLst>
+      <p:ext uri="{BB962C8B-B14F-4D97-AF65-F5344CB8AC3E}">
         <p14:creationId xmlns:p14="http://schemas.microsoft.com/office/powerpoint/2010/main" val="2336865006"/>
       </p:ext>
     </p:extLst>
@@ -4059,7 +2756,7 @@
 </p:notes>
 </file>
 
-<file path=ppt/notesSlides/notesSlide25.xml><?xml version="1.0" encoding="utf-8"?>
+<file path=ppt/notesSlides/notesSlide26.xml><?xml version="1.0" encoding="utf-8"?>
 <p:notes xmlns:a="http://schemas.openxmlformats.org/drawingml/2006/main" xmlns:r="http://schemas.openxmlformats.org/officeDocument/2006/relationships" xmlns:p="http://schemas.openxmlformats.org/presentationml/2006/main" showMasterSp="0" showMasterPhAnim="0">
   <p:cSld>
     <p:spTree>
@@ -4186,115 +2883,6 @@
 </p:notes>
 </file>
 
-<file path=ppt/notesSlides/notesSlide26.xml><?xml version="1.0" encoding="utf-8"?>
-<p:notes xmlns:a="http://schemas.openxmlformats.org/drawingml/2006/main" xmlns:r="http://schemas.openxmlformats.org/officeDocument/2006/relationships" xmlns:p="http://schemas.openxmlformats.org/presentationml/2006/main" showMasterSp="0" showMasterPhAnim="0">
-  <p:cSld>
-    <p:spTree>
-      <p:nvGrpSpPr>
-        <p:cNvPr id="1" name="Shape 79"/>
-        <p:cNvGrpSpPr/>
-        <p:nvPr/>
-      </p:nvGrpSpPr>
-      <p:grpSpPr>
-        <a:xfrm>
-          <a:off x="0" y="0"/>
-          <a:ext cx="0" cy="0"/>
-          <a:chOff x="0" y="0"/>
-          <a:chExt cx="0" cy="0"/>
-        </a:xfrm>
-      </p:grpSpPr>
-      <p:sp>
-        <p:nvSpPr>
-          <p:cNvPr id="80" name="Google Shape;80;geed6aedbf_0_0:notes"/>
-          <p:cNvSpPr>
-            <a:spLocks noGrp="1" noRot="1" noChangeAspect="1"/>
-          </p:cNvSpPr>
-          <p:nvPr>
-            <p:ph type="sldImg" idx="2"/>
-          </p:nvPr>
-        </p:nvSpPr>
-        <p:spPr>
-          <a:xfrm>
-            <a:off x="1143000" y="685800"/>
-            <a:ext cx="4572000" cy="3429000"/>
-          </a:xfrm>
-          <a:custGeom>
-            <a:avLst/>
-            <a:gdLst/>
-            <a:ahLst/>
-            <a:cxnLst/>
-            <a:rect l="l" t="t" r="r" b="b"/>
-            <a:pathLst>
-              <a:path w="120000" h="120000" extrusionOk="0">
-                <a:moveTo>
-                  <a:pt x="0" y="0"/>
-                </a:moveTo>
-                <a:lnTo>
-                  <a:pt x="120000" y="0"/>
-                </a:lnTo>
-                <a:lnTo>
-                  <a:pt x="120000" y="120000"/>
-                </a:lnTo>
-                <a:lnTo>
-                  <a:pt x="0" y="120000"/>
-                </a:lnTo>
-                <a:close/>
-              </a:path>
-            </a:pathLst>
-          </a:custGeom>
-        </p:spPr>
-      </p:sp>
-      <p:sp>
-        <p:nvSpPr>
-          <p:cNvPr id="81" name="Google Shape;81;geed6aedbf_0_0:notes"/>
-          <p:cNvSpPr txBox="1">
-            <a:spLocks noGrp="1"/>
-          </p:cNvSpPr>
-          <p:nvPr>
-            <p:ph type="body" idx="1"/>
-          </p:nvPr>
-        </p:nvSpPr>
-        <p:spPr>
-          <a:xfrm>
-            <a:off x="685800" y="4343400"/>
-            <a:ext cx="5486400" cy="4114800"/>
-          </a:xfrm>
-          <a:prstGeom prst="rect">
-            <a:avLst/>
-          </a:prstGeom>
-        </p:spPr>
-        <p:txBody>
-          <a:bodyPr spcFirstLastPara="1" wrap="square" lIns="91425" tIns="91425" rIns="91425" bIns="91425" anchor="t" anchorCtr="0">
-            <a:noAutofit/>
-          </a:bodyPr>
-          <a:lstStyle/>
-          <a:p>
-            <a:pPr marL="0" lvl="0" indent="0" algn="l" rtl="0">
-              <a:spcBef>
-                <a:spcPts val="0"/>
-              </a:spcBef>
-              <a:spcAft>
-                <a:spcPts val="0"/>
-              </a:spcAft>
-              <a:buNone/>
-            </a:pPr>
-            <a:endParaRPr dirty="0"/>
-          </a:p>
-        </p:txBody>
-      </p:sp>
-    </p:spTree>
-    <p:extLst>
-      <p:ext uri="{BB962C8B-B14F-4D97-AF65-F5344CB8AC3E}">
-        <p14:creationId xmlns:p14="http://schemas.microsoft.com/office/powerpoint/2010/main" val="1369256882"/>
-      </p:ext>
-    </p:extLst>
-  </p:cSld>
-  <p:clrMapOvr>
-    <a:masterClrMapping/>
-  </p:clrMapOvr>
-</p:notes>
-</file>
-
 <file path=ppt/notesSlides/notesSlide27.xml><?xml version="1.0" encoding="utf-8"?>
 <p:notes xmlns:a="http://schemas.openxmlformats.org/drawingml/2006/main" xmlns:r="http://schemas.openxmlformats.org/officeDocument/2006/relationships" xmlns:p="http://schemas.openxmlformats.org/presentationml/2006/main" showMasterSp="0" showMasterPhAnim="0">
   <p:cSld>
@@ -4394,7 +2982,7 @@
     </p:spTree>
     <p:extLst>
       <p:ext uri="{BB962C8B-B14F-4D97-AF65-F5344CB8AC3E}">
-        <p14:creationId xmlns:p14="http://schemas.microsoft.com/office/powerpoint/2010/main" val="694799437"/>
+        <p14:creationId xmlns:p14="http://schemas.microsoft.com/office/powerpoint/2010/main" val="1369256882"/>
       </p:ext>
     </p:extLst>
   </p:cSld>
@@ -4503,7 +3091,7 @@
     </p:spTree>
     <p:extLst>
       <p:ext uri="{BB962C8B-B14F-4D97-AF65-F5344CB8AC3E}">
-        <p14:creationId xmlns:p14="http://schemas.microsoft.com/office/powerpoint/2010/main" val="21700626"/>
+        <p14:creationId xmlns:p14="http://schemas.microsoft.com/office/powerpoint/2010/main" val="694799437"/>
       </p:ext>
     </p:extLst>
   </p:cSld>
@@ -4612,7 +3200,7 @@
     </p:spTree>
     <p:extLst>
       <p:ext uri="{BB962C8B-B14F-4D97-AF65-F5344CB8AC3E}">
-        <p14:creationId xmlns:p14="http://schemas.microsoft.com/office/powerpoint/2010/main" val="1908359397"/>
+        <p14:creationId xmlns:p14="http://schemas.microsoft.com/office/powerpoint/2010/main" val="21700626"/>
       </p:ext>
     </p:extLst>
   </p:cSld>
@@ -4736,6 +3324,133 @@
   <p:cSld>
     <p:spTree>
       <p:nvGrpSpPr>
+        <p:cNvPr id="1" name="Shape 79">
+          <a:extLst>
+            <a:ext uri="{FF2B5EF4-FFF2-40B4-BE49-F238E27FC236}">
+              <a16:creationId xmlns:a16="http://schemas.microsoft.com/office/drawing/2014/main" id="{1F7F5ADF-4AD3-9AA3-D38F-4190DEBC94AA}"/>
+            </a:ext>
+          </a:extLst>
+        </p:cNvPr>
+        <p:cNvGrpSpPr/>
+        <p:nvPr/>
+      </p:nvGrpSpPr>
+      <p:grpSpPr>
+        <a:xfrm>
+          <a:off x="0" y="0"/>
+          <a:ext cx="0" cy="0"/>
+          <a:chOff x="0" y="0"/>
+          <a:chExt cx="0" cy="0"/>
+        </a:xfrm>
+      </p:grpSpPr>
+      <p:sp>
+        <p:nvSpPr>
+          <p:cNvPr id="80" name="Google Shape;80;geed6aedbf_0_0:notes">
+            <a:extLst>
+              <a:ext uri="{FF2B5EF4-FFF2-40B4-BE49-F238E27FC236}">
+                <a16:creationId xmlns:a16="http://schemas.microsoft.com/office/drawing/2014/main" id="{0386742A-A452-5A3C-987A-DE207F93F8A7}"/>
+              </a:ext>
+            </a:extLst>
+          </p:cNvPr>
+          <p:cNvSpPr>
+            <a:spLocks noGrp="1" noRot="1" noChangeAspect="1"/>
+          </p:cNvSpPr>
+          <p:nvPr>
+            <p:ph type="sldImg" idx="2"/>
+          </p:nvPr>
+        </p:nvSpPr>
+        <p:spPr>
+          <a:xfrm>
+            <a:off x="1143000" y="685800"/>
+            <a:ext cx="4572000" cy="3429000"/>
+          </a:xfrm>
+          <a:custGeom>
+            <a:avLst/>
+            <a:gdLst/>
+            <a:ahLst/>
+            <a:cxnLst/>
+            <a:rect l="l" t="t" r="r" b="b"/>
+            <a:pathLst>
+              <a:path w="120000" h="120000" extrusionOk="0">
+                <a:moveTo>
+                  <a:pt x="0" y="0"/>
+                </a:moveTo>
+                <a:lnTo>
+                  <a:pt x="120000" y="0"/>
+                </a:lnTo>
+                <a:lnTo>
+                  <a:pt x="120000" y="120000"/>
+                </a:lnTo>
+                <a:lnTo>
+                  <a:pt x="0" y="120000"/>
+                </a:lnTo>
+                <a:close/>
+              </a:path>
+            </a:pathLst>
+          </a:custGeom>
+        </p:spPr>
+      </p:sp>
+      <p:sp>
+        <p:nvSpPr>
+          <p:cNvPr id="81" name="Google Shape;81;geed6aedbf_0_0:notes">
+            <a:extLst>
+              <a:ext uri="{FF2B5EF4-FFF2-40B4-BE49-F238E27FC236}">
+                <a16:creationId xmlns:a16="http://schemas.microsoft.com/office/drawing/2014/main" id="{F3AB2FE9-9A6A-89B4-BFFD-49EA27DFEC3F}"/>
+              </a:ext>
+            </a:extLst>
+          </p:cNvPr>
+          <p:cNvSpPr txBox="1">
+            <a:spLocks noGrp="1"/>
+          </p:cNvSpPr>
+          <p:nvPr>
+            <p:ph type="body" idx="1"/>
+          </p:nvPr>
+        </p:nvSpPr>
+        <p:spPr>
+          <a:xfrm>
+            <a:off x="685800" y="4343400"/>
+            <a:ext cx="5486400" cy="4114800"/>
+          </a:xfrm>
+          <a:prstGeom prst="rect">
+            <a:avLst/>
+          </a:prstGeom>
+        </p:spPr>
+        <p:txBody>
+          <a:bodyPr spcFirstLastPara="1" wrap="square" lIns="91425" tIns="91425" rIns="91425" bIns="91425" anchor="t" anchorCtr="0">
+            <a:noAutofit/>
+          </a:bodyPr>
+          <a:lstStyle/>
+          <a:p>
+            <a:pPr marL="0" lvl="0" indent="0" algn="l" rtl="0">
+              <a:spcBef>
+                <a:spcPts val="0"/>
+              </a:spcBef>
+              <a:spcAft>
+                <a:spcPts val="0"/>
+              </a:spcAft>
+              <a:buNone/>
+            </a:pPr>
+            <a:endParaRPr dirty="0"/>
+          </a:p>
+        </p:txBody>
+      </p:sp>
+    </p:spTree>
+    <p:extLst>
+      <p:ext uri="{BB962C8B-B14F-4D97-AF65-F5344CB8AC3E}">
+        <p14:creationId xmlns:p14="http://schemas.microsoft.com/office/powerpoint/2010/main" val="2349048609"/>
+      </p:ext>
+    </p:extLst>
+  </p:cSld>
+  <p:clrMapOvr>
+    <a:masterClrMapping/>
+  </p:clrMapOvr>
+</p:notes>
+</file>
+
+<file path=ppt/notesSlides/notesSlide31.xml><?xml version="1.0" encoding="utf-8"?>
+<p:notes xmlns:a="http://schemas.openxmlformats.org/drawingml/2006/main" xmlns:r="http://schemas.openxmlformats.org/officeDocument/2006/relationships" xmlns:p="http://schemas.openxmlformats.org/presentationml/2006/main" showMasterSp="0" showMasterPhAnim="0">
+  <p:cSld>
+    <p:spTree>
+      <p:nvGrpSpPr>
         <p:cNvPr id="1" name="Shape 79"/>
         <p:cNvGrpSpPr/>
         <p:nvPr/>
@@ -4830,6 +3545,115 @@
     </p:spTree>
     <p:extLst>
       <p:ext uri="{BB962C8B-B14F-4D97-AF65-F5344CB8AC3E}">
+        <p14:creationId xmlns:p14="http://schemas.microsoft.com/office/powerpoint/2010/main" val="1908359397"/>
+      </p:ext>
+    </p:extLst>
+  </p:cSld>
+  <p:clrMapOvr>
+    <a:masterClrMapping/>
+  </p:clrMapOvr>
+</p:notes>
+</file>
+
+<file path=ppt/notesSlides/notesSlide32.xml><?xml version="1.0" encoding="utf-8"?>
+<p:notes xmlns:a="http://schemas.openxmlformats.org/drawingml/2006/main" xmlns:r="http://schemas.openxmlformats.org/officeDocument/2006/relationships" xmlns:p="http://schemas.openxmlformats.org/presentationml/2006/main" showMasterSp="0" showMasterPhAnim="0">
+  <p:cSld>
+    <p:spTree>
+      <p:nvGrpSpPr>
+        <p:cNvPr id="1" name="Shape 79"/>
+        <p:cNvGrpSpPr/>
+        <p:nvPr/>
+      </p:nvGrpSpPr>
+      <p:grpSpPr>
+        <a:xfrm>
+          <a:off x="0" y="0"/>
+          <a:ext cx="0" cy="0"/>
+          <a:chOff x="0" y="0"/>
+          <a:chExt cx="0" cy="0"/>
+        </a:xfrm>
+      </p:grpSpPr>
+      <p:sp>
+        <p:nvSpPr>
+          <p:cNvPr id="80" name="Google Shape;80;geed6aedbf_0_0:notes"/>
+          <p:cNvSpPr>
+            <a:spLocks noGrp="1" noRot="1" noChangeAspect="1"/>
+          </p:cNvSpPr>
+          <p:nvPr>
+            <p:ph type="sldImg" idx="2"/>
+          </p:nvPr>
+        </p:nvSpPr>
+        <p:spPr>
+          <a:xfrm>
+            <a:off x="1143000" y="685800"/>
+            <a:ext cx="4572000" cy="3429000"/>
+          </a:xfrm>
+          <a:custGeom>
+            <a:avLst/>
+            <a:gdLst/>
+            <a:ahLst/>
+            <a:cxnLst/>
+            <a:rect l="l" t="t" r="r" b="b"/>
+            <a:pathLst>
+              <a:path w="120000" h="120000" extrusionOk="0">
+                <a:moveTo>
+                  <a:pt x="0" y="0"/>
+                </a:moveTo>
+                <a:lnTo>
+                  <a:pt x="120000" y="0"/>
+                </a:lnTo>
+                <a:lnTo>
+                  <a:pt x="120000" y="120000"/>
+                </a:lnTo>
+                <a:lnTo>
+                  <a:pt x="0" y="120000"/>
+                </a:lnTo>
+                <a:close/>
+              </a:path>
+            </a:pathLst>
+          </a:custGeom>
+        </p:spPr>
+      </p:sp>
+      <p:sp>
+        <p:nvSpPr>
+          <p:cNvPr id="81" name="Google Shape;81;geed6aedbf_0_0:notes"/>
+          <p:cNvSpPr txBox="1">
+            <a:spLocks noGrp="1"/>
+          </p:cNvSpPr>
+          <p:nvPr>
+            <p:ph type="body" idx="1"/>
+          </p:nvPr>
+        </p:nvSpPr>
+        <p:spPr>
+          <a:xfrm>
+            <a:off x="685800" y="4343400"/>
+            <a:ext cx="5486400" cy="4114800"/>
+          </a:xfrm>
+          <a:prstGeom prst="rect">
+            <a:avLst/>
+          </a:prstGeom>
+        </p:spPr>
+        <p:txBody>
+          <a:bodyPr spcFirstLastPara="1" wrap="square" lIns="91425" tIns="91425" rIns="91425" bIns="91425" anchor="t" anchorCtr="0">
+            <a:noAutofit/>
+          </a:bodyPr>
+          <a:lstStyle/>
+          <a:p>
+            <a:pPr marL="0" lvl="0" indent="0" algn="l" rtl="0">
+              <a:spcBef>
+                <a:spcPts val="0"/>
+              </a:spcBef>
+              <a:spcAft>
+                <a:spcPts val="0"/>
+              </a:spcAft>
+              <a:buNone/>
+            </a:pPr>
+            <a:endParaRPr dirty="0"/>
+          </a:p>
+        </p:txBody>
+      </p:sp>
+    </p:spTree>
+    <p:extLst>
+      <p:ext uri="{BB962C8B-B14F-4D97-AF65-F5344CB8AC3E}">
         <p14:creationId xmlns:p14="http://schemas.microsoft.com/office/powerpoint/2010/main" val="1854983535"/>
       </p:ext>
     </p:extLst>
@@ -4840,7 +3664,7 @@
 </p:notes>
 </file>
 
-<file path=ppt/notesSlides/notesSlide31.xml><?xml version="1.0" encoding="utf-8"?>
+<file path=ppt/notesSlides/notesSlide33.xml><?xml version="1.0" encoding="utf-8"?>
 <p:notes xmlns:a="http://schemas.openxmlformats.org/drawingml/2006/main" xmlns:r="http://schemas.openxmlformats.org/officeDocument/2006/relationships" xmlns:p="http://schemas.openxmlformats.org/presentationml/2006/main" showMasterSp="0" showMasterPhAnim="0">
   <p:cSld>
     <p:spTree>
@@ -4967,7 +3791,7 @@
 </p:notes>
 </file>
 
-<file path=ppt/notesSlides/notesSlide32.xml><?xml version="1.0" encoding="utf-8"?>
+<file path=ppt/notesSlides/notesSlide34.xml><?xml version="1.0" encoding="utf-8"?>
 <p:notes xmlns:a="http://schemas.openxmlformats.org/drawingml/2006/main" xmlns:r="http://schemas.openxmlformats.org/officeDocument/2006/relationships" xmlns:p="http://schemas.openxmlformats.org/presentationml/2006/main" showMasterSp="0" showMasterPhAnim="0">
   <p:cSld>
     <p:spTree>
@@ -5789,6 +4613,13 @@
             <a:tailEnd type="none" w="sm" len="sm"/>
           </a:ln>
         </p:spPr>
+        <p:txBody>
+          <a:bodyPr/>
+          <a:lstStyle/>
+          <a:p>
+            <a:endParaRPr lang="it-IT"/>
+          </a:p>
+        </p:txBody>
       </p:sp>
       <p:sp>
         <p:nvSpPr>
@@ -5832,6 +4663,13 @@
             <a:tailEnd type="none" w="sm" len="sm"/>
           </a:ln>
         </p:spPr>
+        <p:txBody>
+          <a:bodyPr/>
+          <a:lstStyle/>
+          <a:p>
+            <a:endParaRPr lang="it-IT"/>
+          </a:p>
+        </p:txBody>
       </p:sp>
       <p:sp>
         <p:nvSpPr>
@@ -10852,7 +9690,7 @@
         </p:nvSpPr>
         <p:spPr>
           <a:xfrm>
-            <a:off x="2888012" y="1937550"/>
+            <a:off x="2888012" y="2404200"/>
             <a:ext cx="3367975" cy="2049600"/>
           </a:xfrm>
           <a:prstGeom prst="rect">
@@ -12855,7 +11693,13 @@
   <p:cSld>
     <p:spTree>
       <p:nvGrpSpPr>
-        <p:cNvPr id="1" name="Shape 82"/>
+        <p:cNvPr id="1" name="Shape 82">
+          <a:extLst>
+            <a:ext uri="{FF2B5EF4-FFF2-40B4-BE49-F238E27FC236}">
+              <a16:creationId xmlns:a16="http://schemas.microsoft.com/office/drawing/2014/main" id="{F5B489F9-8A57-1BEC-A9AF-6120FC871D47}"/>
+            </a:ext>
+          </a:extLst>
+        </p:cNvPr>
         <p:cNvGrpSpPr/>
         <p:nvPr/>
       </p:nvGrpSpPr>
@@ -12869,7 +11713,13 @@
       </p:grpSpPr>
       <p:sp>
         <p:nvSpPr>
-          <p:cNvPr id="83" name="Google Shape;83;p14"/>
+          <p:cNvPr id="83" name="Google Shape;83;p14">
+            <a:extLst>
+              <a:ext uri="{FF2B5EF4-FFF2-40B4-BE49-F238E27FC236}">
+                <a16:creationId xmlns:a16="http://schemas.microsoft.com/office/drawing/2014/main" id="{1F3D2528-AAC2-F681-F83B-53DA1DA1963E}"/>
+              </a:ext>
+            </a:extLst>
+          </p:cNvPr>
           <p:cNvSpPr txBox="1">
             <a:spLocks noGrp="1"/>
           </p:cNvSpPr>
@@ -12895,7 +11745,7 @@
             <a:pPr lvl="0"/>
             <a:r>
               <a:rPr lang="en-GB" sz="4000" dirty="0"/>
-              <a:t>Optimistic initial values (1)</a:t>
+              <a:t>Decaying epsilon-greedy (4)</a:t>
             </a:r>
             <a:endParaRPr sz="4000" dirty="0"/>
           </a:p>
@@ -12903,7 +11753,13 @@
       </p:sp>
       <p:sp>
         <p:nvSpPr>
-          <p:cNvPr id="84" name="Google Shape;84;p14"/>
+          <p:cNvPr id="84" name="Google Shape;84;p14">
+            <a:extLst>
+              <a:ext uri="{FF2B5EF4-FFF2-40B4-BE49-F238E27FC236}">
+                <a16:creationId xmlns:a16="http://schemas.microsoft.com/office/drawing/2014/main" id="{BE661922-474A-0022-B084-742B916F6F97}"/>
+              </a:ext>
+            </a:extLst>
+          </p:cNvPr>
           <p:cNvSpPr txBox="1">
             <a:spLocks noGrp="1"/>
           </p:cNvSpPr>
@@ -12913,8 +11769,8 @@
         </p:nvSpPr>
         <p:spPr>
           <a:xfrm>
-            <a:off x="162750" y="1212537"/>
-            <a:ext cx="8818500" cy="5224230"/>
+            <a:off x="162750" y="1653212"/>
+            <a:ext cx="8818500" cy="4284880"/>
           </a:xfrm>
           <a:prstGeom prst="rect">
             <a:avLst/>
@@ -12926,50 +11782,29 @@
           </a:bodyPr>
           <a:lstStyle/>
           <a:p>
-            <a:pPr lvl="0"/>
-            <a:r>
-              <a:rPr lang="en-GB" dirty="0"/>
-              <a:t>Initial action values can be used as a simple way to </a:t>
+            <a:r>
+              <a:rPr lang="en-GB" dirty="0"/>
+              <a:t>The decaying approach </a:t>
             </a:r>
             <a:r>
               <a:rPr lang="en-GB" b="1" dirty="0"/>
-              <a:t>encourage exploration</a:t>
-            </a:r>
-          </a:p>
-          <a:p>
-            <a:pPr lvl="0"/>
-            <a:endParaRPr lang="en-GB" b="1" dirty="0"/>
-          </a:p>
-          <a:p>
-            <a:pPr lvl="0"/>
-            <a:r>
-              <a:rPr lang="en-GB" dirty="0"/>
-              <a:t>Suppose to set an initial estimate in a </a:t>
-            </a:r>
-            <a:r>
-              <a:rPr lang="en-GB" b="1" dirty="0"/>
-              <a:t>really optimistic way</a:t>
-            </a:r>
-          </a:p>
-          <a:p>
-            <a:pPr lvl="1"/>
-            <a:r>
-              <a:rPr lang="en-GB" dirty="0"/>
-              <a:t>whichever actions are initially selected, the reward is less than the starting estimates </a:t>
-            </a:r>
-          </a:p>
-          <a:p>
-            <a:pPr lvl="1"/>
-            <a:r>
-              <a:rPr lang="en-GB" dirty="0"/>
-              <a:t>the learner switches to other actions, being "disappointed" with the rewards it is receiving</a:t>
-            </a:r>
-          </a:p>
-          <a:p>
-            <a:pPr lvl="1"/>
-            <a:r>
-              <a:rPr lang="en-GB" dirty="0"/>
-              <a:t>the result is that all actions are tried several times before the value estimates converge </a:t>
+              <a:t>quickly finds optimal actions and stabilizes at a higher average reward </a:t>
+            </a:r>
+            <a:r>
+              <a:rPr lang="en-GB" dirty="0"/>
+              <a:t>than fixed </a:t>
+            </a:r>
+            <a:r>
+              <a:rPr lang="it-IT" dirty="0"/>
+              <a:t>epsilon</a:t>
+            </a:r>
+            <a:r>
+              <a:rPr lang="el-GR" dirty="0"/>
+              <a:t> </a:t>
+            </a:r>
+            <a:r>
+              <a:rPr lang="en-GB" dirty="0"/>
+              <a:t>strategies.</a:t>
             </a:r>
           </a:p>
           <a:p>
@@ -12981,48 +11816,83 @@
           <a:p>
             <a:r>
               <a:rPr lang="en-GB" dirty="0"/>
-              <a:t>It as a simple </a:t>
+              <a:t>Its reward curve is </a:t>
             </a:r>
             <a:r>
               <a:rPr lang="en-GB" b="1" dirty="0"/>
-              <a:t>trick</a:t>
-            </a:r>
-            <a:r>
-              <a:rPr lang="en-GB" dirty="0"/>
-              <a:t> that can be quite </a:t>
+              <a:t>smoother</a:t>
+            </a:r>
+            <a:r>
+              <a:rPr lang="en-GB" dirty="0"/>
+              <a:t> and </a:t>
             </a:r>
             <a:r>
               <a:rPr lang="en-GB" b="1" dirty="0"/>
-              <a:t>effective on stationary problems</a:t>
-            </a:r>
-            <a:r>
-              <a:rPr lang="en-GB" dirty="0"/>
-              <a:t>, but it is not well suited to non-stationary problems </a:t>
-            </a:r>
+              <a:t>consistently higher</a:t>
+            </a:r>
+            <a:r>
+              <a:rPr lang="en-GB" dirty="0"/>
+              <a:t>, showing a better balance between exploration and exploitation.</a:t>
+            </a:r>
+          </a:p>
+          <a:p>
+            <a:endParaRPr lang="en-GB" dirty="0"/>
+          </a:p>
+          <a:p>
+            <a:r>
+              <a:rPr lang="en-GB" dirty="0"/>
+              <a:t>The key idea: </a:t>
+            </a:r>
+            <a:r>
+              <a:rPr lang="en-GB" b="1" dirty="0"/>
+              <a:t>explore earlier</a:t>
+            </a:r>
+            <a:r>
+              <a:rPr lang="en-GB" dirty="0"/>
+              <a:t>, </a:t>
+            </a:r>
+            <a:r>
+              <a:rPr lang="en-GB" b="1" dirty="0"/>
+              <a:t>exploit later</a:t>
+            </a:r>
+            <a:endParaRPr lang="en-GB" dirty="0"/>
           </a:p>
           <a:p>
             <a:pPr lvl="1"/>
             <a:r>
               <a:rPr lang="en-GB" dirty="0"/>
-              <a:t>its drive for exploration is inherently </a:t>
-            </a:r>
-            <a:r>
-              <a:rPr lang="en-GB" b="1" dirty="0"/>
-              <a:t>temporary</a:t>
-            </a:r>
-          </a:p>
-          <a:p>
-            <a:pPr marL="120650" indent="0">
-              <a:buNone/>
-            </a:pPr>
+              <a:t>Early stage → high exploration to correct uncertain value estimates</a:t>
+            </a:r>
+          </a:p>
+          <a:p>
+            <a:pPr lvl="1"/>
+            <a:r>
+              <a:rPr lang="en-GB" dirty="0"/>
+              <a:t>Later stage → reduced exploration as the agent’s knowledge becomes more accurate.</a:t>
+            </a:r>
+          </a:p>
+          <a:p>
             <a:endParaRPr lang="en-GB" dirty="0"/>
           </a:p>
           <a:p>
-            <a:pPr lvl="0"/>
-            <a:endParaRPr lang="en-GB" dirty="0"/>
-          </a:p>
-          <a:p>
-            <a:pPr lvl="1"/>
+            <a:r>
+              <a:rPr lang="en-GB" dirty="0"/>
+              <a:t>Many methods exist to control </a:t>
+            </a:r>
+            <a:r>
+              <a:rPr lang="it-IT" dirty="0"/>
+              <a:t>epsilon</a:t>
+            </a:r>
+            <a:r>
+              <a:rPr lang="el-GR" dirty="0"/>
+              <a:t> </a:t>
+            </a:r>
+            <a:r>
+              <a:rPr lang="en-GB" dirty="0"/>
+              <a:t>decay, but the goal remains to shift gradually from exploration to exploitation</a:t>
+            </a:r>
+          </a:p>
+          <a:p>
             <a:endParaRPr lang="en-GB" dirty="0"/>
           </a:p>
         </p:txBody>
@@ -13030,7 +11900,7 @@
     </p:spTree>
     <p:extLst>
       <p:ext uri="{BB962C8B-B14F-4D97-AF65-F5344CB8AC3E}">
-        <p14:creationId xmlns:p14="http://schemas.microsoft.com/office/powerpoint/2010/main" val="2462363972"/>
+        <p14:creationId xmlns:p14="http://schemas.microsoft.com/office/powerpoint/2010/main" val="563721138"/>
       </p:ext>
     </p:extLst>
   </p:cSld>
@@ -13085,76 +11955,142 @@
             <a:pPr lvl="0"/>
             <a:r>
               <a:rPr lang="en-GB" sz="4000" dirty="0"/>
-              <a:t>Optimistic initial values (2)</a:t>
+              <a:t>Optimistic initial values (1)</a:t>
             </a:r>
             <a:endParaRPr sz="4000" dirty="0"/>
           </a:p>
         </p:txBody>
       </p:sp>
-      <p:pic>
-        <p:nvPicPr>
-          <p:cNvPr id="3" name="Immagine 2">
-            <a:extLst>
-              <a:ext uri="{FF2B5EF4-FFF2-40B4-BE49-F238E27FC236}">
-                <a16:creationId xmlns:a16="http://schemas.microsoft.com/office/drawing/2014/main" id="{8E70973B-B854-6D0A-B960-3AD76E05F0F1}"/>
-              </a:ext>
-            </a:extLst>
-          </p:cNvPr>
-          <p:cNvPicPr>
-            <a:picLocks noChangeAspect="1"/>
-          </p:cNvPicPr>
-          <p:nvPr/>
-        </p:nvPicPr>
-        <p:blipFill>
-          <a:blip r:embed="rId3"/>
-          <a:stretch>
-            <a:fillRect/>
-          </a:stretch>
-        </p:blipFill>
-        <p:spPr>
-          <a:xfrm>
-            <a:off x="62322" y="1067724"/>
-            <a:ext cx="8974183" cy="5499331"/>
+      <p:sp>
+        <p:nvSpPr>
+          <p:cNvPr id="84" name="Google Shape;84;p14"/>
+          <p:cNvSpPr txBox="1">
+            <a:spLocks noGrp="1"/>
+          </p:cNvSpPr>
+          <p:nvPr>
+            <p:ph type="body" idx="1"/>
+          </p:nvPr>
+        </p:nvSpPr>
+        <p:spPr>
+          <a:xfrm>
+            <a:off x="162750" y="1212537"/>
+            <a:ext cx="8818500" cy="5224230"/>
           </a:xfrm>
           <a:prstGeom prst="rect">
             <a:avLst/>
           </a:prstGeom>
         </p:spPr>
-      </p:pic>
-      <p:pic>
-        <p:nvPicPr>
-          <p:cNvPr id="2" name="Immagine 1" descr="Immagine che contiene Carattere, Elementi grafici, logo, cerchio&#10;&#10;Descrizione generata automaticamente">
-            <a:extLst>
-              <a:ext uri="{FF2B5EF4-FFF2-40B4-BE49-F238E27FC236}">
-                <a16:creationId xmlns:a16="http://schemas.microsoft.com/office/drawing/2014/main" id="{5C082735-4F46-977F-9CDE-30C38AFCC96D}"/>
-              </a:ext>
-            </a:extLst>
-          </p:cNvPr>
-          <p:cNvPicPr>
-            <a:picLocks noChangeAspect="1"/>
-          </p:cNvPicPr>
-          <p:nvPr/>
-        </p:nvPicPr>
-        <p:blipFill>
-          <a:blip r:embed="rId4"/>
-          <a:stretch>
-            <a:fillRect/>
-          </a:stretch>
-        </p:blipFill>
-        <p:spPr>
-          <a:xfrm>
-            <a:off x="8656536" y="91573"/>
-            <a:ext cx="407258" cy="495579"/>
-          </a:xfrm>
-          <a:prstGeom prst="rect">
-            <a:avLst/>
-          </a:prstGeom>
-        </p:spPr>
-      </p:pic>
+        <p:txBody>
+          <a:bodyPr spcFirstLastPara="1" wrap="square" lIns="91425" tIns="91425" rIns="91425" bIns="91425" anchor="t" anchorCtr="0">
+            <a:noAutofit/>
+          </a:bodyPr>
+          <a:lstStyle/>
+          <a:p>
+            <a:pPr lvl="0"/>
+            <a:r>
+              <a:rPr lang="en-GB" dirty="0"/>
+              <a:t>Initial action values can be used as a simple way to </a:t>
+            </a:r>
+            <a:r>
+              <a:rPr lang="en-GB" b="1" dirty="0"/>
+              <a:t>encourage exploration</a:t>
+            </a:r>
+          </a:p>
+          <a:p>
+            <a:pPr lvl="0"/>
+            <a:endParaRPr lang="en-GB" b="1" dirty="0"/>
+          </a:p>
+          <a:p>
+            <a:pPr lvl="0"/>
+            <a:r>
+              <a:rPr lang="en-GB" dirty="0"/>
+              <a:t>Suppose to set an initial estimate in a </a:t>
+            </a:r>
+            <a:r>
+              <a:rPr lang="en-GB" b="1" dirty="0"/>
+              <a:t>really optimistic way</a:t>
+            </a:r>
+          </a:p>
+          <a:p>
+            <a:pPr lvl="1"/>
+            <a:r>
+              <a:rPr lang="en-GB" dirty="0"/>
+              <a:t>whichever actions are initially selected, the reward is less than the starting estimates </a:t>
+            </a:r>
+          </a:p>
+          <a:p>
+            <a:pPr lvl="1"/>
+            <a:r>
+              <a:rPr lang="en-GB" dirty="0"/>
+              <a:t>the learner switches to other actions, being "disappointed" with the rewards it is receiving</a:t>
+            </a:r>
+          </a:p>
+          <a:p>
+            <a:pPr lvl="1"/>
+            <a:r>
+              <a:rPr lang="en-GB" dirty="0"/>
+              <a:t>the result is that all actions are tried several times before the value estimates converge </a:t>
+            </a:r>
+          </a:p>
+          <a:p>
+            <a:pPr marL="120650" indent="0">
+              <a:buNone/>
+            </a:pPr>
+            <a:endParaRPr lang="en-GB" dirty="0"/>
+          </a:p>
+          <a:p>
+            <a:r>
+              <a:rPr lang="en-GB" dirty="0"/>
+              <a:t>It as a simple </a:t>
+            </a:r>
+            <a:r>
+              <a:rPr lang="en-GB" b="1" dirty="0"/>
+              <a:t>trick</a:t>
+            </a:r>
+            <a:r>
+              <a:rPr lang="en-GB" dirty="0"/>
+              <a:t> that can be quite </a:t>
+            </a:r>
+            <a:r>
+              <a:rPr lang="en-GB" b="1" dirty="0"/>
+              <a:t>effective on stationary problems</a:t>
+            </a:r>
+            <a:r>
+              <a:rPr lang="en-GB" dirty="0"/>
+              <a:t>, but it is not well suited to non-stationary problems </a:t>
+            </a:r>
+          </a:p>
+          <a:p>
+            <a:pPr lvl="1"/>
+            <a:r>
+              <a:rPr lang="en-GB" dirty="0"/>
+              <a:t>its drive for exploration is inherently </a:t>
+            </a:r>
+            <a:r>
+              <a:rPr lang="en-GB" b="1" dirty="0"/>
+              <a:t>temporary</a:t>
+            </a:r>
+          </a:p>
+          <a:p>
+            <a:pPr marL="120650" indent="0">
+              <a:buNone/>
+            </a:pPr>
+            <a:endParaRPr lang="en-GB" dirty="0"/>
+          </a:p>
+          <a:p>
+            <a:pPr lvl="0"/>
+            <a:endParaRPr lang="en-GB" dirty="0"/>
+          </a:p>
+          <a:p>
+            <a:pPr lvl="1"/>
+            <a:endParaRPr lang="en-GB" dirty="0"/>
+          </a:p>
+        </p:txBody>
+      </p:sp>
     </p:spTree>
     <p:extLst>
       <p:ext uri="{BB962C8B-B14F-4D97-AF65-F5344CB8AC3E}">
-        <p14:creationId xmlns:p14="http://schemas.microsoft.com/office/powerpoint/2010/main" val="3574382410"/>
+        <p14:creationId xmlns:p14="http://schemas.microsoft.com/office/powerpoint/2010/main" val="2462363972"/>
       </p:ext>
     </p:extLst>
   </p:cSld>
@@ -13209,94 +12145,76 @@
             <a:pPr lvl="0"/>
             <a:r>
               <a:rPr lang="en-GB" sz="4000" dirty="0"/>
-              <a:t>Optimistic initial values (3)</a:t>
+              <a:t>Optimistic initial values (2)</a:t>
             </a:r>
             <a:endParaRPr sz="4000" dirty="0"/>
           </a:p>
         </p:txBody>
       </p:sp>
-      <p:sp>
-        <p:nvSpPr>
-          <p:cNvPr id="84" name="Google Shape;84;p14"/>
-          <p:cNvSpPr txBox="1">
-            <a:spLocks noGrp="1"/>
-          </p:cNvSpPr>
-          <p:nvPr>
-            <p:ph type="body" idx="1"/>
-          </p:nvPr>
-        </p:nvSpPr>
-        <p:spPr>
-          <a:xfrm>
-            <a:off x="162750" y="1212537"/>
-            <a:ext cx="8818500" cy="5224230"/>
+      <p:pic>
+        <p:nvPicPr>
+          <p:cNvPr id="3" name="Immagine 2">
+            <a:extLst>
+              <a:ext uri="{FF2B5EF4-FFF2-40B4-BE49-F238E27FC236}">
+                <a16:creationId xmlns:a16="http://schemas.microsoft.com/office/drawing/2014/main" id="{8E70973B-B854-6D0A-B960-3AD76E05F0F1}"/>
+              </a:ext>
+            </a:extLst>
+          </p:cNvPr>
+          <p:cNvPicPr>
+            <a:picLocks noChangeAspect="1"/>
+          </p:cNvPicPr>
+          <p:nvPr/>
+        </p:nvPicPr>
+        <p:blipFill>
+          <a:blip r:embed="rId3"/>
+          <a:stretch>
+            <a:fillRect/>
+          </a:stretch>
+        </p:blipFill>
+        <p:spPr>
+          <a:xfrm>
+            <a:off x="62322" y="1067724"/>
+            <a:ext cx="8974183" cy="5499331"/>
           </a:xfrm>
           <a:prstGeom prst="rect">
             <a:avLst/>
           </a:prstGeom>
         </p:spPr>
-        <p:txBody>
-          <a:bodyPr spcFirstLastPara="1" wrap="square" lIns="91425" tIns="91425" rIns="91425" bIns="91425" anchor="t" anchorCtr="0">
-            <a:noAutofit/>
-          </a:bodyPr>
-          <a:lstStyle/>
-          <a:p>
-            <a:r>
-              <a:rPr lang="en-GB" dirty="0"/>
-              <a:t>Initially the optimistic method performs worse because it explores more</a:t>
-            </a:r>
-          </a:p>
-          <a:p>
-            <a:endParaRPr lang="en-GB" dirty="0"/>
-          </a:p>
-          <a:p>
-            <a:r>
-              <a:rPr lang="en-GB" dirty="0"/>
-              <a:t>In the early part of the curve we can see oscillations and spikes</a:t>
-            </a:r>
-          </a:p>
-          <a:p>
-            <a:pPr lvl="1"/>
-            <a:r>
-              <a:rPr lang="en-GB" dirty="0"/>
-              <a:t>if the initial action selected is by chance ones of the better choices, then the estimate will be magnified resulting in an emphasis to continue playing this action</a:t>
-            </a:r>
-          </a:p>
-          <a:p>
-            <a:pPr lvl="1"/>
-            <a:r>
-              <a:rPr lang="en-GB" dirty="0"/>
-              <a:t>this results in large values being received on the initial draws and consequently very good initial play</a:t>
-            </a:r>
-          </a:p>
-          <a:p>
-            <a:pPr lvl="1"/>
-            <a:r>
-              <a:rPr lang="en-GB" dirty="0"/>
-              <a:t>if the algorithm initially selects poor actions then initially it will perform poorly resulting in very poor initial play</a:t>
-            </a:r>
-          </a:p>
-          <a:p>
-            <a:pPr lvl="0"/>
-            <a:endParaRPr lang="en-GB" dirty="0"/>
-          </a:p>
-          <a:p>
-            <a:pPr lvl="0"/>
-            <a:endParaRPr lang="en-GB" dirty="0"/>
-          </a:p>
-          <a:p>
-            <a:pPr lvl="0"/>
-            <a:endParaRPr lang="en-GB" dirty="0"/>
-          </a:p>
-          <a:p>
-            <a:pPr lvl="1"/>
-            <a:endParaRPr lang="en-GB" dirty="0"/>
-          </a:p>
-        </p:txBody>
-      </p:sp>
+      </p:pic>
+      <p:pic>
+        <p:nvPicPr>
+          <p:cNvPr id="2" name="Immagine 1" descr="Immagine che contiene Carattere, Elementi grafici, logo, cerchio&#10;&#10;Descrizione generata automaticamente">
+            <a:extLst>
+              <a:ext uri="{FF2B5EF4-FFF2-40B4-BE49-F238E27FC236}">
+                <a16:creationId xmlns:a16="http://schemas.microsoft.com/office/drawing/2014/main" id="{5C082735-4F46-977F-9CDE-30C38AFCC96D}"/>
+              </a:ext>
+            </a:extLst>
+          </p:cNvPr>
+          <p:cNvPicPr>
+            <a:picLocks noChangeAspect="1"/>
+          </p:cNvPicPr>
+          <p:nvPr/>
+        </p:nvPicPr>
+        <p:blipFill>
+          <a:blip r:embed="rId4"/>
+          <a:stretch>
+            <a:fillRect/>
+          </a:stretch>
+        </p:blipFill>
+        <p:spPr>
+          <a:xfrm>
+            <a:off x="8656536" y="91573"/>
+            <a:ext cx="407258" cy="495579"/>
+          </a:xfrm>
+          <a:prstGeom prst="rect">
+            <a:avLst/>
+          </a:prstGeom>
+        </p:spPr>
+      </p:pic>
     </p:spTree>
     <p:extLst>
       <p:ext uri="{BB962C8B-B14F-4D97-AF65-F5344CB8AC3E}">
-        <p14:creationId xmlns:p14="http://schemas.microsoft.com/office/powerpoint/2010/main" val="3024686074"/>
+        <p14:creationId xmlns:p14="http://schemas.microsoft.com/office/powerpoint/2010/main" val="3574382410"/>
       </p:ext>
     </p:extLst>
   </p:cSld>
@@ -13351,7 +12269,7 @@
             <a:pPr lvl="0"/>
             <a:r>
               <a:rPr lang="en-GB" sz="4000" dirty="0"/>
-              <a:t>Strategic Exploration</a:t>
+              <a:t>Optimistic initial values (3)</a:t>
             </a:r>
             <a:endParaRPr sz="4000" dirty="0"/>
           </a:p>
@@ -13382,126 +12300,39 @@
           </a:bodyPr>
           <a:lstStyle/>
           <a:p>
-            <a:pPr lvl="0"/>
-            <a:r>
-              <a:rPr lang="en-GB" dirty="0"/>
-              <a:t>While humans explore, they </a:t>
-            </a:r>
-            <a:r>
-              <a:rPr lang="en-GB" b="1" dirty="0"/>
-              <a:t>don’t explore randomly</a:t>
+            <a:r>
+              <a:rPr lang="en-GB" dirty="0"/>
+              <a:t>Initially the optimistic method performs worse because it explores more</a:t>
+            </a:r>
+          </a:p>
+          <a:p>
+            <a:endParaRPr lang="en-GB" dirty="0"/>
+          </a:p>
+          <a:p>
+            <a:r>
+              <a:rPr lang="en-GB" dirty="0"/>
+              <a:t>In the early part of the curve we can see oscillations and spikes</a:t>
             </a:r>
           </a:p>
           <a:p>
             <a:pPr lvl="1"/>
             <a:r>
               <a:rPr lang="en-GB" dirty="0"/>
-              <a:t>imprecision is the source of randomness</a:t>
+              <a:t>if the initial action selected is by chance ones of the better choices, then the estimate will be magnified resulting in an emphasis to continue playing this action</a:t>
             </a:r>
           </a:p>
           <a:p>
             <a:pPr lvl="1"/>
             <a:r>
               <a:rPr lang="en-GB" dirty="0"/>
-              <a:t>but humans have a strategic way of exploring</a:t>
-            </a:r>
-          </a:p>
-          <a:p>
-            <a:pPr lvl="2"/>
-            <a:r>
-              <a:rPr lang="en-GB" dirty="0"/>
-              <a:t>we know that we’re sacrificing short-term for long-term satisfaction</a:t>
-            </a:r>
-          </a:p>
-          <a:p>
-            <a:pPr lvl="2"/>
-            <a:r>
-              <a:rPr lang="en-GB" dirty="0"/>
-              <a:t>we know we want to acquire information </a:t>
-            </a:r>
-          </a:p>
-          <a:p>
-            <a:pPr lvl="2"/>
-            <a:r>
-              <a:rPr lang="en-GB" dirty="0"/>
-              <a:t>we explore by trying things we haven’t sufficiently tried but </a:t>
-            </a:r>
-            <a:r>
-              <a:rPr lang="en-GB" b="1" dirty="0"/>
-              <a:t>have the potential </a:t>
-            </a:r>
-            <a:r>
-              <a:rPr lang="en-GB" dirty="0"/>
-              <a:t>to get better results </a:t>
-            </a:r>
-          </a:p>
-          <a:p>
-            <a:r>
-              <a:rPr lang="en-GB" dirty="0"/>
-              <a:t>Human exploration strategies are a </a:t>
-            </a:r>
-            <a:r>
-              <a:rPr lang="en-GB" b="1" dirty="0"/>
-              <a:t>combination of estimates and their uncertainty</a:t>
-            </a:r>
-            <a:endParaRPr lang="en-GB" dirty="0"/>
+              <a:t>this results in large values being received on the initial draws and consequently very good initial play</a:t>
+            </a:r>
           </a:p>
           <a:p>
             <a:pPr lvl="1"/>
             <a:r>
               <a:rPr lang="en-GB" dirty="0"/>
-              <a:t>we might prefer a dish that we’re likely to enjoy, and we haven’t tried, over a dish that we like okay, but we get every weekend</a:t>
-            </a:r>
-          </a:p>
-          <a:p>
-            <a:r>
-              <a:rPr lang="en-GB" dirty="0"/>
-              <a:t>The </a:t>
-            </a:r>
-            <a:r>
-              <a:rPr lang="en-GB" b="1" dirty="0"/>
-              <a:t>prediction error</a:t>
-            </a:r>
-            <a:r>
-              <a:rPr lang="en-GB" dirty="0"/>
-              <a:t> and </a:t>
-            </a:r>
-            <a:r>
-              <a:rPr lang="en-GB" b="1" dirty="0"/>
-              <a:t>curiosity</a:t>
-            </a:r>
-            <a:r>
-              <a:rPr lang="en-GB" dirty="0"/>
-              <a:t> could be our metric for exploration</a:t>
-            </a:r>
-          </a:p>
-          <a:p>
-            <a:pPr lvl="0"/>
-            <a:endParaRPr lang="en-GB" dirty="0"/>
-          </a:p>
-          <a:p>
-            <a:pPr lvl="0"/>
-            <a:r>
-              <a:rPr lang="en-GB" dirty="0"/>
-              <a:t>We can consider </a:t>
-            </a:r>
-            <a:r>
-              <a:rPr lang="en-GB" b="1" dirty="0"/>
-              <a:t>more advanced exploration strategies </a:t>
-            </a:r>
-          </a:p>
-          <a:p>
-            <a:pPr lvl="1"/>
-            <a:r>
-              <a:rPr lang="en-GB" dirty="0"/>
-              <a:t>apply randomness in proportion to the current estimates of the actions </a:t>
-            </a:r>
-          </a:p>
-          <a:p>
-            <a:pPr lvl="1"/>
-            <a:r>
-              <a:rPr lang="en-GB" dirty="0"/>
-              <a:t>take into account the confidence and uncertainty levels of the estimates</a:t>
+              <a:t>if the algorithm initially selects poor actions, then initially it will perform poorly resulting in very poor initial play</a:t>
             </a:r>
           </a:p>
           <a:p>
@@ -13525,7 +12356,7 @@
     </p:spTree>
     <p:extLst>
       <p:ext uri="{BB962C8B-B14F-4D97-AF65-F5344CB8AC3E}">
-        <p14:creationId xmlns:p14="http://schemas.microsoft.com/office/powerpoint/2010/main" val="2542778883"/>
+        <p14:creationId xmlns:p14="http://schemas.microsoft.com/office/powerpoint/2010/main" val="3024686074"/>
       </p:ext>
     </p:extLst>
   </p:cSld>
@@ -13579,6 +12410,239 @@
           <a:p>
             <a:pPr lvl="0"/>
             <a:r>
+              <a:rPr lang="en-GB" sz="4000" dirty="0"/>
+              <a:t>Strategic Exploration</a:t>
+            </a:r>
+            <a:endParaRPr sz="4000" dirty="0"/>
+          </a:p>
+        </p:txBody>
+      </p:sp>
+      <p:sp>
+        <p:nvSpPr>
+          <p:cNvPr id="84" name="Google Shape;84;p14"/>
+          <p:cNvSpPr txBox="1">
+            <a:spLocks noGrp="1"/>
+          </p:cNvSpPr>
+          <p:nvPr>
+            <p:ph type="body" idx="1"/>
+          </p:nvPr>
+        </p:nvSpPr>
+        <p:spPr>
+          <a:xfrm>
+            <a:off x="162750" y="1212537"/>
+            <a:ext cx="8818500" cy="5224230"/>
+          </a:xfrm>
+          <a:prstGeom prst="rect">
+            <a:avLst/>
+          </a:prstGeom>
+        </p:spPr>
+        <p:txBody>
+          <a:bodyPr spcFirstLastPara="1" wrap="square" lIns="91425" tIns="91425" rIns="91425" bIns="91425" anchor="t" anchorCtr="0">
+            <a:noAutofit/>
+          </a:bodyPr>
+          <a:lstStyle/>
+          <a:p>
+            <a:pPr lvl="0"/>
+            <a:r>
+              <a:rPr lang="en-GB" dirty="0"/>
+              <a:t>While humans explore, they </a:t>
+            </a:r>
+            <a:r>
+              <a:rPr lang="en-GB" b="1" dirty="0"/>
+              <a:t>don’t explore randomly</a:t>
+            </a:r>
+          </a:p>
+          <a:p>
+            <a:pPr lvl="1"/>
+            <a:r>
+              <a:rPr lang="en-GB" dirty="0"/>
+              <a:t>imprecision is the source of randomness</a:t>
+            </a:r>
+          </a:p>
+          <a:p>
+            <a:pPr lvl="1"/>
+            <a:r>
+              <a:rPr lang="en-GB" dirty="0"/>
+              <a:t>but humans have a </a:t>
+            </a:r>
+            <a:r>
+              <a:rPr lang="en-GB" b="1" dirty="0"/>
+              <a:t>strategic way of exploring</a:t>
+            </a:r>
+          </a:p>
+          <a:p>
+            <a:pPr lvl="2"/>
+            <a:r>
+              <a:rPr lang="en-GB" dirty="0"/>
+              <a:t>we know that we’re sacrificing short-term for long-term satisfaction</a:t>
+            </a:r>
+          </a:p>
+          <a:p>
+            <a:pPr lvl="2"/>
+            <a:r>
+              <a:rPr lang="en-GB" dirty="0"/>
+              <a:t>we know we want to acquire information </a:t>
+            </a:r>
+          </a:p>
+          <a:p>
+            <a:pPr lvl="2"/>
+            <a:r>
+              <a:rPr lang="en-GB" dirty="0"/>
+              <a:t>we explore by trying things we haven’t sufficiently tried but </a:t>
+            </a:r>
+            <a:r>
+              <a:rPr lang="en-GB" b="1" dirty="0"/>
+              <a:t>have the potential </a:t>
+            </a:r>
+            <a:r>
+              <a:rPr lang="en-GB" dirty="0"/>
+              <a:t>to get better results </a:t>
+            </a:r>
+          </a:p>
+          <a:p>
+            <a:r>
+              <a:rPr lang="en-GB" dirty="0"/>
+              <a:t>Human exploration strategies are a </a:t>
+            </a:r>
+            <a:r>
+              <a:rPr lang="en-GB" b="1" dirty="0"/>
+              <a:t>combination of estimates and their uncertainty</a:t>
+            </a:r>
+            <a:endParaRPr lang="en-GB" dirty="0"/>
+          </a:p>
+          <a:p>
+            <a:pPr lvl="1"/>
+            <a:r>
+              <a:rPr lang="en-GB" dirty="0"/>
+              <a:t>we might prefer a dish that we’re likely to enjoy, and we haven’t tried, over a dish that we like okay, but we get every weekend</a:t>
+            </a:r>
+          </a:p>
+          <a:p>
+            <a:r>
+              <a:rPr lang="en-GB" dirty="0"/>
+              <a:t>The </a:t>
+            </a:r>
+            <a:r>
+              <a:rPr lang="en-GB" b="1" dirty="0"/>
+              <a:t>prediction error</a:t>
+            </a:r>
+            <a:r>
+              <a:rPr lang="en-GB" dirty="0"/>
+              <a:t> and </a:t>
+            </a:r>
+            <a:r>
+              <a:rPr lang="en-GB" b="1" dirty="0"/>
+              <a:t>curiosity</a:t>
+            </a:r>
+            <a:r>
+              <a:rPr lang="en-GB" dirty="0"/>
+              <a:t> could be our metric for exploration</a:t>
+            </a:r>
+          </a:p>
+          <a:p>
+            <a:pPr lvl="0"/>
+            <a:endParaRPr lang="en-GB" dirty="0"/>
+          </a:p>
+          <a:p>
+            <a:pPr lvl="0"/>
+            <a:r>
+              <a:rPr lang="en-GB" dirty="0"/>
+              <a:t>We can consider </a:t>
+            </a:r>
+            <a:r>
+              <a:rPr lang="en-GB" b="1" dirty="0"/>
+              <a:t>more advanced exploration strategies </a:t>
+            </a:r>
+          </a:p>
+          <a:p>
+            <a:pPr lvl="1"/>
+            <a:r>
+              <a:rPr lang="en-GB" dirty="0"/>
+              <a:t>apply randomness in proportion to the current estimates of the actions </a:t>
+            </a:r>
+          </a:p>
+          <a:p>
+            <a:pPr lvl="1"/>
+            <a:r>
+              <a:rPr lang="en-GB" dirty="0"/>
+              <a:t>take into account the confidence and uncertainty levels of the estimates</a:t>
+            </a:r>
+          </a:p>
+          <a:p>
+            <a:pPr lvl="0"/>
+            <a:endParaRPr lang="en-GB" dirty="0"/>
+          </a:p>
+          <a:p>
+            <a:pPr lvl="0"/>
+            <a:endParaRPr lang="en-GB" dirty="0"/>
+          </a:p>
+          <a:p>
+            <a:pPr lvl="0"/>
+            <a:endParaRPr lang="en-GB" dirty="0"/>
+          </a:p>
+          <a:p>
+            <a:pPr lvl="1"/>
+            <a:endParaRPr lang="en-GB" dirty="0"/>
+          </a:p>
+        </p:txBody>
+      </p:sp>
+    </p:spTree>
+    <p:extLst>
+      <p:ext uri="{BB962C8B-B14F-4D97-AF65-F5344CB8AC3E}">
+        <p14:creationId xmlns:p14="http://schemas.microsoft.com/office/powerpoint/2010/main" val="2542778883"/>
+      </p:ext>
+    </p:extLst>
+  </p:cSld>
+  <p:clrMapOvr>
+    <a:masterClrMapping/>
+  </p:clrMapOvr>
+</p:sld>
+</file>
+
+<file path=ppt/slides/slide25.xml><?xml version="1.0" encoding="utf-8"?>
+<p:sld xmlns:a="http://schemas.openxmlformats.org/drawingml/2006/main" xmlns:r="http://schemas.openxmlformats.org/officeDocument/2006/relationships" xmlns:p="http://schemas.openxmlformats.org/presentationml/2006/main">
+  <p:cSld>
+    <p:spTree>
+      <p:nvGrpSpPr>
+        <p:cNvPr id="1" name="Shape 82"/>
+        <p:cNvGrpSpPr/>
+        <p:nvPr/>
+      </p:nvGrpSpPr>
+      <p:grpSpPr>
+        <a:xfrm>
+          <a:off x="0" y="0"/>
+          <a:ext cx="0" cy="0"/>
+          <a:chOff x="0" y="0"/>
+          <a:chExt cx="0" cy="0"/>
+        </a:xfrm>
+      </p:grpSpPr>
+      <p:sp>
+        <p:nvSpPr>
+          <p:cNvPr id="83" name="Google Shape;83;p14"/>
+          <p:cNvSpPr txBox="1">
+            <a:spLocks noGrp="1"/>
+          </p:cNvSpPr>
+          <p:nvPr>
+            <p:ph type="title" idx="4294967295"/>
+          </p:nvPr>
+        </p:nvSpPr>
+        <p:spPr>
+          <a:xfrm>
+            <a:off x="311700" y="421233"/>
+            <a:ext cx="8520600" cy="622500"/>
+          </a:xfrm>
+          <a:prstGeom prst="rect">
+            <a:avLst/>
+          </a:prstGeom>
+        </p:spPr>
+        <p:txBody>
+          <a:bodyPr spcFirstLastPara="1" wrap="square" lIns="91425" tIns="91425" rIns="91425" bIns="91425" anchor="b" anchorCtr="0">
+            <a:noAutofit/>
+          </a:bodyPr>
+          <a:lstStyle/>
+          <a:p>
+            <a:pPr lvl="0"/>
+            <a:r>
               <a:rPr lang="en-GB" sz="4000" dirty="0" err="1"/>
               <a:t>Softmax</a:t>
             </a:r>
@@ -13782,7 +12846,7 @@
 </p:sld>
 </file>
 
-<file path=ppt/slides/slide25.xml><?xml version="1.0" encoding="utf-8"?>
+<file path=ppt/slides/slide26.xml><?xml version="1.0" encoding="utf-8"?>
 <p:sld xmlns:a="http://schemas.openxmlformats.org/drawingml/2006/main" xmlns:r="http://schemas.openxmlformats.org/officeDocument/2006/relationships" xmlns:p="http://schemas.openxmlformats.org/presentationml/2006/main">
   <p:cSld>
     <p:spTree>
@@ -13969,229 +13033,6 @@
 </p:sld>
 </file>
 
-<file path=ppt/slides/slide26.xml><?xml version="1.0" encoding="utf-8"?>
-<p:sld xmlns:a="http://schemas.openxmlformats.org/drawingml/2006/main" xmlns:r="http://schemas.openxmlformats.org/officeDocument/2006/relationships" xmlns:p="http://schemas.openxmlformats.org/presentationml/2006/main">
-  <p:cSld>
-    <p:spTree>
-      <p:nvGrpSpPr>
-        <p:cNvPr id="1" name="Shape 82"/>
-        <p:cNvGrpSpPr/>
-        <p:nvPr/>
-      </p:nvGrpSpPr>
-      <p:grpSpPr>
-        <a:xfrm>
-          <a:off x="0" y="0"/>
-          <a:ext cx="0" cy="0"/>
-          <a:chOff x="0" y="0"/>
-          <a:chExt cx="0" cy="0"/>
-        </a:xfrm>
-      </p:grpSpPr>
-      <p:sp>
-        <p:nvSpPr>
-          <p:cNvPr id="83" name="Google Shape;83;p14"/>
-          <p:cNvSpPr txBox="1">
-            <a:spLocks noGrp="1"/>
-          </p:cNvSpPr>
-          <p:nvPr>
-            <p:ph type="title" idx="4294967295"/>
-          </p:nvPr>
-        </p:nvSpPr>
-        <p:spPr>
-          <a:xfrm>
-            <a:off x="311700" y="421233"/>
-            <a:ext cx="8520600" cy="622500"/>
-          </a:xfrm>
-          <a:prstGeom prst="rect">
-            <a:avLst/>
-          </a:prstGeom>
-        </p:spPr>
-        <p:txBody>
-          <a:bodyPr spcFirstLastPara="1" wrap="square" lIns="91425" tIns="91425" rIns="91425" bIns="91425" anchor="b" anchorCtr="0">
-            <a:noAutofit/>
-          </a:bodyPr>
-          <a:lstStyle/>
-          <a:p>
-            <a:pPr lvl="0"/>
-            <a:r>
-              <a:rPr lang="en-GB" sz="4000" dirty="0"/>
-              <a:t>Upper Confidence Bound method (1)</a:t>
-            </a:r>
-            <a:endParaRPr sz="4000" dirty="0"/>
-          </a:p>
-        </p:txBody>
-      </p:sp>
-      <p:sp>
-        <p:nvSpPr>
-          <p:cNvPr id="84" name="Google Shape;84;p14"/>
-          <p:cNvSpPr txBox="1">
-            <a:spLocks noGrp="1"/>
-          </p:cNvSpPr>
-          <p:nvPr>
-            <p:ph type="body" idx="1"/>
-          </p:nvPr>
-        </p:nvSpPr>
-        <p:spPr>
-          <a:xfrm>
-            <a:off x="162750" y="1212537"/>
-            <a:ext cx="8818500" cy="5224230"/>
-          </a:xfrm>
-          <a:prstGeom prst="rect">
-            <a:avLst/>
-          </a:prstGeom>
-        </p:spPr>
-        <p:txBody>
-          <a:bodyPr spcFirstLastPara="1" wrap="square" lIns="91425" tIns="91425" rIns="91425" bIns="91425" anchor="t" anchorCtr="0">
-            <a:noAutofit/>
-          </a:bodyPr>
-          <a:lstStyle/>
-          <a:p>
-            <a:pPr lvl="0"/>
-            <a:r>
-              <a:rPr lang="en-GB" dirty="0"/>
-              <a:t>Optimistic initialization is a clever and efficient approach, however </a:t>
-            </a:r>
-            <a:r>
-              <a:rPr lang="en-GB" b="1" dirty="0"/>
-              <a:t>we don’t know the maximum reward </a:t>
-            </a:r>
-            <a:r>
-              <a:rPr lang="en-GB" dirty="0"/>
-              <a:t>the agent can obtain </a:t>
-            </a:r>
-          </a:p>
-          <a:p>
-            <a:pPr lvl="1"/>
-            <a:r>
-              <a:rPr lang="en-GB" dirty="0"/>
-              <a:t>if we set it to a value much higher than its actual value, the algorithm will perform sub-optimally for a long time (many episodes to bring the estimates near the actual values)</a:t>
-            </a:r>
-          </a:p>
-          <a:p>
-            <a:pPr lvl="1"/>
-            <a:r>
-              <a:rPr lang="en-GB" dirty="0"/>
-              <a:t>if we set the initial values lower than the maximum, the algorithm will no longer be optimistic, and it will no longer work </a:t>
-            </a:r>
-          </a:p>
-          <a:p>
-            <a:r>
-              <a:rPr lang="en-GB" dirty="0"/>
-              <a:t>A better strategy is to use statistical techniques to calculate the </a:t>
-            </a:r>
-            <a:r>
-              <a:rPr lang="en-GB" b="1" dirty="0"/>
-              <a:t>value estimate uncertainty </a:t>
-            </a:r>
-            <a:r>
-              <a:rPr lang="en-GB" dirty="0"/>
-              <a:t>and uses it as a </a:t>
-            </a:r>
-            <a:r>
-              <a:rPr lang="en-GB" b="1" dirty="0"/>
-              <a:t>bonus for exploration</a:t>
-            </a:r>
-          </a:p>
-          <a:p>
-            <a:pPr lvl="1"/>
-            <a:r>
-              <a:rPr lang="en-GB" dirty="0"/>
-              <a:t>we’re still optimistic, but it’s a more a realistic optimism</a:t>
-            </a:r>
-          </a:p>
-          <a:p>
-            <a:pPr lvl="1"/>
-            <a:r>
-              <a:rPr lang="en-GB" dirty="0"/>
-              <a:t>instead of blindly hoping for the best, we look at the uncertainty of value estimates </a:t>
-            </a:r>
-          </a:p>
-          <a:p>
-            <a:pPr lvl="1"/>
-            <a:r>
-              <a:rPr lang="en-GB" b="1" dirty="0"/>
-              <a:t>the more uncertain an estimate, the more critical it is to explore it</a:t>
-            </a:r>
-          </a:p>
-          <a:p>
-            <a:endParaRPr lang="en-GB" dirty="0"/>
-          </a:p>
-          <a:p>
-            <a:endParaRPr lang="en-GB" dirty="0"/>
-          </a:p>
-          <a:p>
-            <a:r>
-              <a:rPr lang="en-GB" dirty="0"/>
-              <a:t>The u(a) here is a </a:t>
-            </a:r>
-            <a:r>
-              <a:rPr lang="en-GB" b="1" dirty="0"/>
-              <a:t>measure of</a:t>
-            </a:r>
-            <a:r>
-              <a:rPr lang="en-GB" dirty="0"/>
-              <a:t> </a:t>
-            </a:r>
-            <a:r>
-              <a:rPr lang="en-GB" b="1" dirty="0"/>
-              <a:t>uncertainty</a:t>
-            </a:r>
-          </a:p>
-          <a:p>
-            <a:pPr lvl="1"/>
-            <a:r>
-              <a:rPr lang="en-GB" dirty="0"/>
-              <a:t>we want to give actions the benefit of the doubt</a:t>
-            </a:r>
-          </a:p>
-          <a:p>
-            <a:pPr lvl="1"/>
-            <a:endParaRPr lang="en-GB" dirty="0"/>
-          </a:p>
-        </p:txBody>
-      </p:sp>
-      <p:pic>
-        <p:nvPicPr>
-          <p:cNvPr id="3" name="Immagine 2" descr="Immagine che contiene Carattere, testo, bianco, calligrafia&#10;&#10;Descrizione generata automaticamente">
-            <a:extLst>
-              <a:ext uri="{FF2B5EF4-FFF2-40B4-BE49-F238E27FC236}">
-                <a16:creationId xmlns:a16="http://schemas.microsoft.com/office/drawing/2014/main" id="{274DB77E-DDC4-0BB9-3BBF-DE59F155FEA6}"/>
-              </a:ext>
-            </a:extLst>
-          </p:cNvPr>
-          <p:cNvPicPr>
-            <a:picLocks noChangeAspect="1"/>
-          </p:cNvPicPr>
-          <p:nvPr/>
-        </p:nvPicPr>
-        <p:blipFill>
-          <a:blip r:embed="rId3"/>
-          <a:stretch>
-            <a:fillRect/>
-          </a:stretch>
-        </p:blipFill>
-        <p:spPr>
-          <a:xfrm>
-            <a:off x="788044" y="4857420"/>
-            <a:ext cx="2590800" cy="533400"/>
-          </a:xfrm>
-          <a:prstGeom prst="rect">
-            <a:avLst/>
-          </a:prstGeom>
-        </p:spPr>
-      </p:pic>
-    </p:spTree>
-    <p:extLst>
-      <p:ext uri="{BB962C8B-B14F-4D97-AF65-F5344CB8AC3E}">
-        <p14:creationId xmlns:p14="http://schemas.microsoft.com/office/powerpoint/2010/main" val="853800667"/>
-      </p:ext>
-    </p:extLst>
-  </p:cSld>
-  <p:clrMapOvr>
-    <a:masterClrMapping/>
-  </p:clrMapOvr>
-</p:sld>
-</file>
-
 <file path=ppt/slides/slide27.xml><?xml version="1.0" encoding="utf-8"?>
 <p:sld xmlns:a="http://schemas.openxmlformats.org/drawingml/2006/main" xmlns:r="http://schemas.openxmlformats.org/officeDocument/2006/relationships" xmlns:p="http://schemas.openxmlformats.org/presentationml/2006/main">
   <p:cSld>
@@ -14237,8 +13078,9 @@
             <a:pPr lvl="0"/>
             <a:r>
               <a:rPr lang="en-GB" sz="4000" dirty="0"/>
-              <a:t>Upper Confidence Bound method (2)</a:t>
-            </a:r>
+              <a:t>Upper Confidence Bound method (1)</a:t>
+            </a:r>
+            <a:endParaRPr sz="4000" dirty="0"/>
           </a:p>
         </p:txBody>
       </p:sp>
@@ -14270,158 +13112,117 @@
             <a:pPr lvl="0"/>
             <a:r>
               <a:rPr lang="en-GB" dirty="0"/>
-              <a:t>To select the action </a:t>
-            </a:r>
-            <a:r>
-              <a:rPr lang="en-GB" i="1" dirty="0"/>
-              <a:t>A </a:t>
-            </a:r>
-            <a:r>
-              <a:rPr lang="en-GB" dirty="0"/>
-              <a:t>we add the value estimates and an uncertainty bonus</a:t>
-            </a:r>
-          </a:p>
-          <a:p>
-            <a:pPr lvl="0"/>
+              <a:t>Optimistic initialization is a clever and efficient approach; however </a:t>
+            </a:r>
+            <a:r>
+              <a:rPr lang="en-GB" b="1" dirty="0"/>
+              <a:t>we don’t know the maximum reward </a:t>
+            </a:r>
+            <a:r>
+              <a:rPr lang="en-GB" dirty="0"/>
+              <a:t>the agent can obtain </a:t>
+            </a:r>
+          </a:p>
+          <a:p>
+            <a:pPr lvl="1"/>
+            <a:r>
+              <a:rPr lang="en-GB" dirty="0"/>
+              <a:t>if we set it to a value much higher than its actual value, the algorithm will perform sub-optimally for a long time (many episodes to bring the estimates near the actual values)</a:t>
+            </a:r>
+          </a:p>
+          <a:p>
+            <a:pPr lvl="1"/>
+            <a:r>
+              <a:rPr lang="en-GB" dirty="0"/>
+              <a:t>if we set the initial values lower than the maximum, the algorithm will no longer be optimistic, and it will no longer work </a:t>
+            </a:r>
+          </a:p>
+          <a:p>
+            <a:r>
+              <a:rPr lang="en-GB" dirty="0"/>
+              <a:t>A better strategy is to use statistical techniques to calculate the </a:t>
+            </a:r>
+            <a:r>
+              <a:rPr lang="en-GB" b="1" dirty="0"/>
+              <a:t>value estimate uncertainty </a:t>
+            </a:r>
+            <a:r>
+              <a:rPr lang="en-GB" dirty="0"/>
+              <a:t>and uses it as a </a:t>
+            </a:r>
+            <a:r>
+              <a:rPr lang="en-GB" b="1" dirty="0"/>
+              <a:t>bonus for exploration</a:t>
+            </a:r>
+          </a:p>
+          <a:p>
+            <a:pPr lvl="1"/>
+            <a:r>
+              <a:rPr lang="en-GB" dirty="0"/>
+              <a:t>we’re still optimistic, but it’s a more a realistic optimism</a:t>
+            </a:r>
+          </a:p>
+          <a:p>
+            <a:pPr lvl="1"/>
+            <a:r>
+              <a:rPr lang="en-GB" dirty="0"/>
+              <a:t>instead of blindly hoping for the best, we look at the uncertainty of value estimates </a:t>
+            </a:r>
+          </a:p>
+          <a:p>
+            <a:pPr lvl="1"/>
+            <a:r>
+              <a:rPr lang="en-GB" b="1" dirty="0"/>
+              <a:t>the more uncertain an estimate, the more critical it is to explore it</a:t>
+            </a:r>
+          </a:p>
+          <a:p>
             <a:endParaRPr lang="en-GB" dirty="0"/>
           </a:p>
           <a:p>
-            <a:pPr lvl="0"/>
             <a:endParaRPr lang="en-GB" dirty="0"/>
           </a:p>
           <a:p>
-            <a:pPr lvl="0"/>
+            <a:r>
+              <a:rPr lang="en-GB" dirty="0"/>
+              <a:t>The u(a) here is a </a:t>
+            </a:r>
+            <a:r>
+              <a:rPr lang="en-GB" b="1" dirty="0"/>
+              <a:t>measure of</a:t>
+            </a:r>
+            <a:r>
+              <a:rPr lang="en-GB" dirty="0"/>
+              <a:t> </a:t>
+            </a:r>
+            <a:r>
+              <a:rPr lang="en-GB" b="1" dirty="0"/>
+              <a:t>uncertainty</a:t>
+            </a:r>
+          </a:p>
+          <a:p>
+            <a:pPr lvl="1"/>
+            <a:r>
+              <a:rPr lang="en-GB" dirty="0"/>
+              <a:t>we want to give actions </a:t>
+            </a:r>
+            <a:r>
+              <a:rPr lang="en-GB" b="1" dirty="0"/>
+              <a:t>the benefit of the doubt</a:t>
+            </a:r>
+          </a:p>
+          <a:p>
+            <a:pPr lvl="1"/>
             <a:endParaRPr lang="en-GB" dirty="0"/>
-          </a:p>
-          <a:p>
-            <a:pPr marL="120650" lvl="0" indent="0">
-              <a:buNone/>
-            </a:pPr>
-            <a:endParaRPr lang="en-GB" dirty="0"/>
-          </a:p>
-          <a:p>
-            <a:pPr lvl="0"/>
-            <a:r>
-              <a:rPr lang="en-GB" dirty="0"/>
-              <a:t>The square-root term is a </a:t>
-            </a:r>
-            <a:r>
-              <a:rPr lang="en-GB" b="1" dirty="0"/>
-              <a:t>measure of the uncertainty </a:t>
-            </a:r>
-            <a:r>
-              <a:rPr lang="en-GB" dirty="0"/>
-              <a:t>in the estimate</a:t>
-            </a:r>
-          </a:p>
-          <a:p>
-            <a:pPr lvl="1"/>
-            <a:r>
-              <a:rPr lang="en-GB" dirty="0"/>
-              <a:t>each time </a:t>
-            </a:r>
-            <a:r>
-              <a:rPr lang="en-GB" i="1" dirty="0"/>
-              <a:t>a</a:t>
-            </a:r>
-            <a:r>
-              <a:rPr lang="en-GB" dirty="0"/>
-              <a:t> is selected, the uncertainty is presumably reduced:  </a:t>
-            </a:r>
-            <a:r>
-              <a:rPr lang="en-GB" i="1" dirty="0" err="1"/>
-              <a:t>N</a:t>
-            </a:r>
-            <a:r>
-              <a:rPr lang="en-GB" i="1" baseline="-25000" dirty="0" err="1"/>
-              <a:t>t</a:t>
-            </a:r>
-            <a:r>
-              <a:rPr lang="en-GB" i="1" dirty="0"/>
-              <a:t>(a)</a:t>
-            </a:r>
-            <a:r>
-              <a:rPr lang="en-GB" dirty="0"/>
-              <a:t> increments and the uncertainty term decreases</a:t>
-            </a:r>
-          </a:p>
-          <a:p>
-            <a:pPr lvl="1"/>
-            <a:r>
-              <a:rPr lang="en-GB" dirty="0"/>
-              <a:t>each time an action other than </a:t>
-            </a:r>
-            <a:r>
-              <a:rPr lang="en-GB" i="1" dirty="0"/>
-              <a:t>a</a:t>
-            </a:r>
-            <a:r>
-              <a:rPr lang="en-GB" dirty="0"/>
-              <a:t> is selected, </a:t>
-            </a:r>
-            <a:r>
-              <a:rPr lang="en-GB" i="1" dirty="0"/>
-              <a:t>t</a:t>
-            </a:r>
-            <a:r>
-              <a:rPr lang="en-GB" dirty="0"/>
-              <a:t> increases and the uncertainty estimate increases</a:t>
-            </a:r>
-          </a:p>
-          <a:p>
-            <a:pPr lvl="1"/>
-            <a:r>
-              <a:rPr lang="en-GB" dirty="0"/>
-              <a:t>logarithm means that the increases get smaller over time, but are unbounded</a:t>
-            </a:r>
-          </a:p>
-          <a:p>
-            <a:endParaRPr lang="en-GB" sz="1000" dirty="0"/>
-          </a:p>
-          <a:p>
-            <a:r>
-              <a:rPr lang="en-GB" dirty="0"/>
-              <a:t>All actions will </a:t>
-            </a:r>
-            <a:r>
-              <a:rPr lang="en-GB" b="1" dirty="0"/>
-              <a:t>eventually be selected</a:t>
-            </a:r>
-            <a:r>
-              <a:rPr lang="en-GB" dirty="0"/>
-              <a:t>, but actions with </a:t>
-            </a:r>
-            <a:r>
-              <a:rPr lang="en-GB" b="1" dirty="0"/>
-              <a:t>lower value estimates</a:t>
-            </a:r>
-            <a:r>
-              <a:rPr lang="en-GB" dirty="0"/>
-              <a:t>, or that </a:t>
-            </a:r>
-            <a:r>
-              <a:rPr lang="en-GB" b="1" dirty="0"/>
-              <a:t>have already been selected frequently</a:t>
-            </a:r>
-            <a:r>
-              <a:rPr lang="en-GB" dirty="0"/>
-              <a:t>, will be selected with decreasing frequency over time</a:t>
-            </a:r>
-          </a:p>
-          <a:p>
-            <a:pPr marL="120650" indent="0">
-              <a:buNone/>
-            </a:pPr>
-            <a:endParaRPr lang="en-GB" sz="1100" dirty="0"/>
           </a:p>
         </p:txBody>
       </p:sp>
       <p:pic>
         <p:nvPicPr>
-          <p:cNvPr id="3" name="Immagine 2" descr="Immagine che contiene Carattere, testo, bianco, linea&#10;&#10;Descrizione generata automaticamente">
+          <p:cNvPr id="3" name="Immagine 2" descr="Immagine che contiene Carattere, testo, bianco, calligrafia&#10;&#10;Descrizione generata automaticamente">
             <a:extLst>
               <a:ext uri="{FF2B5EF4-FFF2-40B4-BE49-F238E27FC236}">
-                <a16:creationId xmlns:a16="http://schemas.microsoft.com/office/drawing/2014/main" id="{A15637CC-4CEF-45E6-E77F-F034C5A17CEF}"/>
+                <a16:creationId xmlns:a16="http://schemas.microsoft.com/office/drawing/2014/main" id="{274DB77E-DDC4-0BB9-3BBF-DE59F155FEA6}"/>
               </a:ext>
             </a:extLst>
           </p:cNvPr>
@@ -14438,8 +13239,8 @@
         </p:blipFill>
         <p:spPr>
           <a:xfrm>
-            <a:off x="660191" y="1578859"/>
-            <a:ext cx="4034605" cy="1044419"/>
+            <a:off x="788044" y="4857420"/>
+            <a:ext cx="2590800" cy="533400"/>
           </a:xfrm>
           <a:prstGeom prst="rect">
             <a:avLst/>
@@ -14449,7 +13250,7 @@
     </p:spTree>
     <p:extLst>
       <p:ext uri="{BB962C8B-B14F-4D97-AF65-F5344CB8AC3E}">
-        <p14:creationId xmlns:p14="http://schemas.microsoft.com/office/powerpoint/2010/main" val="3190013514"/>
+        <p14:creationId xmlns:p14="http://schemas.microsoft.com/office/powerpoint/2010/main" val="853800667"/>
       </p:ext>
     </p:extLst>
   </p:cSld>
@@ -14503,23 +13304,192 @@
           <a:p>
             <a:pPr lvl="0"/>
             <a:r>
-              <a:rPr lang="en-GB" sz="4000" dirty="0" err="1"/>
-              <a:t>Softmax</a:t>
-            </a:r>
-            <a:r>
               <a:rPr lang="en-GB" sz="4000" dirty="0"/>
-              <a:t> method vs Upper Confidence Bound</a:t>
-            </a:r>
-            <a:endParaRPr sz="4000" dirty="0"/>
+              <a:t>Upper Confidence Bound method (2)</a:t>
+            </a:r>
+          </a:p>
+        </p:txBody>
+      </p:sp>
+      <p:sp>
+        <p:nvSpPr>
+          <p:cNvPr id="84" name="Google Shape;84;p14"/>
+          <p:cNvSpPr txBox="1">
+            <a:spLocks noGrp="1"/>
+          </p:cNvSpPr>
+          <p:nvPr>
+            <p:ph type="body" idx="1"/>
+          </p:nvPr>
+        </p:nvSpPr>
+        <p:spPr>
+          <a:xfrm>
+            <a:off x="162750" y="1212537"/>
+            <a:ext cx="8818500" cy="5224230"/>
+          </a:xfrm>
+          <a:prstGeom prst="rect">
+            <a:avLst/>
+          </a:prstGeom>
+        </p:spPr>
+        <p:txBody>
+          <a:bodyPr spcFirstLastPara="1" wrap="square" lIns="91425" tIns="91425" rIns="91425" bIns="91425" anchor="t" anchorCtr="0">
+            <a:noAutofit/>
+          </a:bodyPr>
+          <a:lstStyle/>
+          <a:p>
+            <a:pPr lvl="0"/>
+            <a:r>
+              <a:rPr lang="en-GB" dirty="0"/>
+              <a:t>To select the action </a:t>
+            </a:r>
+            <a:r>
+              <a:rPr lang="en-GB" i="1" dirty="0"/>
+              <a:t>A </a:t>
+            </a:r>
+            <a:r>
+              <a:rPr lang="en-GB" dirty="0"/>
+              <a:t>we add the value estimates and an uncertainty bonus</a:t>
+            </a:r>
+          </a:p>
+          <a:p>
+            <a:pPr lvl="0"/>
+            <a:endParaRPr lang="en-GB" dirty="0"/>
+          </a:p>
+          <a:p>
+            <a:pPr lvl="0"/>
+            <a:endParaRPr lang="en-GB" dirty="0"/>
+          </a:p>
+          <a:p>
+            <a:pPr lvl="0"/>
+            <a:endParaRPr lang="en-GB" dirty="0"/>
+          </a:p>
+          <a:p>
+            <a:pPr marL="120650" lvl="0" indent="0">
+              <a:buNone/>
+            </a:pPr>
+            <a:endParaRPr lang="en-GB" dirty="0"/>
+          </a:p>
+          <a:p>
+            <a:pPr lvl="0"/>
+            <a:r>
+              <a:rPr lang="en-GB" dirty="0"/>
+              <a:t>The square-root term is a </a:t>
+            </a:r>
+            <a:r>
+              <a:rPr lang="en-GB" b="1" dirty="0"/>
+              <a:t>measure of the uncertainty </a:t>
+            </a:r>
+            <a:r>
+              <a:rPr lang="en-GB" dirty="0"/>
+              <a:t>in the estimate</a:t>
+            </a:r>
+          </a:p>
+          <a:p>
+            <a:pPr lvl="1"/>
+            <a:r>
+              <a:rPr lang="en-GB" dirty="0"/>
+              <a:t>each time </a:t>
+            </a:r>
+            <a:r>
+              <a:rPr lang="en-GB" i="1" dirty="0"/>
+              <a:t>a</a:t>
+            </a:r>
+            <a:r>
+              <a:rPr lang="en-GB" dirty="0"/>
+              <a:t> is selected, the uncertainty is presumably reduced:  </a:t>
+            </a:r>
+            <a:r>
+              <a:rPr lang="en-GB" i="1" dirty="0" err="1"/>
+              <a:t>N</a:t>
+            </a:r>
+            <a:r>
+              <a:rPr lang="en-GB" i="1" baseline="-25000" dirty="0" err="1"/>
+              <a:t>t</a:t>
+            </a:r>
+            <a:r>
+              <a:rPr lang="en-GB" i="1" dirty="0"/>
+              <a:t>(a)</a:t>
+            </a:r>
+            <a:r>
+              <a:rPr lang="en-GB" dirty="0"/>
+              <a:t> increments and the uncertainty term decreases</a:t>
+            </a:r>
+          </a:p>
+          <a:p>
+            <a:pPr lvl="1"/>
+            <a:r>
+              <a:rPr lang="en-GB" dirty="0"/>
+              <a:t>each time an action other than </a:t>
+            </a:r>
+            <a:r>
+              <a:rPr lang="en-GB" i="1" dirty="0"/>
+              <a:t>a</a:t>
+            </a:r>
+            <a:r>
+              <a:rPr lang="en-GB" dirty="0"/>
+              <a:t> is selected, </a:t>
+            </a:r>
+            <a:r>
+              <a:rPr lang="en-GB" i="1" dirty="0"/>
+              <a:t>t</a:t>
+            </a:r>
+            <a:r>
+              <a:rPr lang="en-GB" dirty="0"/>
+              <a:t> increases and the uncertainty estimate increases</a:t>
+            </a:r>
+          </a:p>
+          <a:p>
+            <a:pPr lvl="1"/>
+            <a:r>
+              <a:rPr lang="en-GB" dirty="0"/>
+              <a:t>logarithm means that the increases get smaller over time, but are unbounded</a:t>
+            </a:r>
+          </a:p>
+          <a:p>
+            <a:endParaRPr lang="en-GB" sz="1000" dirty="0"/>
+          </a:p>
+          <a:p>
+            <a:r>
+              <a:rPr lang="en-GB" dirty="0"/>
+              <a:t>All actions will </a:t>
+            </a:r>
+            <a:r>
+              <a:rPr lang="en-GB" b="1" dirty="0"/>
+              <a:t>eventually be selected</a:t>
+            </a:r>
+            <a:r>
+              <a:rPr lang="en-GB" dirty="0"/>
+              <a:t>, but actions with </a:t>
+            </a:r>
+            <a:r>
+              <a:rPr lang="en-GB" b="1" dirty="0"/>
+              <a:t>lower value estimates</a:t>
+            </a:r>
+            <a:r>
+              <a:rPr lang="en-GB" dirty="0"/>
+              <a:t>, or that </a:t>
+            </a:r>
+            <a:r>
+              <a:rPr lang="en-GB" b="1" dirty="0"/>
+              <a:t>have already been selected frequently</a:t>
+            </a:r>
+            <a:r>
+              <a:rPr lang="en-GB" dirty="0"/>
+              <a:t>, will be selected with decreasing frequency over time</a:t>
+            </a:r>
+          </a:p>
+          <a:p>
+            <a:pPr marL="120650" indent="0">
+              <a:buNone/>
+            </a:pPr>
+            <a:endParaRPr lang="en-GB" sz="1100" dirty="0"/>
           </a:p>
         </p:txBody>
       </p:sp>
       <p:pic>
         <p:nvPicPr>
-          <p:cNvPr id="4" name="Immagine 3">
+          <p:cNvPr id="3" name="Immagine 2" descr="Immagine che contiene Carattere, testo, bianco, linea&#10;&#10;Descrizione generata automaticamente">
             <a:extLst>
               <a:ext uri="{FF2B5EF4-FFF2-40B4-BE49-F238E27FC236}">
-                <a16:creationId xmlns:a16="http://schemas.microsoft.com/office/drawing/2014/main" id="{D9CA36AE-E18C-03BC-DABF-16CC58B23496}"/>
+                <a16:creationId xmlns:a16="http://schemas.microsoft.com/office/drawing/2014/main" id="{A15637CC-4CEF-45E6-E77F-F034C5A17CEF}"/>
               </a:ext>
             </a:extLst>
           </p:cNvPr>
@@ -14536,38 +13506,8 @@
         </p:blipFill>
         <p:spPr>
           <a:xfrm>
-            <a:off x="66499" y="1163550"/>
-            <a:ext cx="8918235" cy="5453380"/>
-          </a:xfrm>
-          <a:prstGeom prst="rect">
-            <a:avLst/>
-          </a:prstGeom>
-        </p:spPr>
-      </p:pic>
-      <p:pic>
-        <p:nvPicPr>
-          <p:cNvPr id="5" name="Immagine 4" descr="Immagine che contiene Carattere, Elementi grafici, logo, cerchio&#10;&#10;Descrizione generata automaticamente">
-            <a:extLst>
-              <a:ext uri="{FF2B5EF4-FFF2-40B4-BE49-F238E27FC236}">
-                <a16:creationId xmlns:a16="http://schemas.microsoft.com/office/drawing/2014/main" id="{DCE156B9-D835-B421-1A28-A1C74CBEE595}"/>
-              </a:ext>
-            </a:extLst>
-          </p:cNvPr>
-          <p:cNvPicPr>
-            <a:picLocks noChangeAspect="1"/>
-          </p:cNvPicPr>
-          <p:nvPr/>
-        </p:nvPicPr>
-        <p:blipFill>
-          <a:blip r:embed="rId4"/>
-          <a:stretch>
-            <a:fillRect/>
-          </a:stretch>
-        </p:blipFill>
-        <p:spPr>
-          <a:xfrm>
-            <a:off x="8656536" y="91573"/>
-            <a:ext cx="407258" cy="495579"/>
+            <a:off x="660191" y="1578859"/>
+            <a:ext cx="4034605" cy="1044419"/>
           </a:xfrm>
           <a:prstGeom prst="rect">
             <a:avLst/>
@@ -14577,7 +13517,7 @@
     </p:spTree>
     <p:extLst>
       <p:ext uri="{BB962C8B-B14F-4D97-AF65-F5344CB8AC3E}">
-        <p14:creationId xmlns:p14="http://schemas.microsoft.com/office/powerpoint/2010/main" val="2800698680"/>
+        <p14:creationId xmlns:p14="http://schemas.microsoft.com/office/powerpoint/2010/main" val="3190013514"/>
       </p:ext>
     </p:extLst>
   </p:cSld>
@@ -14616,7 +13556,7 @@
         </p:nvSpPr>
         <p:spPr>
           <a:xfrm>
-            <a:off x="311700" y="482701"/>
+            <a:off x="311700" y="421233"/>
             <a:ext cx="8520600" cy="622500"/>
           </a:xfrm>
           <a:prstGeom prst="rect">
@@ -14631,92 +13571,81 @@
           <a:p>
             <a:pPr lvl="0"/>
             <a:r>
+              <a:rPr lang="en-GB" sz="4000" dirty="0" err="1"/>
+              <a:t>Softmax</a:t>
+            </a:r>
+            <a:r>
               <a:rPr lang="en-GB" sz="4000" dirty="0"/>
-              <a:t>Comparison (1)</a:t>
-            </a:r>
+              <a:t> method vs Upper Confidence Bound (1)</a:t>
+            </a:r>
+            <a:endParaRPr sz="4000" dirty="0"/>
           </a:p>
         </p:txBody>
       </p:sp>
-      <p:sp>
-        <p:nvSpPr>
-          <p:cNvPr id="84" name="Google Shape;84;p14"/>
-          <p:cNvSpPr txBox="1">
-            <a:spLocks noGrp="1"/>
-          </p:cNvSpPr>
-          <p:nvPr>
-            <p:ph type="body" idx="1"/>
-          </p:nvPr>
-        </p:nvSpPr>
-        <p:spPr>
-          <a:xfrm>
-            <a:off x="162750" y="1156657"/>
-            <a:ext cx="8818500" cy="5224230"/>
+      <p:pic>
+        <p:nvPicPr>
+          <p:cNvPr id="4" name="Immagine 3">
+            <a:extLst>
+              <a:ext uri="{FF2B5EF4-FFF2-40B4-BE49-F238E27FC236}">
+                <a16:creationId xmlns:a16="http://schemas.microsoft.com/office/drawing/2014/main" id="{D9CA36AE-E18C-03BC-DABF-16CC58B23496}"/>
+              </a:ext>
+            </a:extLst>
+          </p:cNvPr>
+          <p:cNvPicPr>
+            <a:picLocks noChangeAspect="1"/>
+          </p:cNvPicPr>
+          <p:nvPr/>
+        </p:nvPicPr>
+        <p:blipFill>
+          <a:blip r:embed="rId3"/>
+          <a:stretch>
+            <a:fillRect/>
+          </a:stretch>
+        </p:blipFill>
+        <p:spPr>
+          <a:xfrm>
+            <a:off x="66499" y="1163550"/>
+            <a:ext cx="8918235" cy="5453380"/>
           </a:xfrm>
           <a:prstGeom prst="rect">
             <a:avLst/>
           </a:prstGeom>
         </p:spPr>
-        <p:txBody>
-          <a:bodyPr spcFirstLastPara="1" wrap="square" lIns="91425" tIns="91425" rIns="91425" bIns="91425" anchor="t" anchorCtr="0">
-            <a:noAutofit/>
-          </a:bodyPr>
-          <a:lstStyle/>
-          <a:p>
-            <a:r>
-              <a:rPr lang="en-GB" dirty="0"/>
-              <a:t>We can run simulations for all methods in order to compare their performances</a:t>
-            </a:r>
-          </a:p>
-          <a:p>
-            <a:endParaRPr lang="en-GB" dirty="0"/>
-          </a:p>
-          <a:p>
-            <a:r>
-              <a:rPr lang="en-GB" dirty="0"/>
-              <a:t>They all have a parameter!</a:t>
-            </a:r>
-          </a:p>
-          <a:p>
-            <a:pPr lvl="1"/>
-            <a:r>
-              <a:rPr lang="en-GB" dirty="0"/>
-              <a:t>we have to consider their performance as </a:t>
-            </a:r>
-            <a:r>
-              <a:rPr lang="en-GB" b="1" dirty="0"/>
-              <a:t>a function of their parameter</a:t>
-            </a:r>
-          </a:p>
-          <a:p>
-            <a:endParaRPr lang="en-GB" b="1" dirty="0"/>
-          </a:p>
-          <a:p>
-            <a:r>
-              <a:rPr lang="en-GB" b="1" dirty="0"/>
-              <a:t>Parameter study</a:t>
-            </a:r>
-          </a:p>
-          <a:p>
-            <a:pPr lvl="1"/>
-            <a:r>
-              <a:rPr lang="en-GB" dirty="0"/>
-              <a:t>summarize a complete learning curve by its average value over the 1000 steps </a:t>
-            </a:r>
-          </a:p>
-          <a:p>
-            <a:pPr lvl="1"/>
-            <a:r>
-              <a:rPr lang="en-GB" dirty="0"/>
-              <a:t>shows the value as a function of the parameter, on a single scale on the x-axis</a:t>
-            </a:r>
-            <a:endParaRPr lang="en-GB" sz="1100" dirty="0"/>
-          </a:p>
-        </p:txBody>
-      </p:sp>
+      </p:pic>
+      <p:pic>
+        <p:nvPicPr>
+          <p:cNvPr id="5" name="Immagine 4" descr="Immagine che contiene Carattere, Elementi grafici, logo, cerchio&#10;&#10;Descrizione generata automaticamente">
+            <a:extLst>
+              <a:ext uri="{FF2B5EF4-FFF2-40B4-BE49-F238E27FC236}">
+                <a16:creationId xmlns:a16="http://schemas.microsoft.com/office/drawing/2014/main" id="{DCE156B9-D835-B421-1A28-A1C74CBEE595}"/>
+              </a:ext>
+            </a:extLst>
+          </p:cNvPr>
+          <p:cNvPicPr>
+            <a:picLocks noChangeAspect="1"/>
+          </p:cNvPicPr>
+          <p:nvPr/>
+        </p:nvPicPr>
+        <p:blipFill>
+          <a:blip r:embed="rId4"/>
+          <a:stretch>
+            <a:fillRect/>
+          </a:stretch>
+        </p:blipFill>
+        <p:spPr>
+          <a:xfrm>
+            <a:off x="8656536" y="91573"/>
+            <a:ext cx="407258" cy="495579"/>
+          </a:xfrm>
+          <a:prstGeom prst="rect">
+            <a:avLst/>
+          </a:prstGeom>
+        </p:spPr>
+      </p:pic>
     </p:spTree>
     <p:extLst>
       <p:ext uri="{BB962C8B-B14F-4D97-AF65-F5344CB8AC3E}">
-        <p14:creationId xmlns:p14="http://schemas.microsoft.com/office/powerpoint/2010/main" val="1014358788"/>
+        <p14:creationId xmlns:p14="http://schemas.microsoft.com/office/powerpoint/2010/main" val="2800698680"/>
       </p:ext>
     </p:extLst>
   </p:cSld>
@@ -14951,6 +13880,170 @@
   <p:cSld>
     <p:spTree>
       <p:nvGrpSpPr>
+        <p:cNvPr id="1" name="Shape 82">
+          <a:extLst>
+            <a:ext uri="{FF2B5EF4-FFF2-40B4-BE49-F238E27FC236}">
+              <a16:creationId xmlns:a16="http://schemas.microsoft.com/office/drawing/2014/main" id="{D4C573F7-624A-9579-E152-D3ACD8592BC0}"/>
+            </a:ext>
+          </a:extLst>
+        </p:cNvPr>
+        <p:cNvGrpSpPr/>
+        <p:nvPr/>
+      </p:nvGrpSpPr>
+      <p:grpSpPr>
+        <a:xfrm>
+          <a:off x="0" y="0"/>
+          <a:ext cx="0" cy="0"/>
+          <a:chOff x="0" y="0"/>
+          <a:chExt cx="0" cy="0"/>
+        </a:xfrm>
+      </p:grpSpPr>
+      <p:sp>
+        <p:nvSpPr>
+          <p:cNvPr id="83" name="Google Shape;83;p14">
+            <a:extLst>
+              <a:ext uri="{FF2B5EF4-FFF2-40B4-BE49-F238E27FC236}">
+                <a16:creationId xmlns:a16="http://schemas.microsoft.com/office/drawing/2014/main" id="{A869AEC0-1ED9-D84C-A4F2-418944D7A456}"/>
+              </a:ext>
+            </a:extLst>
+          </p:cNvPr>
+          <p:cNvSpPr txBox="1">
+            <a:spLocks noGrp="1"/>
+          </p:cNvSpPr>
+          <p:nvPr>
+            <p:ph type="title" idx="4294967295"/>
+          </p:nvPr>
+        </p:nvSpPr>
+        <p:spPr>
+          <a:xfrm>
+            <a:off x="311700" y="421233"/>
+            <a:ext cx="8520600" cy="622500"/>
+          </a:xfrm>
+          <a:prstGeom prst="rect">
+            <a:avLst/>
+          </a:prstGeom>
+        </p:spPr>
+        <p:txBody>
+          <a:bodyPr spcFirstLastPara="1" wrap="square" lIns="91425" tIns="91425" rIns="91425" bIns="91425" anchor="b" anchorCtr="0">
+            <a:noAutofit/>
+          </a:bodyPr>
+          <a:lstStyle/>
+          <a:p>
+            <a:pPr lvl="0"/>
+            <a:r>
+              <a:rPr lang="en-GB" sz="4000" dirty="0" err="1"/>
+              <a:t>Softmax</a:t>
+            </a:r>
+            <a:r>
+              <a:rPr lang="en-GB" sz="4000" dirty="0"/>
+              <a:t> method vs Upper Confidence Bound (2)</a:t>
+            </a:r>
+          </a:p>
+        </p:txBody>
+      </p:sp>
+      <p:sp>
+        <p:nvSpPr>
+          <p:cNvPr id="84" name="Google Shape;84;p14">
+            <a:extLst>
+              <a:ext uri="{FF2B5EF4-FFF2-40B4-BE49-F238E27FC236}">
+                <a16:creationId xmlns:a16="http://schemas.microsoft.com/office/drawing/2014/main" id="{C8B55FFB-6CA9-F6C5-938F-67A3E986DEF4}"/>
+              </a:ext>
+            </a:extLst>
+          </p:cNvPr>
+          <p:cNvSpPr txBox="1">
+            <a:spLocks noGrp="1"/>
+          </p:cNvSpPr>
+          <p:nvPr>
+            <p:ph type="body" idx="1"/>
+          </p:nvPr>
+        </p:nvSpPr>
+        <p:spPr>
+          <a:xfrm>
+            <a:off x="162750" y="1212537"/>
+            <a:ext cx="8818500" cy="5224230"/>
+          </a:xfrm>
+          <a:prstGeom prst="rect">
+            <a:avLst/>
+          </a:prstGeom>
+        </p:spPr>
+        <p:txBody>
+          <a:bodyPr spcFirstLastPara="1" wrap="square" lIns="91425" tIns="91425" rIns="91425" bIns="91425" anchor="t" anchorCtr="0">
+            <a:noAutofit/>
+          </a:bodyPr>
+          <a:lstStyle/>
+          <a:p>
+            <a:pPr lvl="0"/>
+            <a:r>
+              <a:rPr lang="en-GB" dirty="0"/>
+              <a:t>Both methods reach high rewards quickly and maintain strong long-term performance</a:t>
+            </a:r>
+          </a:p>
+          <a:p>
+            <a:pPr lvl="0"/>
+            <a:r>
+              <a:rPr lang="en-GB" dirty="0"/>
+              <a:t>Outperform </a:t>
+            </a:r>
+            <a:r>
+              <a:rPr lang="it-IT" dirty="0"/>
+              <a:t>epsilon</a:t>
+            </a:r>
+            <a:r>
+              <a:rPr lang="el-GR" dirty="0"/>
+              <a:t>-</a:t>
+            </a:r>
+            <a:r>
+              <a:rPr lang="en-GB" dirty="0"/>
+              <a:t>greedy decay but are </a:t>
+            </a:r>
+            <a:r>
+              <a:rPr lang="en-GB" b="1" dirty="0"/>
+              <a:t>more complex</a:t>
+            </a:r>
+            <a:r>
+              <a:rPr lang="en-GB" dirty="0"/>
+              <a:t> and require </a:t>
+            </a:r>
+            <a:r>
+              <a:rPr lang="en-GB" b="1" dirty="0"/>
+              <a:t>careful parameter tuning</a:t>
+            </a:r>
+            <a:endParaRPr lang="en-GB" dirty="0"/>
+          </a:p>
+          <a:p>
+            <a:pPr lvl="0"/>
+            <a:endParaRPr lang="en-GB" dirty="0"/>
+          </a:p>
+          <a:p>
+            <a:pPr lvl="0"/>
+            <a:endParaRPr lang="en-GB" dirty="0"/>
+          </a:p>
+          <a:p>
+            <a:pPr marL="120650" indent="0">
+              <a:buNone/>
+            </a:pPr>
+            <a:endParaRPr lang="en-GB" sz="1100" dirty="0"/>
+          </a:p>
+        </p:txBody>
+      </p:sp>
+    </p:spTree>
+    <p:extLst>
+      <p:ext uri="{BB962C8B-B14F-4D97-AF65-F5344CB8AC3E}">
+        <p14:creationId xmlns:p14="http://schemas.microsoft.com/office/powerpoint/2010/main" val="1381873"/>
+      </p:ext>
+    </p:extLst>
+  </p:cSld>
+  <p:clrMapOvr>
+    <a:masterClrMapping/>
+  </p:clrMapOvr>
+</p:sld>
+</file>
+
+<file path=ppt/slides/slide31.xml><?xml version="1.0" encoding="utf-8"?>
+<p:sld xmlns:a="http://schemas.openxmlformats.org/drawingml/2006/main" xmlns:r="http://schemas.openxmlformats.org/officeDocument/2006/relationships" xmlns:p="http://schemas.openxmlformats.org/presentationml/2006/main">
+  <p:cSld>
+    <p:spTree>
+      <p:nvGrpSpPr>
         <p:cNvPr id="1" name="Shape 82"/>
         <p:cNvGrpSpPr/>
         <p:nvPr/>
@@ -14975,6 +14068,153 @@
         </p:nvSpPr>
         <p:spPr>
           <a:xfrm>
+            <a:off x="311700" y="482701"/>
+            <a:ext cx="8520600" cy="622500"/>
+          </a:xfrm>
+          <a:prstGeom prst="rect">
+            <a:avLst/>
+          </a:prstGeom>
+        </p:spPr>
+        <p:txBody>
+          <a:bodyPr spcFirstLastPara="1" wrap="square" lIns="91425" tIns="91425" rIns="91425" bIns="91425" anchor="b" anchorCtr="0">
+            <a:noAutofit/>
+          </a:bodyPr>
+          <a:lstStyle/>
+          <a:p>
+            <a:pPr lvl="0"/>
+            <a:r>
+              <a:rPr lang="en-GB" sz="4000" dirty="0"/>
+              <a:t>Comparison (1)</a:t>
+            </a:r>
+          </a:p>
+        </p:txBody>
+      </p:sp>
+      <p:sp>
+        <p:nvSpPr>
+          <p:cNvPr id="84" name="Google Shape;84;p14"/>
+          <p:cNvSpPr txBox="1">
+            <a:spLocks noGrp="1"/>
+          </p:cNvSpPr>
+          <p:nvPr>
+            <p:ph type="body" idx="1"/>
+          </p:nvPr>
+        </p:nvSpPr>
+        <p:spPr>
+          <a:xfrm>
+            <a:off x="162750" y="1156657"/>
+            <a:ext cx="8818500" cy="5224230"/>
+          </a:xfrm>
+          <a:prstGeom prst="rect">
+            <a:avLst/>
+          </a:prstGeom>
+        </p:spPr>
+        <p:txBody>
+          <a:bodyPr spcFirstLastPara="1" wrap="square" lIns="91425" tIns="91425" rIns="91425" bIns="91425" anchor="t" anchorCtr="0">
+            <a:noAutofit/>
+          </a:bodyPr>
+          <a:lstStyle/>
+          <a:p>
+            <a:r>
+              <a:rPr lang="en-GB" dirty="0"/>
+              <a:t>We can run simulations for all methods to compare their performances</a:t>
+            </a:r>
+          </a:p>
+          <a:p>
+            <a:endParaRPr lang="en-GB" dirty="0"/>
+          </a:p>
+          <a:p>
+            <a:r>
+              <a:rPr lang="en-GB" dirty="0"/>
+              <a:t>They all have </a:t>
+            </a:r>
+            <a:r>
+              <a:rPr lang="en-GB" b="1" dirty="0"/>
+              <a:t>parameters</a:t>
+            </a:r>
+            <a:r>
+              <a:rPr lang="en-GB" dirty="0"/>
+              <a:t>!</a:t>
+            </a:r>
+          </a:p>
+          <a:p>
+            <a:pPr lvl="1"/>
+            <a:r>
+              <a:rPr lang="en-GB" dirty="0"/>
+              <a:t>we must consider their performance as </a:t>
+            </a:r>
+            <a:r>
+              <a:rPr lang="en-GB" b="1" dirty="0"/>
+              <a:t>a function of their parameter</a:t>
+            </a:r>
+          </a:p>
+          <a:p>
+            <a:endParaRPr lang="en-GB" b="1" dirty="0"/>
+          </a:p>
+          <a:p>
+            <a:r>
+              <a:rPr lang="en-GB" b="1" dirty="0"/>
+              <a:t>Parameter study</a:t>
+            </a:r>
+          </a:p>
+          <a:p>
+            <a:pPr lvl="1"/>
+            <a:r>
+              <a:rPr lang="en-GB" dirty="0"/>
+              <a:t>summarize a complete learning curve by its average value over the 1000 steps </a:t>
+            </a:r>
+          </a:p>
+          <a:p>
+            <a:pPr lvl="1"/>
+            <a:r>
+              <a:rPr lang="en-GB" dirty="0"/>
+              <a:t>shows the value as a function of the parameter, on a single scale on the x-axis</a:t>
+            </a:r>
+            <a:endParaRPr lang="en-GB" sz="1100" dirty="0"/>
+          </a:p>
+        </p:txBody>
+      </p:sp>
+    </p:spTree>
+    <p:extLst>
+      <p:ext uri="{BB962C8B-B14F-4D97-AF65-F5344CB8AC3E}">
+        <p14:creationId xmlns:p14="http://schemas.microsoft.com/office/powerpoint/2010/main" val="1014358788"/>
+      </p:ext>
+    </p:extLst>
+  </p:cSld>
+  <p:clrMapOvr>
+    <a:masterClrMapping/>
+  </p:clrMapOvr>
+</p:sld>
+</file>
+
+<file path=ppt/slides/slide32.xml><?xml version="1.0" encoding="utf-8"?>
+<p:sld xmlns:a="http://schemas.openxmlformats.org/drawingml/2006/main" xmlns:r="http://schemas.openxmlformats.org/officeDocument/2006/relationships" xmlns:p="http://schemas.openxmlformats.org/presentationml/2006/main">
+  <p:cSld>
+    <p:spTree>
+      <p:nvGrpSpPr>
+        <p:cNvPr id="1" name="Shape 82"/>
+        <p:cNvGrpSpPr/>
+        <p:nvPr/>
+      </p:nvGrpSpPr>
+      <p:grpSpPr>
+        <a:xfrm>
+          <a:off x="0" y="0"/>
+          <a:ext cx="0" cy="0"/>
+          <a:chOff x="0" y="0"/>
+          <a:chExt cx="0" cy="0"/>
+        </a:xfrm>
+      </p:grpSpPr>
+      <p:sp>
+        <p:nvSpPr>
+          <p:cNvPr id="83" name="Google Shape;83;p14"/>
+          <p:cNvSpPr txBox="1">
+            <a:spLocks noGrp="1"/>
+          </p:cNvSpPr>
+          <p:nvPr>
+            <p:ph type="title" idx="4294967295"/>
+          </p:nvPr>
+        </p:nvSpPr>
+        <p:spPr>
+          <a:xfrm>
             <a:off x="311700" y="421233"/>
             <a:ext cx="8520600" cy="622500"/>
           </a:xfrm>
@@ -15119,7 +14359,7 @@
 </p:sld>
 </file>
 
-<file path=ppt/slides/slide31.xml><?xml version="1.0" encoding="utf-8"?>
+<file path=ppt/slides/slide33.xml><?xml version="1.0" encoding="utf-8"?>
 <p:sld xmlns:a="http://schemas.openxmlformats.org/drawingml/2006/main" xmlns:r="http://schemas.openxmlformats.org/officeDocument/2006/relationships" xmlns:p="http://schemas.openxmlformats.org/presentationml/2006/main">
   <p:cSld>
     <p:spTree>
@@ -15272,7 +14512,7 @@
 </p:sld>
 </file>
 
-<file path=ppt/slides/slide32.xml><?xml version="1.0" encoding="utf-8"?>
+<file path=ppt/slides/slide34.xml><?xml version="1.0" encoding="utf-8"?>
 <p:sld xmlns:a="http://schemas.openxmlformats.org/drawingml/2006/main" xmlns:r="http://schemas.openxmlformats.org/officeDocument/2006/relationships" xmlns:p="http://schemas.openxmlformats.org/presentationml/2006/main">
   <p:cSld>
     <p:spTree>
@@ -15792,7 +15032,7 @@
         </p:blipFill>
         <p:spPr>
           <a:xfrm>
-            <a:off x="8661328" y="65196"/>
+            <a:off x="8628671" y="173443"/>
             <a:ext cx="407258" cy="495579"/>
           </a:xfrm>
           <a:prstGeom prst="rect">
@@ -17339,15 +16579,6 @@
 </file>
 
 <file path=customXml/item1.xml><?xml version="1.0" encoding="utf-8"?>
-<?mso-contentType ?>
-<FormTemplates xmlns="http://schemas.microsoft.com/sharepoint/v3/contenttype/forms">
-  <Display>DocumentLibraryForm</Display>
-  <Edit>DocumentLibraryForm</Edit>
-  <New>DocumentLibraryForm</New>
-</FormTemplates>
-</file>
-
-<file path=customXml/item2.xml><?xml version="1.0" encoding="utf-8"?>
 <ct:contentTypeSchema xmlns:ct="http://schemas.microsoft.com/office/2006/metadata/contentType" xmlns:ma="http://schemas.microsoft.com/office/2006/metadata/properties/metaAttributes" ct:_="" ma:_="" ma:contentTypeName="Documento" ma:contentTypeID="0x010100B8FA822B18A0634FB7342CF29752587A" ma:contentTypeVersion="13" ma:contentTypeDescription="Creare un nuovo documento." ma:contentTypeScope="" ma:versionID="5c5a1a1f66437ceed8e2102d49525b77">
   <xsd:schema xmlns:xsd="http://www.w3.org/2001/XMLSchema" xmlns:xs="http://www.w3.org/2001/XMLSchema" xmlns:p="http://schemas.microsoft.com/office/2006/metadata/properties" xmlns:ns2="3bd0d43f-5e5b-43cd-b6fc-691bd77672c6" xmlns:ns3="e9b5433c-2372-4cb7-8bab-09518096b29b" targetNamespace="http://schemas.microsoft.com/office/2006/metadata/properties" ma:root="true" ma:fieldsID="79bbaae61552c66980d55f32a6cab4b6" ns2:_="" ns3:_="">
     <xsd:import namespace="3bd0d43f-5e5b-43cd-b6fc-691bd77672c6"/>
@@ -17554,7 +16785,7 @@
 </ct:contentTypeSchema>
 </file>
 
-<file path=customXml/item3.xml><?xml version="1.0" encoding="utf-8"?>
+<file path=customXml/item2.xml><?xml version="1.0" encoding="utf-8"?>
 <p:properties xmlns:p="http://schemas.microsoft.com/office/2006/metadata/properties" xmlns:xsi="http://www.w3.org/2001/XMLSchema-instance" xmlns:pc="http://schemas.microsoft.com/office/infopath/2007/PartnerControls">
   <documentManagement>
     <TaxCatchAll xmlns="e9b5433c-2372-4cb7-8bab-09518096b29b" xsi:nil="true"/>
@@ -17565,15 +16796,16 @@
 </p:properties>
 </file>
 
-<file path=customXml/itemProps1.xml><?xml version="1.0" encoding="utf-8"?>
-<ds:datastoreItem xmlns:ds="http://schemas.openxmlformats.org/officeDocument/2006/customXml" ds:itemID="{04049D2A-26D3-4CA9-9D0B-A28722B90C51}">
-  <ds:schemaRefs>
-    <ds:schemaRef ds:uri="http://schemas.microsoft.com/sharepoint/v3/contenttype/forms"/>
-  </ds:schemaRefs>
-</ds:datastoreItem>
+<file path=customXml/item3.xml><?xml version="1.0" encoding="utf-8"?>
+<?mso-contentType ?>
+<FormTemplates xmlns="http://schemas.microsoft.com/sharepoint/v3/contenttype/forms">
+  <Display>DocumentLibraryForm</Display>
+  <Edit>DocumentLibraryForm</Edit>
+  <New>DocumentLibraryForm</New>
+</FormTemplates>
 </file>
 
-<file path=customXml/itemProps2.xml><?xml version="1.0" encoding="utf-8"?>
+<file path=customXml/itemProps1.xml><?xml version="1.0" encoding="utf-8"?>
 <ds:datastoreItem xmlns:ds="http://schemas.openxmlformats.org/officeDocument/2006/customXml" ds:itemID="{4FDA61F2-61C4-4051-99D2-6EEBD09B439A}">
   <ds:schemaRefs>
     <ds:schemaRef ds:uri="http://schemas.microsoft.com/office/2006/metadata/contentType"/>
@@ -17592,19 +16824,27 @@
 </ds:datastoreItem>
 </file>
 
-<file path=customXml/itemProps3.xml><?xml version="1.0" encoding="utf-8"?>
+<file path=customXml/itemProps2.xml><?xml version="1.0" encoding="utf-8"?>
 <ds:datastoreItem xmlns:ds="http://schemas.openxmlformats.org/officeDocument/2006/customXml" ds:itemID="{7C707AE4-51BE-4B32-AF0C-8EA8529E9338}">
   <ds:schemaRefs>
+    <ds:schemaRef ds:uri="3bd0d43f-5e5b-43cd-b6fc-691bd77672c6"/>
+    <ds:schemaRef ds:uri="e9b5433c-2372-4cb7-8bab-09518096b29b"/>
+    <ds:schemaRef ds:uri="http://purl.org/dc/elements/1.1/"/>
+    <ds:schemaRef ds:uri="http://schemas.microsoft.com/office/2006/documentManagement/types"/>
+    <ds:schemaRef ds:uri="http://purl.org/dc/terms/"/>
     <ds:schemaRef ds:uri="http://schemas.openxmlformats.org/package/2006/metadata/core-properties"/>
-    <ds:schemaRef ds:uri="http://purl.org/dc/elements/1.1/"/>
-    <ds:schemaRef ds:uri="http://purl.org/dc/terms/"/>
+    <ds:schemaRef ds:uri="http://schemas.microsoft.com/office/2006/metadata/properties"/>
+    <ds:schemaRef ds:uri="http://www.w3.org/XML/1998/namespace"/>
+    <ds:schemaRef ds:uri="http://schemas.microsoft.com/office/infopath/2007/PartnerControls"/>
     <ds:schemaRef ds:uri="http://purl.org/dc/dcmitype/"/>
-    <ds:schemaRef ds:uri="3bd0d43f-5e5b-43cd-b6fc-691bd77672c6"/>
-    <ds:schemaRef ds:uri="http://schemas.microsoft.com/office/2006/documentManagement/types"/>
-    <ds:schemaRef ds:uri="http://www.w3.org/XML/1998/namespace"/>
-    <ds:schemaRef ds:uri="e9b5433c-2372-4cb7-8bab-09518096b29b"/>
-    <ds:schemaRef ds:uri="http://schemas.microsoft.com/office/2006/metadata/properties"/>
-    <ds:schemaRef ds:uri="http://schemas.microsoft.com/office/infopath/2007/PartnerControls"/>
+  </ds:schemaRefs>
+</ds:datastoreItem>
+</file>
+
+<file path=customXml/itemProps3.xml><?xml version="1.0" encoding="utf-8"?>
+<ds:datastoreItem xmlns:ds="http://schemas.openxmlformats.org/officeDocument/2006/customXml" ds:itemID="{04049D2A-26D3-4CA9-9D0B-A28722B90C51}">
+  <ds:schemaRefs>
+    <ds:schemaRef ds:uri="http://schemas.microsoft.com/sharepoint/v3/contenttype/forms"/>
   </ds:schemaRefs>
 </ds:datastoreItem>
 </file>